--- a/MS_Fabric.pptx
+++ b/MS_Fabric.pptx
@@ -5,34 +5,49 @@
     <p:sldMasterId id="2147483648" r:id="rId1"/>
   </p:sldMasterIdLst>
   <p:notesMasterIdLst>
-    <p:notesMasterId r:id="rId28"/>
+    <p:notesMasterId r:id="rId42"/>
   </p:notesMasterIdLst>
   <p:sldIdLst>
-    <p:sldId id="256" r:id="rId3"/>
-    <p:sldId id="262" r:id="rId4"/>
-    <p:sldId id="523" r:id="rId5"/>
-    <p:sldId id="527" r:id="rId6"/>
-    <p:sldId id="524" r:id="rId7"/>
-    <p:sldId id="528" r:id="rId8"/>
-    <p:sldId id="529" r:id="rId9"/>
-    <p:sldId id="530" r:id="rId10"/>
-    <p:sldId id="525" r:id="rId11"/>
-    <p:sldId id="531" r:id="rId12"/>
-    <p:sldId id="532" r:id="rId13"/>
-    <p:sldId id="533" r:id="rId14"/>
-    <p:sldId id="534" r:id="rId15"/>
-    <p:sldId id="535" r:id="rId16"/>
-    <p:sldId id="536" r:id="rId17"/>
-    <p:sldId id="537" r:id="rId18"/>
-    <p:sldId id="538" r:id="rId19"/>
-    <p:sldId id="539" r:id="rId20"/>
-    <p:sldId id="540" r:id="rId21"/>
-    <p:sldId id="541" r:id="rId22"/>
-    <p:sldId id="542" r:id="rId23"/>
-    <p:sldId id="543" r:id="rId24"/>
-    <p:sldId id="544" r:id="rId25"/>
-    <p:sldId id="545" r:id="rId26"/>
-    <p:sldId id="261" r:id="rId27"/>
+    <p:sldId id="256" r:id="rId2"/>
+    <p:sldId id="262" r:id="rId3"/>
+    <p:sldId id="523" r:id="rId4"/>
+    <p:sldId id="527" r:id="rId5"/>
+    <p:sldId id="524" r:id="rId6"/>
+    <p:sldId id="528" r:id="rId7"/>
+    <p:sldId id="529" r:id="rId8"/>
+    <p:sldId id="530" r:id="rId9"/>
+    <p:sldId id="525" r:id="rId10"/>
+    <p:sldId id="531" r:id="rId11"/>
+    <p:sldId id="532" r:id="rId12"/>
+    <p:sldId id="533" r:id="rId13"/>
+    <p:sldId id="534" r:id="rId14"/>
+    <p:sldId id="535" r:id="rId15"/>
+    <p:sldId id="536" r:id="rId16"/>
+    <p:sldId id="537" r:id="rId17"/>
+    <p:sldId id="538" r:id="rId18"/>
+    <p:sldId id="539" r:id="rId19"/>
+    <p:sldId id="540" r:id="rId20"/>
+    <p:sldId id="541" r:id="rId21"/>
+    <p:sldId id="542" r:id="rId22"/>
+    <p:sldId id="543" r:id="rId23"/>
+    <p:sldId id="546" r:id="rId24"/>
+    <p:sldId id="547" r:id="rId25"/>
+    <p:sldId id="548" r:id="rId26"/>
+    <p:sldId id="544" r:id="rId27"/>
+    <p:sldId id="545" r:id="rId28"/>
+    <p:sldId id="549" r:id="rId29"/>
+    <p:sldId id="550" r:id="rId30"/>
+    <p:sldId id="551" r:id="rId31"/>
+    <p:sldId id="552" r:id="rId32"/>
+    <p:sldId id="553" r:id="rId33"/>
+    <p:sldId id="554" r:id="rId34"/>
+    <p:sldId id="555" r:id="rId35"/>
+    <p:sldId id="556" r:id="rId36"/>
+    <p:sldId id="557" r:id="rId37"/>
+    <p:sldId id="558" r:id="rId38"/>
+    <p:sldId id="559" r:id="rId39"/>
+    <p:sldId id="560" r:id="rId40"/>
+    <p:sldId id="261" r:id="rId41"/>
   </p:sldIdLst>
   <p:sldSz cx="9144000" cy="5143500" type="screen16x9"/>
   <p:notesSz cx="9144000" cy="5143500"/>
@@ -142,6 +157,7 @@
           <a:p>
             <a:fld id="{7947DE22-9E91-4192-903F-3C4AE46FA73D}" type="datetimeFigureOut">
               <a:rPr lang="en-US" smtClean="0"/>
+              <a:t>10/1/2026</a:t>
             </a:fld>
             <a:endParaRPr lang="en-US"/>
           </a:p>
@@ -207,42 +223,37 @@
           <a:p>
             <a:pPr lvl="0"/>
             <a:r>
-              <a:rPr lang="en-US" smtClean="0"/>
+              <a:rPr lang="en-US"/>
               <a:t>Click to edit Master text styles</a:t>
             </a:r>
-            <a:endParaRPr lang="en-US" smtClean="0"/>
           </a:p>
           <a:p>
             <a:pPr lvl="1"/>
             <a:r>
-              <a:rPr lang="en-US" smtClean="0"/>
+              <a:rPr lang="en-US"/>
               <a:t>Second level</a:t>
             </a:r>
-            <a:endParaRPr lang="en-US" smtClean="0"/>
           </a:p>
           <a:p>
             <a:pPr lvl="2"/>
             <a:r>
-              <a:rPr lang="en-US" smtClean="0"/>
+              <a:rPr lang="en-US"/>
               <a:t>Third level</a:t>
             </a:r>
-            <a:endParaRPr lang="en-US" smtClean="0"/>
           </a:p>
           <a:p>
             <a:pPr lvl="3"/>
             <a:r>
-              <a:rPr lang="en-US" smtClean="0"/>
+              <a:rPr lang="en-US"/>
               <a:t>Fourth level</a:t>
             </a:r>
-            <a:endParaRPr lang="en-US" smtClean="0"/>
           </a:p>
           <a:p>
             <a:pPr lvl="4"/>
             <a:r>
-              <a:rPr lang="en-US" smtClean="0"/>
+              <a:rPr lang="en-US"/>
               <a:t>Fifth level</a:t>
             </a:r>
-            <a:endParaRPr lang="en-US"/>
           </a:p>
         </p:txBody>
       </p:sp>
@@ -306,6 +317,7 @@
           <a:p>
             <a:fld id="{9297C5A8-19BE-4F99-84F1-2DBB255A6B1E}" type="slidenum">
               <a:rPr lang="en-US" smtClean="0"/>
+              <a:t>‹#›</a:t>
             </a:fld>
             <a:endParaRPr lang="en-US"/>
           </a:p>
@@ -460,7 +472,9 @@
               </a:defRPr>
             </a:lvl1pPr>
           </a:lstStyle>
-          <a:p/>
+          <a:p>
+            <a:endParaRPr/>
+          </a:p>
         </p:txBody>
       </p:sp>
       <p:sp>
@@ -495,7 +509,9 @@
               </a:defRPr>
             </a:lvl1pPr>
           </a:lstStyle>
-          <a:p/>
+          <a:p>
+            <a:endParaRPr/>
+          </a:p>
         </p:txBody>
       </p:sp>
       <p:sp>
@@ -522,7 +538,9 @@
               </a:defRPr>
             </a:lvl1pPr>
           </a:lstStyle>
-          <a:p/>
+          <a:p>
+            <a:endParaRPr/>
+          </a:p>
         </p:txBody>
       </p:sp>
       <p:sp>
@@ -552,6 +570,7 @@
           <a:p>
             <a:fld id="{1D8BD707-D9CF-40AE-B4C6-C98DA3205C09}" type="datetimeFigureOut">
               <a:rPr lang="en-US"/>
+              <a:t>10/1/2026</a:t>
             </a:fld>
             <a:endParaRPr lang="en-US"/>
           </a:p>
@@ -584,6 +603,7 @@
           <a:p>
             <a:fld id="{B6F15528-21DE-4FAA-801E-634DDDAF4B2B}" type="slidenum">
               <a:rPr/>
+              <a:t>‹#›</a:t>
             </a:fld>
             <a:endParaRPr/>
           </a:p>
@@ -638,7 +658,9 @@
               </a:defRPr>
             </a:lvl1pPr>
           </a:lstStyle>
-          <a:p/>
+          <a:p>
+            <a:endParaRPr/>
+          </a:p>
         </p:txBody>
       </p:sp>
       <p:sp>
@@ -663,7 +685,9 @@
               </a:defRPr>
             </a:lvl1pPr>
           </a:lstStyle>
-          <a:p/>
+          <a:p>
+            <a:endParaRPr/>
+          </a:p>
         </p:txBody>
       </p:sp>
       <p:sp>
@@ -690,7 +714,9 @@
               </a:defRPr>
             </a:lvl1pPr>
           </a:lstStyle>
-          <a:p/>
+          <a:p>
+            <a:endParaRPr/>
+          </a:p>
         </p:txBody>
       </p:sp>
       <p:sp>
@@ -720,6 +746,7 @@
           <a:p>
             <a:fld id="{1D8BD707-D9CF-40AE-B4C6-C98DA3205C09}" type="datetimeFigureOut">
               <a:rPr lang="en-US"/>
+              <a:t>10/1/2026</a:t>
             </a:fld>
             <a:endParaRPr lang="en-US"/>
           </a:p>
@@ -752,6 +779,7 @@
           <a:p>
             <a:fld id="{B6F15528-21DE-4FAA-801E-634DDDAF4B2B}" type="slidenum">
               <a:rPr/>
+              <a:t>‹#›</a:t>
             </a:fld>
             <a:endParaRPr/>
           </a:p>
@@ -806,7 +834,9 @@
               </a:defRPr>
             </a:lvl1pPr>
           </a:lstStyle>
-          <a:p/>
+          <a:p>
+            <a:endParaRPr/>
+          </a:p>
         </p:txBody>
       </p:sp>
       <p:sp>
@@ -837,7 +867,9 @@
               <a:defRPr/>
             </a:lvl1pPr>
           </a:lstStyle>
-          <a:p/>
+          <a:p>
+            <a:endParaRPr/>
+          </a:p>
         </p:txBody>
       </p:sp>
       <p:sp>
@@ -868,7 +900,9 @@
               <a:defRPr/>
             </a:lvl1pPr>
           </a:lstStyle>
-          <a:p/>
+          <a:p>
+            <a:endParaRPr/>
+          </a:p>
         </p:txBody>
       </p:sp>
       <p:sp>
@@ -895,7 +929,9 @@
               </a:defRPr>
             </a:lvl1pPr>
           </a:lstStyle>
-          <a:p/>
+          <a:p>
+            <a:endParaRPr/>
+          </a:p>
         </p:txBody>
       </p:sp>
       <p:sp>
@@ -925,6 +961,7 @@
           <a:p>
             <a:fld id="{1D8BD707-D9CF-40AE-B4C6-C98DA3205C09}" type="datetimeFigureOut">
               <a:rPr lang="en-US"/>
+              <a:t>10/1/2026</a:t>
             </a:fld>
             <a:endParaRPr lang="en-US"/>
           </a:p>
@@ -957,6 +994,7 @@
           <a:p>
             <a:fld id="{B6F15528-21DE-4FAA-801E-634DDDAF4B2B}" type="slidenum">
               <a:rPr/>
+              <a:t>‹#›</a:t>
             </a:fld>
             <a:endParaRPr/>
           </a:p>
@@ -971,7 +1009,7 @@
 </file>
 
 <file path=ppt/slideLayouts/slideLayout4.xml><?xml version="1.0" encoding="utf-8"?>
-<p:sldLayout xmlns:a="http://schemas.openxmlformats.org/drawingml/2006/main" xmlns:r="http://schemas.openxmlformats.org/officeDocument/2006/relationships" xmlns:p="http://schemas.openxmlformats.org/presentationml/2006/main" type="obj" preserve="1" showMasterSp="0">
+<p:sldLayout xmlns:a="http://schemas.openxmlformats.org/drawingml/2006/main" xmlns:r="http://schemas.openxmlformats.org/officeDocument/2006/relationships" xmlns:p="http://schemas.openxmlformats.org/presentationml/2006/main" showMasterSp="0" type="obj" preserve="1">
   <p:cSld name="Title Only">
     <p:bg>
       <p:bgPr>
@@ -1040,7 +1078,9 @@
         <p:txBody>
           <a:bodyPr wrap="square" lIns="0" tIns="0" rIns="0" bIns="0" rtlCol="0"/>
           <a:lstStyle/>
-          <a:p/>
+          <a:p>
+            <a:endParaRPr/>
+          </a:p>
         </p:txBody>
       </p:sp>
       <p:sp>
@@ -1067,7 +1107,9 @@
               </a:defRPr>
             </a:lvl1pPr>
           </a:lstStyle>
-          <a:p/>
+          <a:p>
+            <a:endParaRPr/>
+          </a:p>
         </p:txBody>
       </p:sp>
       <p:sp>
@@ -1094,7 +1136,9 @@
               </a:defRPr>
             </a:lvl1pPr>
           </a:lstStyle>
-          <a:p/>
+          <a:p>
+            <a:endParaRPr/>
+          </a:p>
         </p:txBody>
       </p:sp>
       <p:sp>
@@ -1124,6 +1168,7 @@
           <a:p>
             <a:fld id="{1D8BD707-D9CF-40AE-B4C6-C98DA3205C09}" type="datetimeFigureOut">
               <a:rPr lang="en-US"/>
+              <a:t>10/1/2026</a:t>
             </a:fld>
             <a:endParaRPr lang="en-US"/>
           </a:p>
@@ -1156,6 +1201,7 @@
           <a:p>
             <a:fld id="{B6F15528-21DE-4FAA-801E-634DDDAF4B2B}" type="slidenum">
               <a:rPr/>
+              <a:t>‹#›</a:t>
             </a:fld>
             <a:endParaRPr/>
           </a:p>
@@ -1210,7 +1256,9 @@
               </a:defRPr>
             </a:lvl1pPr>
           </a:lstStyle>
-          <a:p/>
+          <a:p>
+            <a:endParaRPr/>
+          </a:p>
         </p:txBody>
       </p:sp>
       <p:sp>
@@ -1240,6 +1288,7 @@
           <a:p>
             <a:fld id="{1D8BD707-D9CF-40AE-B4C6-C98DA3205C09}" type="datetimeFigureOut">
               <a:rPr lang="en-US"/>
+              <a:t>10/1/2026</a:t>
             </a:fld>
             <a:endParaRPr lang="en-US"/>
           </a:p>
@@ -1272,6 +1321,7 @@
           <a:p>
             <a:fld id="{B6F15528-21DE-4FAA-801E-634DDDAF4B2B}" type="slidenum">
               <a:rPr/>
+              <a:t>‹#›</a:t>
             </a:fld>
             <a:endParaRPr/>
           </a:p>
@@ -1344,7 +1394,9 @@
               </a:defRPr>
             </a:lvl1pPr>
           </a:lstStyle>
-          <a:p/>
+          <a:p>
+            <a:endParaRPr/>
+          </a:p>
         </p:txBody>
       </p:sp>
       <p:sp>
@@ -1379,7 +1431,9 @@
               </a:defRPr>
             </a:lvl1pPr>
           </a:lstStyle>
-          <a:p/>
+          <a:p>
+            <a:endParaRPr/>
+          </a:p>
         </p:txBody>
       </p:sp>
       <p:sp>
@@ -1416,7 +1470,9 @@
               </a:defRPr>
             </a:lvl1pPr>
           </a:lstStyle>
-          <a:p/>
+          <a:p>
+            <a:endParaRPr/>
+          </a:p>
         </p:txBody>
       </p:sp>
       <p:sp>
@@ -1456,6 +1512,7 @@
           <a:p>
             <a:fld id="{1D8BD707-D9CF-40AE-B4C6-C98DA3205C09}" type="datetimeFigureOut">
               <a:rPr lang="en-US"/>
+              <a:t>10/1/2026</a:t>
             </a:fld>
             <a:endParaRPr lang="en-US"/>
           </a:p>
@@ -1498,6 +1555,7 @@
           <a:p>
             <a:fld id="{B6F15528-21DE-4FAA-801E-634DDDAF4B2B}" type="slidenum">
               <a:rPr/>
+              <a:t>‹#›</a:t>
             </a:fld>
             <a:endParaRPr/>
           </a:p>
@@ -1719,7 +1777,9 @@
         <p:txBody>
           <a:bodyPr wrap="square" lIns="0" tIns="0" rIns="0" bIns="0" rtlCol="0"/>
           <a:lstStyle/>
-          <a:p/>
+          <a:p>
+            <a:endParaRPr/>
+          </a:p>
         </p:txBody>
       </p:sp>
       <p:pic>
@@ -1729,7 +1789,7 @@
           <p:nvPr/>
         </p:nvPicPr>
         <p:blipFill>
-          <a:blip r:embed="rId1" cstate="print"/>
+          <a:blip r:embed="rId2" cstate="print"/>
           <a:stretch>
             <a:fillRect/>
           </a:stretch>
@@ -1774,7 +1834,7 @@
               </a:spcBef>
             </a:pPr>
             <a:r>
-              <a:rPr lang="en-US" altLang="en-IN" sz="3700" b="1" spc="220" dirty="0" smtClean="0">
+              <a:rPr lang="en-US" altLang="en-IN" sz="3700" b="1" spc="220" dirty="0">
                 <a:solidFill>
                   <a:srgbClr val="FFFFFF"/>
                 </a:solidFill>
@@ -1783,13 +1843,6 @@
               </a:rPr>
               <a:t>Fabric</a:t>
             </a:r>
-            <a:endParaRPr lang="en-US" altLang="en-IN" sz="3700" b="1" spc="220" dirty="0" smtClean="0">
-              <a:solidFill>
-                <a:srgbClr val="FFFFFF"/>
-              </a:solidFill>
-              <a:latin typeface="Calibri" panose="020F0502020204030204"/>
-              <a:cs typeface="Calibri" panose="020F0502020204030204"/>
-            </a:endParaRPr>
           </a:p>
         </p:txBody>
       </p:sp>
@@ -1923,7 +1976,6 @@
               <a:rPr lang="en-US" altLang="en-GB" dirty="0"/>
               <a:t>A Workspace is a logical container where Fabric items are created, stored, and managed.</a:t>
             </a:r>
-            <a:endParaRPr lang="en-US" altLang="en-GB" dirty="0"/>
           </a:p>
           <a:p>
             <a:pPr lvl="0">
@@ -1943,7 +1995,6 @@
               <a:rPr lang="en-US" altLang="en-GB" dirty="0"/>
               <a:t>Workspace: SalesAnalytics</a:t>
             </a:r>
-            <a:endParaRPr lang="en-US" altLang="en-GB" dirty="0"/>
           </a:p>
           <a:p>
             <a:pPr lvl="0">
@@ -1955,7 +2006,6 @@
               <a:rPr lang="en-US" altLang="en-US" dirty="0"/>
               <a:t>│</a:t>
             </a:r>
-            <a:endParaRPr lang="en-US" altLang="en-US" dirty="0"/>
           </a:p>
           <a:p>
             <a:pPr lvl="0">
@@ -1971,7 +2021,6 @@
               <a:rPr lang="en-US" altLang="en-GB" dirty="0"/>
               <a:t> Lakehouse</a:t>
             </a:r>
-            <a:endParaRPr lang="en-US" altLang="en-GB" dirty="0"/>
           </a:p>
           <a:p>
             <a:pPr lvl="0">
@@ -1987,7 +2036,6 @@
               <a:rPr lang="en-US" altLang="en-GB" dirty="0"/>
               <a:t> Warehouse</a:t>
             </a:r>
-            <a:endParaRPr lang="en-US" altLang="en-GB" dirty="0"/>
           </a:p>
           <a:p>
             <a:pPr lvl="0">
@@ -2003,7 +2051,6 @@
               <a:rPr lang="en-US" altLang="en-GB" dirty="0"/>
               <a:t> Data Pipeline</a:t>
             </a:r>
-            <a:endParaRPr lang="en-US" altLang="en-GB" dirty="0"/>
           </a:p>
           <a:p>
             <a:pPr lvl="0">
@@ -2019,7 +2066,6 @@
               <a:rPr lang="en-US" altLang="en-GB" dirty="0"/>
               <a:t> Dataflow Gen2</a:t>
             </a:r>
-            <a:endParaRPr lang="en-US" altLang="en-GB" dirty="0"/>
           </a:p>
           <a:p>
             <a:pPr lvl="0">
@@ -2035,7 +2081,6 @@
               <a:rPr lang="en-US" altLang="en-GB" dirty="0"/>
               <a:t> Notebook</a:t>
             </a:r>
-            <a:endParaRPr lang="en-US" altLang="en-GB" dirty="0"/>
           </a:p>
           <a:p>
             <a:pPr lvl="0">
@@ -2051,7 +2096,6 @@
               <a:rPr lang="en-US" altLang="en-GB" dirty="0"/>
               <a:t> Semantic Model</a:t>
             </a:r>
-            <a:endParaRPr lang="en-US" altLang="en-GB" dirty="0"/>
           </a:p>
           <a:p>
             <a:pPr lvl="0">
@@ -2067,7 +2111,6 @@
               <a:rPr lang="en-US" altLang="en-GB" dirty="0"/>
               <a:t> Power BI Report</a:t>
             </a:r>
-            <a:endParaRPr lang="en-US" altLang="en-GB" dirty="0"/>
           </a:p>
         </p:txBody>
       </p:sp>
@@ -2076,13 +2119,6 @@
   <p:clrMapOvr>
     <a:masterClrMapping/>
   </p:clrMapOvr>
-  <p:timing>
-    <p:tnLst>
-      <p:par>
-        <p:cTn id="1" dur="indefinite" restart="never" nodeType="tmRoot"/>
-      </p:par>
-    </p:tnLst>
-  </p:timing>
 </p:sld>
 </file>
 
@@ -2127,7 +2163,6 @@
               <a:rPr lang="en-US" altLang="en-GB" sz="2000" dirty="0"/>
               <a:t>For example:</a:t>
             </a:r>
-            <a:endParaRPr lang="en-US" altLang="en-GB" sz="2000" dirty="0"/>
           </a:p>
         </p:txBody>
       </p:sp>
@@ -2140,7 +2175,7 @@
           <p:nvPr/>
         </p:nvPicPr>
         <p:blipFill>
-          <a:blip r:embed="rId1"/>
+          <a:blip r:embed="rId2"/>
           <a:stretch>
             <a:fillRect/>
           </a:stretch>
@@ -2174,6 +2209,7 @@
           <a:bodyPr>
             <a:spAutoFit/>
           </a:bodyPr>
+          <a:lstStyle/>
           <a:p>
             <a:pPr>
               <a:spcAft>
@@ -2187,10 +2223,6 @@
               </a:rPr>
               <a:t>Workspace is also important for</a:t>
             </a:r>
-            <a:endParaRPr lang="en-US" altLang="zh-CN" sz="1800" b="0">
-              <a:latin typeface="+mn-lt"/>
-              <a:cs typeface="+mn-lt"/>
-            </a:endParaRPr>
           </a:p>
           <a:p>
             <a:pPr lvl="1">
@@ -2204,10 +2236,6 @@
               </a:rPr>
               <a:t> Collaboration </a:t>
             </a:r>
-            <a:endParaRPr lang="en-US" altLang="zh-CN" sz="1800">
-              <a:latin typeface="+mn-lt"/>
-              <a:cs typeface="+mn-lt"/>
-            </a:endParaRPr>
           </a:p>
           <a:p>
             <a:pPr lvl="1">
@@ -2221,10 +2249,6 @@
               </a:rPr>
               <a:t> Security </a:t>
             </a:r>
-            <a:endParaRPr lang="en-US" altLang="zh-CN" sz="1800">
-              <a:latin typeface="+mn-lt"/>
-              <a:cs typeface="+mn-lt"/>
-            </a:endParaRPr>
           </a:p>
           <a:p>
             <a:pPr lvl="1">
@@ -2238,10 +2262,6 @@
               </a:rPr>
               <a:t> Permissions </a:t>
             </a:r>
-            <a:endParaRPr lang="en-US" altLang="zh-CN" sz="1800">
-              <a:latin typeface="+mn-lt"/>
-              <a:cs typeface="+mn-lt"/>
-            </a:endParaRPr>
           </a:p>
           <a:p>
             <a:pPr lvl="1">
@@ -2255,10 +2275,6 @@
               </a:rPr>
               <a:t> Development </a:t>
             </a:r>
-            <a:endParaRPr lang="en-US" altLang="zh-CN" sz="1800">
-              <a:latin typeface="+mn-lt"/>
-              <a:cs typeface="+mn-lt"/>
-            </a:endParaRPr>
           </a:p>
           <a:p>
             <a:pPr lvl="1">
@@ -2272,10 +2288,6 @@
               </a:rPr>
               <a:t> Deployment </a:t>
             </a:r>
-            <a:endParaRPr lang="en-US" altLang="zh-CN" sz="1800">
-              <a:latin typeface="+mn-lt"/>
-              <a:cs typeface="+mn-lt"/>
-            </a:endParaRPr>
           </a:p>
           <a:p>
             <a:pPr lvl="1">
@@ -2289,10 +2301,6 @@
               </a:rPr>
               <a:t> Organizing Fabric items</a:t>
             </a:r>
-            <a:endParaRPr lang="en-US" altLang="zh-CN" sz="1800">
-              <a:latin typeface="+mn-lt"/>
-              <a:cs typeface="+mn-lt"/>
-            </a:endParaRPr>
           </a:p>
         </p:txBody>
       </p:sp>
@@ -2301,13 +2309,6 @@
   <p:clrMapOvr>
     <a:masterClrMapping/>
   </p:clrMapOvr>
-  <p:timing>
-    <p:tnLst>
-      <p:par>
-        <p:cTn id="1" dur="indefinite" restart="never" nodeType="tmRoot"/>
-      </p:par>
-    </p:tnLst>
-  </p:timing>
 </p:sld>
 </file>
 
@@ -2377,19 +2378,18 @@
           <a:bodyPr>
             <a:noAutofit/>
           </a:bodyPr>
+          <a:lstStyle/>
           <a:p>
             <a:r>
               <a:rPr lang="en-US" altLang="zh-CN" sz="1600"/>
               <a:t>When you create a Lakehouse, Fabric provides a SQL Analytics Endpoint that allows you to query the Lakehouse tables using SQL.</a:t>
             </a:r>
-            <a:endParaRPr lang="en-US" altLang="zh-CN" sz="1600"/>
           </a:p>
           <a:p>
             <a:r>
               <a:rPr lang="en-US" altLang="zh-CN" sz="1600"/>
               <a:t>For example:</a:t>
             </a:r>
-            <a:endParaRPr lang="en-US" altLang="zh-CN" sz="1600"/>
           </a:p>
           <a:p>
             <a:endParaRPr lang="en-US" altLang="zh-CN" sz="1600"/>
@@ -2399,14 +2399,12 @@
               <a:rPr lang="en-US" altLang="en-GB" sz="1600"/>
               <a:t>SELECT *</a:t>
             </a:r>
-            <a:endParaRPr lang="en-US" altLang="en-GB" sz="1600"/>
           </a:p>
           <a:p>
             <a:r>
               <a:rPr lang="en-US" altLang="en-GB" sz="1600"/>
               <a:t>FROM Customers;</a:t>
             </a:r>
-            <a:endParaRPr lang="en-US" altLang="en-GB" sz="1600"/>
           </a:p>
         </p:txBody>
       </p:sp>
@@ -2419,7 +2417,7 @@
           <p:nvPr/>
         </p:nvPicPr>
         <p:blipFill>
-          <a:blip r:embed="rId1"/>
+          <a:blip r:embed="rId2"/>
           <a:stretch>
             <a:fillRect/>
           </a:stretch>
@@ -2439,13 +2437,6 @@
   <p:clrMapOvr>
     <a:masterClrMapping/>
   </p:clrMapOvr>
-  <p:timing>
-    <p:tnLst>
-      <p:par>
-        <p:cTn id="1" dur="indefinite" restart="never" nodeType="tmRoot"/>
-      </p:par>
-    </p:tnLst>
-  </p:timing>
 </p:sld>
 </file>
 
@@ -2515,12 +2506,12 @@
           <a:bodyPr>
             <a:noAutofit/>
           </a:bodyPr>
+          <a:lstStyle/>
           <a:p>
             <a:r>
               <a:rPr lang="en-US" altLang="en-GB" sz="1600"/>
               <a:t>A Fabric Warehouse is a relational data warehouse designed primarily for SQL-based analytical workloads.</a:t>
             </a:r>
-            <a:endParaRPr lang="en-US" altLang="en-GB" sz="1600"/>
           </a:p>
           <a:p>
             <a:endParaRPr lang="en-US" altLang="en-GB" sz="1600"/>
@@ -2530,7 +2521,6 @@
               <a:rPr lang="en-US" altLang="en-GB" sz="1600"/>
               <a:t>Example:</a:t>
             </a:r>
-            <a:endParaRPr lang="en-US" altLang="en-GB" sz="1600"/>
           </a:p>
           <a:p>
             <a:pPr marL="285750" lvl="4" indent="-285750">
@@ -2541,7 +2531,6 @@
               <a:rPr lang="en-US" altLang="en-GB" sz="1600"/>
               <a:t>Sales</a:t>
             </a:r>
-            <a:endParaRPr lang="en-US" altLang="en-GB" sz="1600"/>
           </a:p>
           <a:p>
             <a:pPr marL="285750" lvl="4" indent="-285750">
@@ -2552,7 +2541,6 @@
               <a:rPr lang="en-US" altLang="en-GB" sz="1600"/>
               <a:t>Customer</a:t>
             </a:r>
-            <a:endParaRPr lang="en-US" altLang="en-GB" sz="1600"/>
           </a:p>
           <a:p>
             <a:pPr marL="285750" lvl="4" indent="-285750">
@@ -2563,7 +2551,6 @@
               <a:rPr lang="en-US" altLang="en-GB" sz="1600"/>
               <a:t>Product</a:t>
             </a:r>
-            <a:endParaRPr lang="en-US" altLang="en-GB" sz="1600"/>
           </a:p>
           <a:p>
             <a:pPr marL="285750" lvl="4" indent="-285750">
@@ -2574,7 +2561,6 @@
               <a:rPr lang="en-US" altLang="en-GB" sz="1600"/>
               <a:t>Date</a:t>
             </a:r>
-            <a:endParaRPr lang="en-US" altLang="en-GB" sz="1600"/>
           </a:p>
           <a:p>
             <a:pPr lvl="4"/>
@@ -2586,7 +2572,6 @@
               <a:rPr lang="en-US" altLang="en-GB" sz="1600"/>
               <a:t>Warehouse is suitable for</a:t>
             </a:r>
-            <a:endParaRPr lang="en-US" altLang="en-GB" sz="1600"/>
           </a:p>
           <a:p>
             <a:pPr marL="800100" lvl="6" indent="-342900">
@@ -2597,7 +2582,6 @@
               <a:rPr lang="en-US" altLang="en-GB" sz="1600"/>
               <a:t>Structured data</a:t>
             </a:r>
-            <a:endParaRPr lang="en-US" altLang="en-GB" sz="1600"/>
           </a:p>
           <a:p>
             <a:pPr marL="800100" lvl="6" indent="-342900">
@@ -2608,7 +2592,6 @@
               <a:rPr lang="en-US" altLang="en-GB" sz="1600"/>
               <a:t>SQL developers</a:t>
             </a:r>
-            <a:endParaRPr lang="en-US" altLang="en-GB" sz="1600"/>
           </a:p>
           <a:p>
             <a:pPr marL="800100" lvl="6" indent="-342900">
@@ -2619,7 +2602,6 @@
               <a:rPr lang="en-US" altLang="en-GB" sz="1600"/>
               <a:t>Dimensional modeling</a:t>
             </a:r>
-            <a:endParaRPr lang="en-US" altLang="en-GB" sz="1600"/>
           </a:p>
           <a:p>
             <a:pPr marL="800100" lvl="6" indent="-342900">
@@ -2630,7 +2612,6 @@
               <a:rPr lang="en-US" altLang="en-GB" sz="1600"/>
               <a:t>Star schemas</a:t>
             </a:r>
-            <a:endParaRPr lang="en-US" altLang="en-GB" sz="1600"/>
           </a:p>
           <a:p>
             <a:pPr marL="800100" lvl="6" indent="-342900">
@@ -2641,7 +2622,6 @@
               <a:rPr lang="en-US" altLang="en-GB" sz="1600"/>
               <a:t>BI reporting</a:t>
             </a:r>
-            <a:endParaRPr lang="en-US" altLang="en-GB" sz="1600"/>
           </a:p>
           <a:p>
             <a:pPr marL="800100" lvl="6" indent="-342900">
@@ -2652,7 +2632,6 @@
               <a:rPr lang="en-US" altLang="en-GB" sz="1600"/>
               <a:t>Analytical SQL</a:t>
             </a:r>
-            <a:endParaRPr lang="en-US" altLang="en-GB" sz="1600"/>
           </a:p>
         </p:txBody>
       </p:sp>
@@ -2661,13 +2640,6 @@
   <p:clrMapOvr>
     <a:masterClrMapping/>
   </p:clrMapOvr>
-  <p:timing>
-    <p:tnLst>
-      <p:par>
-        <p:cTn id="1" dur="indefinite" restart="never" nodeType="tmRoot"/>
-      </p:par>
-    </p:tnLst>
-  </p:timing>
 </p:sld>
 </file>
 
@@ -2712,7 +2684,6 @@
               <a:rPr lang="en-US" altLang="en-GB" sz="2000" dirty="0"/>
               <a:t>Lakehouse vs Warehouse</a:t>
             </a:r>
-            <a:endParaRPr lang="en-US" altLang="en-GB" sz="2000" dirty="0"/>
           </a:p>
         </p:txBody>
       </p:sp>
@@ -2731,22 +2702,34 @@
             <a:tbl>
               <a:tblPr/>
               <a:tblGrid>
-                <a:gridCol w="3931920"/>
-                <a:gridCol w="3931920"/>
+                <a:gridCol w="3931920">
+                  <a:extLst>
+                    <a:ext uri="{9D8B030D-6E8A-4147-A177-3AD203B41FA5}">
+                      <a16:colId xmlns:a16="http://schemas.microsoft.com/office/drawing/2014/main" val="20000"/>
+                    </a:ext>
+                  </a:extLst>
+                </a:gridCol>
+                <a:gridCol w="3931920">
+                  <a:extLst>
+                    <a:ext uri="{9D8B030D-6E8A-4147-A177-3AD203B41FA5}">
+                      <a16:colId xmlns:a16="http://schemas.microsoft.com/office/drawing/2014/main" val="20001"/>
+                    </a:ext>
+                  </a:extLst>
+                </a:gridCol>
               </a:tblGrid>
               <a:tr h="0">
                 <a:tc>
                   <a:txBody>
                     <a:bodyPr/>
+                    <a:lstStyle/>
                     <a:p>
                       <a:r>
                         <a:rPr lang="en-US" altLang="zh-CN" sz="1800"/>
                         <a:t>Lakehouse</a:t>
                       </a:r>
-                      <a:endParaRPr lang="en-US" altLang="zh-CN" sz="1800"/>
                     </a:p>
                   </a:txBody>
-                  <a:tcPr marL="0" marR="0" marT="0" marB="0" anchor="ctr" anchorCtr="0">
+                  <a:tcPr marL="0" marR="0" marT="0" marB="0" anchor="ctr">
                     <a:lnL w="12700">
                       <a:solidFill>
                         <a:schemeClr val="tx1"/>
@@ -2783,15 +2766,15 @@
                 <a:tc>
                   <a:txBody>
                     <a:bodyPr/>
+                    <a:lstStyle/>
                     <a:p>
                       <a:r>
                         <a:rPr lang="en-US" altLang="zh-CN" sz="1800"/>
                         <a:t>Warehouse</a:t>
                       </a:r>
-                      <a:endParaRPr lang="en-US" altLang="zh-CN" sz="1800"/>
                     </a:p>
                   </a:txBody>
-                  <a:tcPr marL="0" marR="0" marT="0" marB="0" anchor="ctr" anchorCtr="0">
+                  <a:tcPr marL="0" marR="0" marT="0" marB="0" anchor="ctr">
                     <a:lnL w="12700">
                       <a:solidFill>
                         <a:schemeClr val="tx1"/>
@@ -2819,20 +2802,25 @@
                     <a:noFill/>
                   </a:tcPr>
                 </a:tc>
+                <a:extLst>
+                  <a:ext uri="{0D108BD9-81ED-4DB2-BD59-A6C34878D82A}">
+                    <a16:rowId xmlns:a16="http://schemas.microsoft.com/office/drawing/2014/main" val="10000"/>
+                  </a:ext>
+                </a:extLst>
               </a:tr>
               <a:tr h="0">
                 <a:tc>
                   <a:txBody>
                     <a:bodyPr/>
+                    <a:lstStyle/>
                     <a:p>
                       <a:r>
                         <a:rPr lang="en-US" altLang="zh-CN" sz="1800"/>
                         <a:t>Data lake + tables</a:t>
                       </a:r>
-                      <a:endParaRPr lang="en-US" altLang="zh-CN" sz="1800"/>
                     </a:p>
                   </a:txBody>
-                  <a:tcPr marL="0" marR="0" marT="0" marB="0" anchor="ctr" anchorCtr="0">
+                  <a:tcPr marL="0" marR="0" marT="0" marB="0" anchor="ctr">
                     <a:lnL w="12700">
                       <a:solidFill>
                         <a:schemeClr val="tx1"/>
@@ -2863,15 +2851,15 @@
                 <a:tc>
                   <a:txBody>
                     <a:bodyPr/>
+                    <a:lstStyle/>
                     <a:p>
                       <a:r>
                         <a:rPr lang="en-US" altLang="zh-CN" sz="1800"/>
                         <a:t>Data warehouse</a:t>
                       </a:r>
-                      <a:endParaRPr lang="en-US" altLang="zh-CN" sz="1800"/>
                     </a:p>
                   </a:txBody>
-                  <a:tcPr marL="0" marR="0" marT="0" marB="0" anchor="ctr" anchorCtr="0">
+                  <a:tcPr marL="0" marR="0" marT="0" marB="0" anchor="ctr">
                     <a:lnL w="12700">
                       <a:solidFill>
                         <a:schemeClr val="tx1"/>
@@ -2899,20 +2887,25 @@
                     <a:noFill/>
                   </a:tcPr>
                 </a:tc>
+                <a:extLst>
+                  <a:ext uri="{0D108BD9-81ED-4DB2-BD59-A6C34878D82A}">
+                    <a16:rowId xmlns:a16="http://schemas.microsoft.com/office/drawing/2014/main" val="10001"/>
+                  </a:ext>
+                </a:extLst>
               </a:tr>
               <a:tr h="0">
                 <a:tc>
                   <a:txBody>
                     <a:bodyPr/>
+                    <a:lstStyle/>
                     <a:p>
                       <a:r>
                         <a:rPr lang="en-US" altLang="zh-CN" sz="1800"/>
                         <a:t>Spark + SQL</a:t>
                       </a:r>
-                      <a:endParaRPr lang="en-US" altLang="zh-CN" sz="1800"/>
                     </a:p>
                   </a:txBody>
-                  <a:tcPr marL="0" marR="0" marT="0" marB="0" anchor="ctr" anchorCtr="0">
+                  <a:tcPr marL="0" marR="0" marT="0" marB="0" anchor="ctr">
                     <a:lnL w="12700">
                       <a:solidFill>
                         <a:schemeClr val="tx1"/>
@@ -2943,15 +2936,15 @@
                 <a:tc>
                   <a:txBody>
                     <a:bodyPr/>
+                    <a:lstStyle/>
                     <a:p>
                       <a:r>
                         <a:rPr lang="en-US" altLang="zh-CN" sz="1800"/>
                         <a:t>Primarily SQL</a:t>
                       </a:r>
-                      <a:endParaRPr lang="en-US" altLang="zh-CN" sz="1800"/>
                     </a:p>
                   </a:txBody>
-                  <a:tcPr marL="0" marR="0" marT="0" marB="0" anchor="ctr" anchorCtr="0">
+                  <a:tcPr marL="0" marR="0" marT="0" marB="0" anchor="ctr">
                     <a:lnL w="12700">
                       <a:solidFill>
                         <a:schemeClr val="tx1"/>
@@ -2979,20 +2972,25 @@
                     <a:noFill/>
                   </a:tcPr>
                 </a:tc>
+                <a:extLst>
+                  <a:ext uri="{0D108BD9-81ED-4DB2-BD59-A6C34878D82A}">
+                    <a16:rowId xmlns:a16="http://schemas.microsoft.com/office/drawing/2014/main" val="10002"/>
+                  </a:ext>
+                </a:extLst>
               </a:tr>
               <a:tr h="0">
                 <a:tc>
                   <a:txBody>
                     <a:bodyPr/>
+                    <a:lstStyle/>
                     <a:p>
                       <a:r>
                         <a:rPr lang="en-US" altLang="zh-CN" sz="1800"/>
                         <a:t>Structured + semi-structured</a:t>
                       </a:r>
-                      <a:endParaRPr lang="en-US" altLang="zh-CN" sz="1800"/>
                     </a:p>
                   </a:txBody>
-                  <a:tcPr marL="0" marR="0" marT="0" marB="0" anchor="ctr" anchorCtr="0">
+                  <a:tcPr marL="0" marR="0" marT="0" marB="0" anchor="ctr">
                     <a:lnL w="12700">
                       <a:solidFill>
                         <a:schemeClr val="tx1"/>
@@ -3023,15 +3021,15 @@
                 <a:tc>
                   <a:txBody>
                     <a:bodyPr/>
+                    <a:lstStyle/>
                     <a:p>
                       <a:r>
                         <a:rPr lang="en-US" altLang="zh-CN" sz="1800"/>
                         <a:t>Primarily structured</a:t>
                       </a:r>
-                      <a:endParaRPr lang="en-US" altLang="zh-CN" sz="1800"/>
                     </a:p>
                   </a:txBody>
-                  <a:tcPr marL="0" marR="0" marT="0" marB="0" anchor="ctr" anchorCtr="0">
+                  <a:tcPr marL="0" marR="0" marT="0" marB="0" anchor="ctr">
                     <a:lnL w="12700">
                       <a:solidFill>
                         <a:schemeClr val="tx1"/>
@@ -3059,20 +3057,25 @@
                     <a:noFill/>
                   </a:tcPr>
                 </a:tc>
+                <a:extLst>
+                  <a:ext uri="{0D108BD9-81ED-4DB2-BD59-A6C34878D82A}">
+                    <a16:rowId xmlns:a16="http://schemas.microsoft.com/office/drawing/2014/main" val="10003"/>
+                  </a:ext>
+                </a:extLst>
               </a:tr>
               <a:tr h="0">
                 <a:tc>
                   <a:txBody>
                     <a:bodyPr/>
+                    <a:lstStyle/>
                     <a:p>
                       <a:r>
                         <a:rPr lang="en-US" altLang="zh-CN" sz="1800"/>
                         <a:t>Data engineering friendly</a:t>
                       </a:r>
-                      <a:endParaRPr lang="en-US" altLang="zh-CN" sz="1800"/>
                     </a:p>
                   </a:txBody>
-                  <a:tcPr marL="0" marR="0" marT="0" marB="0" anchor="ctr" anchorCtr="0">
+                  <a:tcPr marL="0" marR="0" marT="0" marB="0" anchor="ctr">
                     <a:lnL w="12700">
                       <a:solidFill>
                         <a:schemeClr val="tx1"/>
@@ -3103,15 +3106,15 @@
                 <a:tc>
                   <a:txBody>
                     <a:bodyPr/>
+                    <a:lstStyle/>
                     <a:p>
                       <a:r>
                         <a:rPr lang="en-US" altLang="zh-CN" sz="1800"/>
                         <a:t>SQL/BI friendly</a:t>
                       </a:r>
-                      <a:endParaRPr lang="en-US" altLang="zh-CN" sz="1800"/>
                     </a:p>
                   </a:txBody>
-                  <a:tcPr marL="0" marR="0" marT="0" marB="0" anchor="ctr" anchorCtr="0">
+                  <a:tcPr marL="0" marR="0" marT="0" marB="0" anchor="ctr">
                     <a:lnL w="12700">
                       <a:solidFill>
                         <a:schemeClr val="tx1"/>
@@ -3139,20 +3142,25 @@
                     <a:noFill/>
                   </a:tcPr>
                 </a:tc>
+                <a:extLst>
+                  <a:ext uri="{0D108BD9-81ED-4DB2-BD59-A6C34878D82A}">
+                    <a16:rowId xmlns:a16="http://schemas.microsoft.com/office/drawing/2014/main" val="10004"/>
+                  </a:ext>
+                </a:extLst>
               </a:tr>
               <a:tr h="0">
                 <a:tc>
                   <a:txBody>
                     <a:bodyPr/>
+                    <a:lstStyle/>
                     <a:p>
                       <a:r>
                         <a:rPr lang="en-US" altLang="zh-CN" sz="1800"/>
                         <a:t>Files + Tables</a:t>
                       </a:r>
-                      <a:endParaRPr lang="en-US" altLang="zh-CN" sz="1800"/>
                     </a:p>
                   </a:txBody>
-                  <a:tcPr marL="0" marR="0" marT="0" marB="0" anchor="ctr" anchorCtr="0">
+                  <a:tcPr marL="0" marR="0" marT="0" marB="0" anchor="ctr">
                     <a:lnL w="12700">
                       <a:solidFill>
                         <a:schemeClr val="tx1"/>
@@ -3183,15 +3191,15 @@
                 <a:tc>
                   <a:txBody>
                     <a:bodyPr/>
+                    <a:lstStyle/>
                     <a:p>
                       <a:r>
                         <a:rPr lang="en-US" altLang="zh-CN" sz="1800"/>
                         <a:t>Tables</a:t>
                       </a:r>
-                      <a:endParaRPr lang="en-US" altLang="zh-CN" sz="1800"/>
                     </a:p>
                   </a:txBody>
-                  <a:tcPr marL="0" marR="0" marT="0" marB="0" anchor="ctr" anchorCtr="0">
+                  <a:tcPr marL="0" marR="0" marT="0" marB="0" anchor="ctr">
                     <a:lnL w="12700">
                       <a:solidFill>
                         <a:schemeClr val="tx1"/>
@@ -3219,20 +3227,25 @@
                     <a:noFill/>
                   </a:tcPr>
                 </a:tc>
+                <a:extLst>
+                  <a:ext uri="{0D108BD9-81ED-4DB2-BD59-A6C34878D82A}">
+                    <a16:rowId xmlns:a16="http://schemas.microsoft.com/office/drawing/2014/main" val="10005"/>
+                  </a:ext>
+                </a:extLst>
               </a:tr>
               <a:tr h="0">
                 <a:tc>
                   <a:txBody>
                     <a:bodyPr/>
+                    <a:lstStyle/>
                     <a:p>
                       <a:r>
                         <a:rPr lang="en-US" altLang="zh-CN" sz="1800"/>
                         <a:t>Great for engineering/data science</a:t>
                       </a:r>
-                      <a:endParaRPr lang="en-US" altLang="zh-CN" sz="1800"/>
                     </a:p>
                   </a:txBody>
-                  <a:tcPr marL="0" marR="0" marT="0" marB="0" anchor="ctr" anchorCtr="0">
+                  <a:tcPr marL="0" marR="0" marT="0" marB="0" anchor="ctr">
                     <a:lnL w="12700">
                       <a:solidFill>
                         <a:schemeClr val="tx1"/>
@@ -3263,15 +3276,15 @@
                 <a:tc>
                   <a:txBody>
                     <a:bodyPr/>
+                    <a:lstStyle/>
                     <a:p>
                       <a:r>
                         <a:rPr lang="en-US" altLang="zh-CN" sz="1800"/>
                         <a:t>Great for analytical SQL</a:t>
                       </a:r>
-                      <a:endParaRPr lang="en-US" altLang="zh-CN" sz="1800"/>
                     </a:p>
                   </a:txBody>
-                  <a:tcPr marL="0" marR="0" marT="0" marB="0" anchor="ctr" anchorCtr="0">
+                  <a:tcPr marL="0" marR="0" marT="0" marB="0" anchor="ctr">
                     <a:lnL w="12700">
                       <a:solidFill>
                         <a:schemeClr val="tx1"/>
@@ -3299,6 +3312,11 @@
                     <a:noFill/>
                   </a:tcPr>
                 </a:tc>
+                <a:extLst>
+                  <a:ext uri="{0D108BD9-81ED-4DB2-BD59-A6C34878D82A}">
+                    <a16:rowId xmlns:a16="http://schemas.microsoft.com/office/drawing/2014/main" val="10006"/>
+                  </a:ext>
+                </a:extLst>
               </a:tr>
             </a:tbl>
           </a:graphicData>
@@ -3323,19 +3341,18 @@
           <a:bodyPr>
             <a:spAutoFit/>
           </a:bodyPr>
+          <a:lstStyle/>
           <a:p>
             <a:r>
               <a:rPr lang="en-US" altLang="zh-CN" sz="1600"/>
               <a:t>Lakehouse → Data Engineers + Spark + SQL</a:t>
             </a:r>
-            <a:endParaRPr lang="en-US" altLang="zh-CN" sz="1600"/>
           </a:p>
           <a:p>
             <a:r>
               <a:rPr lang="en-US" altLang="zh-CN" sz="1600"/>
               <a:t>Warehouse → SQL Developers + BI + Analytics</a:t>
             </a:r>
-            <a:endParaRPr lang="en-US" altLang="zh-CN" sz="1600"/>
           </a:p>
         </p:txBody>
       </p:sp>
@@ -3344,13 +3361,6 @@
   <p:clrMapOvr>
     <a:masterClrMapping/>
   </p:clrMapOvr>
-  <p:timing>
-    <p:tnLst>
-      <p:par>
-        <p:cTn id="1" dur="indefinite" restart="never" nodeType="tmRoot"/>
-      </p:par>
-    </p:tnLst>
-  </p:timing>
 </p:sld>
 </file>
 
@@ -3420,12 +3430,12 @@
           <a:bodyPr>
             <a:noAutofit/>
           </a:bodyPr>
+          <a:lstStyle/>
           <a:p>
             <a:r>
               <a:rPr lang="en-US" altLang="en-GB" sz="1600"/>
               <a:t>A workload represents a specific type of analytics activity performed within Fabric.</a:t>
             </a:r>
-            <a:endParaRPr lang="en-US" altLang="en-GB" sz="1600"/>
           </a:p>
         </p:txBody>
       </p:sp>
@@ -3449,12 +3459,12 @@
           <a:bodyPr wrap="square" rtlCol="0" anchor="t">
             <a:spAutoFit/>
           </a:bodyPr>
+          <a:lstStyle/>
           <a:p>
             <a:r>
               <a:rPr lang="en-US" altLang="en-GB" sz="1400"/>
               <a:t>Data Engineer</a:t>
             </a:r>
-            <a:endParaRPr lang="en-US" altLang="en-GB" sz="1400"/>
           </a:p>
           <a:p>
             <a:r>
@@ -3465,14 +3475,12 @@
               <a:rPr lang="en-US" altLang="en-US" sz="1400"/>
               <a:t>↓</a:t>
             </a:r>
-            <a:endParaRPr lang="en-US" altLang="en-US" sz="1400"/>
           </a:p>
           <a:p>
             <a:r>
               <a:rPr lang="en-US" altLang="en-GB" sz="1400"/>
               <a:t>Data Engineering</a:t>
             </a:r>
-            <a:endParaRPr lang="en-US" altLang="en-GB" sz="1400"/>
           </a:p>
           <a:p>
             <a:endParaRPr lang="en-US" altLang="en-GB" sz="1400"/>
@@ -3482,7 +3490,6 @@
               <a:rPr lang="en-US" altLang="en-GB" sz="1400"/>
               <a:t>Data Analyst</a:t>
             </a:r>
-            <a:endParaRPr lang="en-US" altLang="en-GB" sz="1400"/>
           </a:p>
           <a:p>
             <a:r>
@@ -3493,14 +3500,12 @@
               <a:rPr lang="en-US" altLang="en-US" sz="1400"/>
               <a:t>↓</a:t>
             </a:r>
-            <a:endParaRPr lang="en-US" altLang="en-US" sz="1400"/>
           </a:p>
           <a:p>
             <a:r>
               <a:rPr lang="en-US" altLang="en-GB" sz="1400"/>
               <a:t>Power BI</a:t>
             </a:r>
-            <a:endParaRPr lang="en-US" altLang="en-GB" sz="1400"/>
           </a:p>
           <a:p>
             <a:endParaRPr lang="en-US" altLang="en-GB" sz="1400"/>
@@ -3510,7 +3515,6 @@
               <a:rPr lang="en-US" altLang="en-GB" sz="1400"/>
               <a:t>SQL Developer</a:t>
             </a:r>
-            <a:endParaRPr lang="en-US" altLang="en-GB" sz="1400"/>
           </a:p>
           <a:p>
             <a:r>
@@ -3521,14 +3525,12 @@
               <a:rPr lang="en-US" altLang="en-US" sz="1400"/>
               <a:t>↓</a:t>
             </a:r>
-            <a:endParaRPr lang="en-US" altLang="en-US" sz="1400"/>
           </a:p>
           <a:p>
             <a:r>
               <a:rPr lang="en-US" altLang="en-GB" sz="1400"/>
               <a:t>Data Warehouse</a:t>
             </a:r>
-            <a:endParaRPr lang="en-US" altLang="en-GB" sz="1400"/>
           </a:p>
           <a:p>
             <a:endParaRPr lang="en-US" altLang="en-GB" sz="1400"/>
@@ -3538,7 +3540,6 @@
               <a:rPr lang="en-US" altLang="en-GB" sz="1400"/>
               <a:t>Data Scientist</a:t>
             </a:r>
-            <a:endParaRPr lang="en-US" altLang="en-GB" sz="1400"/>
           </a:p>
           <a:p>
             <a:r>
@@ -3549,14 +3550,12 @@
               <a:rPr lang="en-US" altLang="en-US" sz="1400"/>
               <a:t>↓</a:t>
             </a:r>
-            <a:endParaRPr lang="en-US" altLang="en-US" sz="1400"/>
           </a:p>
           <a:p>
             <a:r>
               <a:rPr lang="en-US" altLang="en-GB" sz="1400"/>
               <a:t>Data Science</a:t>
             </a:r>
-            <a:endParaRPr lang="en-US" altLang="en-GB" sz="1400"/>
           </a:p>
         </p:txBody>
       </p:sp>
@@ -3565,13 +3564,6 @@
   <p:clrMapOvr>
     <a:masterClrMapping/>
   </p:clrMapOvr>
-  <p:timing>
-    <p:tnLst>
-      <p:par>
-        <p:cTn id="1" dur="indefinite" restart="never" nodeType="tmRoot"/>
-      </p:par>
-    </p:tnLst>
-  </p:timing>
 </p:sld>
 </file>
 
@@ -3616,7 +3608,6 @@
               <a:rPr lang="en-US" altLang="en-GB" sz="2000" dirty="0"/>
               <a:t>Types of Fabric Workloads</a:t>
             </a:r>
-            <a:endParaRPr lang="en-US" altLang="en-GB" sz="2000" dirty="0"/>
           </a:p>
         </p:txBody>
       </p:sp>
@@ -3639,6 +3630,7 @@
           <a:bodyPr>
             <a:noAutofit/>
           </a:bodyPr>
+          <a:lstStyle/>
           <a:p>
             <a:r>
               <a:rPr lang="en-US" altLang="en-GB" sz="1800">
@@ -3647,18 +3639,14 @@
               </a:rPr>
               <a:t>A workload represents a specific type of analytics activity performed within Fabric.</a:t>
             </a:r>
+          </a:p>
+          <a:p>
             <a:endParaRPr lang="en-US" altLang="en-GB" sz="1800">
               <a:latin typeface="+mj-lt"/>
               <a:cs typeface="+mj-lt"/>
             </a:endParaRPr>
           </a:p>
           <a:p>
-            <a:endParaRPr lang="en-US" altLang="en-GB" sz="1800">
-              <a:latin typeface="+mj-lt"/>
-              <a:cs typeface="+mj-lt"/>
-            </a:endParaRPr>
-          </a:p>
-          <a:p>
             <a:r>
               <a:rPr lang="en-US" altLang="en-GB" sz="1800" b="1">
                 <a:latin typeface="+mj-lt"/>
@@ -3666,10 +3654,6 @@
               </a:rPr>
               <a:t>1. Data Factory</a:t>
             </a:r>
-            <a:endParaRPr lang="en-US" altLang="en-GB" sz="1800" b="1">
-              <a:latin typeface="+mj-lt"/>
-              <a:cs typeface="+mj-lt"/>
-            </a:endParaRPr>
           </a:p>
           <a:p>
             <a:pPr marL="0" lvl="1" indent="0">
@@ -3682,10 +3666,6 @@
               </a:rPr>
               <a:t>Used for:</a:t>
             </a:r>
-            <a:endParaRPr lang="en-US" altLang="en-GB" sz="1800">
-              <a:latin typeface="+mj-lt"/>
-              <a:cs typeface="+mj-lt"/>
-            </a:endParaRPr>
           </a:p>
           <a:p>
             <a:pPr marL="742950" lvl="2" indent="-285750">
@@ -3699,10 +3679,6 @@
               </a:rPr>
               <a:t>Data ingestion</a:t>
             </a:r>
-            <a:endParaRPr lang="en-US" altLang="en-GB" sz="1800">
-              <a:latin typeface="+mj-lt"/>
-              <a:cs typeface="+mj-lt"/>
-            </a:endParaRPr>
           </a:p>
           <a:p>
             <a:pPr marL="742950" lvl="2" indent="-285750">
@@ -3716,10 +3692,6 @@
               </a:rPr>
               <a:t>Data integration</a:t>
             </a:r>
-            <a:endParaRPr lang="en-US" altLang="en-GB" sz="1800">
-              <a:latin typeface="+mj-lt"/>
-              <a:cs typeface="+mj-lt"/>
-            </a:endParaRPr>
           </a:p>
           <a:p>
             <a:pPr marL="742950" lvl="2" indent="-285750">
@@ -3733,10 +3705,6 @@
               </a:rPr>
               <a:t>Pipelines</a:t>
             </a:r>
-            <a:endParaRPr lang="en-US" altLang="en-GB" sz="1800">
-              <a:latin typeface="+mj-lt"/>
-              <a:cs typeface="+mj-lt"/>
-            </a:endParaRPr>
           </a:p>
           <a:p>
             <a:pPr marL="742950" lvl="2" indent="-285750">
@@ -3750,10 +3718,6 @@
               </a:rPr>
               <a:t>Dataflows</a:t>
             </a:r>
-            <a:endParaRPr lang="en-US" altLang="en-GB" sz="1800">
-              <a:latin typeface="+mj-lt"/>
-              <a:cs typeface="+mj-lt"/>
-            </a:endParaRPr>
           </a:p>
           <a:p>
             <a:r>
@@ -3763,10 +3727,6 @@
               </a:rPr>
               <a:t>2. Data Engineering</a:t>
             </a:r>
-            <a:endParaRPr lang="en-US" altLang="en-GB" sz="1800" b="1">
-              <a:latin typeface="+mj-lt"/>
-              <a:cs typeface="+mj-lt"/>
-            </a:endParaRPr>
           </a:p>
           <a:p>
             <a:r>
@@ -3776,10 +3736,6 @@
               </a:rPr>
               <a:t>Used for:</a:t>
             </a:r>
-            <a:endParaRPr lang="en-US" altLang="en-GB" sz="1800">
-              <a:latin typeface="+mj-lt"/>
-              <a:cs typeface="+mj-lt"/>
-            </a:endParaRPr>
           </a:p>
           <a:p>
             <a:pPr marL="742950" lvl="2" indent="-285750">
@@ -3793,10 +3749,6 @@
               </a:rPr>
               <a:t>Spark</a:t>
             </a:r>
-            <a:endParaRPr lang="en-US" altLang="en-GB" sz="1800">
-              <a:latin typeface="+mj-lt"/>
-              <a:cs typeface="+mj-lt"/>
-            </a:endParaRPr>
           </a:p>
           <a:p>
             <a:pPr marL="742950" lvl="2" indent="-285750">
@@ -3810,10 +3762,6 @@
               </a:rPr>
               <a:t>PySpark</a:t>
             </a:r>
-            <a:endParaRPr lang="en-US" altLang="en-GB" sz="1800">
-              <a:latin typeface="+mj-lt"/>
-              <a:cs typeface="+mj-lt"/>
-            </a:endParaRPr>
           </a:p>
           <a:p>
             <a:pPr marL="742950" lvl="2" indent="-285750">
@@ -3827,10 +3775,6 @@
               </a:rPr>
               <a:t>Notebooks</a:t>
             </a:r>
-            <a:endParaRPr lang="en-US" altLang="en-GB" sz="1800">
-              <a:latin typeface="+mj-lt"/>
-              <a:cs typeface="+mj-lt"/>
-            </a:endParaRPr>
           </a:p>
           <a:p>
             <a:pPr marL="742950" lvl="2" indent="-285750">
@@ -3844,10 +3788,6 @@
               </a:rPr>
               <a:t>Lakehouse</a:t>
             </a:r>
-            <a:endParaRPr lang="en-US" altLang="en-GB" sz="1800">
-              <a:latin typeface="+mj-lt"/>
-              <a:cs typeface="+mj-lt"/>
-            </a:endParaRPr>
           </a:p>
           <a:p>
             <a:pPr marL="742950" lvl="2" indent="-285750">
@@ -3861,10 +3801,6 @@
               </a:rPr>
               <a:t>Big data processing</a:t>
             </a:r>
-            <a:endParaRPr lang="en-US" altLang="en-GB" sz="1800">
-              <a:latin typeface="+mj-lt"/>
-              <a:cs typeface="+mj-lt"/>
-            </a:endParaRPr>
           </a:p>
           <a:p>
             <a:pPr marL="742950" lvl="2" indent="-285750">
@@ -3883,13 +3819,6 @@
   <p:clrMapOvr>
     <a:masterClrMapping/>
   </p:clrMapOvr>
-  <p:timing>
-    <p:tnLst>
-      <p:par>
-        <p:cTn id="1" dur="indefinite" restart="never" nodeType="tmRoot"/>
-      </p:par>
-    </p:tnLst>
-  </p:timing>
 </p:sld>
 </file>
 
@@ -3913,7 +3842,9 @@
       <p:sp>
         <p:nvSpPr>
           <p:cNvPr id="4" name="Title 3"/>
-          <p:cNvSpPr/>
+          <p:cNvSpPr>
+            <a:spLocks noGrp="1"/>
+          </p:cNvSpPr>
           <p:nvPr>
             <p:ph type="title"/>
           </p:nvPr>
@@ -3926,6 +3857,7 @@
         </p:spPr>
         <p:txBody>
           <a:bodyPr/>
+          <a:lstStyle/>
           <a:p>
             <a:r>
               <a:rPr lang="en-US" altLang="en-GB" dirty="0">
@@ -3956,6 +3888,7 @@
           <a:bodyPr>
             <a:spAutoFit/>
           </a:bodyPr>
+          <a:lstStyle/>
           <a:p>
             <a:pPr>
               <a:spcAft>
@@ -3969,10 +3902,6 @@
               </a:rPr>
               <a:t>Data Science</a:t>
             </a:r>
-            <a:endParaRPr lang="en-US" altLang="zh-CN" sz="1800" b="1">
-              <a:latin typeface="+mn-lt"/>
-              <a:cs typeface="+mn-lt"/>
-            </a:endParaRPr>
           </a:p>
           <a:p>
             <a:pPr marL="0" marR="0" lvl="1" indent="0" algn="l" rtl="0" eaLnBrk="1" fontAlgn="auto" latinLnBrk="0" hangingPunct="1">
@@ -3995,11 +3924,6 @@
               </a:rPr>
               <a:t>sed for:</a:t>
             </a:r>
-            <a:endParaRPr kumimoji="0" lang="en-US" altLang="zh-CN" sz="1800" b="0" i="0" u="none" strike="noStrike" kern="0" cap="none" spc="0" normalizeH="0" baseline="0" noProof="1">
-              <a:latin typeface="+mn-lt"/>
-              <a:ea typeface="Arial" panose="020B0604020202020204" pitchFamily="34" charset="0"/>
-              <a:cs typeface="+mn-lt"/>
-            </a:endParaRPr>
           </a:p>
           <a:p>
             <a:pPr marL="742950" marR="0" lvl="2" indent="-285750" algn="l" rtl="0" eaLnBrk="1" fontAlgn="auto" latinLnBrk="0" hangingPunct="1">
@@ -4023,10 +3947,6 @@
               </a:rPr>
               <a:t> learning </a:t>
             </a:r>
-            <a:endParaRPr lang="en-US" altLang="zh-CN" sz="1800">
-              <a:latin typeface="+mn-lt"/>
-              <a:cs typeface="+mn-lt"/>
-            </a:endParaRPr>
           </a:p>
           <a:p>
             <a:pPr marL="742950" lvl="2" indent="-285750">
@@ -4040,10 +3960,6 @@
               </a:rPr>
               <a:t> Data exploration </a:t>
             </a:r>
-            <a:endParaRPr lang="en-US" altLang="zh-CN" sz="1800">
-              <a:latin typeface="+mn-lt"/>
-              <a:cs typeface="+mn-lt"/>
-            </a:endParaRPr>
           </a:p>
           <a:p>
             <a:pPr marL="742950" lvl="2" indent="-285750">
@@ -4057,10 +3973,6 @@
               </a:rPr>
               <a:t> Experiments </a:t>
             </a:r>
-            <a:endParaRPr lang="en-US" altLang="zh-CN" sz="1800">
-              <a:latin typeface="+mn-lt"/>
-              <a:cs typeface="+mn-lt"/>
-            </a:endParaRPr>
           </a:p>
           <a:p>
             <a:pPr marL="742950" lvl="2" indent="-285750">
@@ -4074,10 +3986,6 @@
               </a:rPr>
               <a:t> ML models </a:t>
             </a:r>
-            <a:endParaRPr lang="en-US" altLang="zh-CN" sz="1800">
-              <a:latin typeface="+mn-lt"/>
-              <a:cs typeface="+mn-lt"/>
-            </a:endParaRPr>
           </a:p>
           <a:p>
             <a:pPr>
@@ -4095,10 +4003,6 @@
               </a:rPr>
               <a:t>4. Data Warehouse</a:t>
             </a:r>
-            <a:endParaRPr lang="en-US" altLang="zh-CN" sz="1800" b="1">
-              <a:latin typeface="+mn-lt"/>
-              <a:cs typeface="+mn-lt"/>
-            </a:endParaRPr>
           </a:p>
           <a:p>
             <a:pPr>
@@ -4113,10 +4017,6 @@
               </a:rPr>
               <a:t>Used for:</a:t>
             </a:r>
-            <a:endParaRPr lang="en-US" altLang="zh-CN" sz="1800">
-              <a:latin typeface="+mn-lt"/>
-              <a:cs typeface="+mn-lt"/>
-            </a:endParaRPr>
           </a:p>
           <a:p>
             <a:pPr marL="742950" lvl="4" indent="-285750">
@@ -4130,10 +4030,6 @@
               </a:rPr>
               <a:t> SQL </a:t>
             </a:r>
-            <a:endParaRPr lang="en-US" altLang="zh-CN" sz="1800">
-              <a:latin typeface="+mn-lt"/>
-              <a:cs typeface="+mn-lt"/>
-            </a:endParaRPr>
           </a:p>
           <a:p>
             <a:pPr marL="742950" lvl="4" indent="-285750">
@@ -4147,10 +4043,6 @@
               </a:rPr>
               <a:t> Relational data </a:t>
             </a:r>
-            <a:endParaRPr lang="en-US" altLang="zh-CN" sz="1800">
-              <a:latin typeface="+mn-lt"/>
-              <a:cs typeface="+mn-lt"/>
-            </a:endParaRPr>
           </a:p>
           <a:p>
             <a:pPr marL="742950" lvl="4" indent="-285750">
@@ -4164,10 +4056,6 @@
               </a:rPr>
               <a:t> Analytical queries </a:t>
             </a:r>
-            <a:endParaRPr lang="en-US" altLang="zh-CN" sz="1800">
-              <a:latin typeface="+mn-lt"/>
-              <a:cs typeface="+mn-lt"/>
-            </a:endParaRPr>
           </a:p>
           <a:p>
             <a:pPr marL="742950" lvl="4" indent="-285750">
@@ -4181,10 +4069,6 @@
               </a:rPr>
               <a:t> Data warehousing </a:t>
             </a:r>
-            <a:endParaRPr lang="en-US" altLang="zh-CN" sz="1800">
-              <a:latin typeface="+mn-lt"/>
-              <a:cs typeface="+mn-lt"/>
-            </a:endParaRPr>
           </a:p>
           <a:p>
             <a:pPr>
@@ -4204,13 +4088,6 @@
   <p:clrMapOvr>
     <a:masterClrMapping/>
   </p:clrMapOvr>
-  <p:timing>
-    <p:tnLst>
-      <p:par>
-        <p:cTn id="1" dur="indefinite" restart="never" nodeType="tmRoot"/>
-      </p:par>
-    </p:tnLst>
-  </p:timing>
 </p:sld>
 </file>
 
@@ -4234,7 +4111,9 @@
       <p:sp>
         <p:nvSpPr>
           <p:cNvPr id="4" name="Title 3"/>
-          <p:cNvSpPr/>
+          <p:cNvSpPr>
+            <a:spLocks noGrp="1"/>
+          </p:cNvSpPr>
           <p:nvPr>
             <p:ph type="title"/>
           </p:nvPr>
@@ -4247,6 +4126,7 @@
         </p:spPr>
         <p:txBody>
           <a:bodyPr/>
+          <a:lstStyle/>
           <a:p>
             <a:r>
               <a:rPr lang="en-US" altLang="en-GB" dirty="0">
@@ -4277,6 +4157,7 @@
           <a:bodyPr>
             <a:spAutoFit/>
           </a:bodyPr>
+          <a:lstStyle/>
           <a:p>
             <a:pPr marL="0" marR="0" lvl="1" indent="0" algn="l" rtl="0" eaLnBrk="1" fontAlgn="auto" latinLnBrk="0" hangingPunct="1">
               <a:buClrTx/>
@@ -4298,11 +4179,6 @@
               </a:rPr>
               <a:t>Power BI</a:t>
             </a:r>
-            <a:endParaRPr kumimoji="0" lang="en-US" altLang="en-GB" sz="1800" b="1" i="0" u="none" strike="noStrike" kern="0" cap="none" spc="0" normalizeH="0" baseline="0" noProof="1">
-              <a:latin typeface="+mn-lt"/>
-              <a:ea typeface="Arial" panose="020B0604020202020204" pitchFamily="34" charset="0"/>
-              <a:cs typeface="+mn-lt"/>
-            </a:endParaRPr>
           </a:p>
           <a:p>
             <a:pPr marL="0" marR="0" lvl="1" indent="0" algn="l" rtl="0" eaLnBrk="1" fontAlgn="auto" latinLnBrk="0" hangingPunct="1">
@@ -4318,11 +4194,6 @@
               </a:rPr>
               <a:t>Used for:</a:t>
             </a:r>
-            <a:endParaRPr kumimoji="0" lang="en-US" altLang="en-GB" sz="1800" b="0" i="0" u="none" strike="noStrike" kern="0" cap="none" spc="0" normalizeH="0" baseline="0" noProof="1">
-              <a:latin typeface="+mn-lt"/>
-              <a:ea typeface="Arial" panose="020B0604020202020204" pitchFamily="34" charset="0"/>
-              <a:cs typeface="+mn-lt"/>
-            </a:endParaRPr>
           </a:p>
           <a:p>
             <a:pPr marL="742950" marR="0" lvl="2" indent="-285750" algn="l" rtl="0" eaLnBrk="1" fontAlgn="auto" latinLnBrk="0" hangingPunct="1">
@@ -4346,11 +4217,6 @@
               </a:rPr>
               <a:t>emantic models</a:t>
             </a:r>
-            <a:endParaRPr kumimoji="0" lang="en-US" altLang="zh-CN" sz="1800" b="0" i="0" u="none" strike="noStrike" kern="0" cap="none" spc="0" normalizeH="0" baseline="0" noProof="1">
-              <a:latin typeface="+mn-lt"/>
-              <a:ea typeface="Arial" panose="020B0604020202020204" pitchFamily="34" charset="0"/>
-              <a:cs typeface="+mn-lt"/>
-            </a:endParaRPr>
           </a:p>
           <a:p>
             <a:pPr marL="742950" marR="0" lvl="2" indent="-285750" algn="l" rtl="0" eaLnBrk="1" fontAlgn="auto" latinLnBrk="0" hangingPunct="1">
@@ -4367,11 +4233,6 @@
               </a:rPr>
               <a:t>Reports</a:t>
             </a:r>
-            <a:endParaRPr kumimoji="0" lang="en-US" altLang="zh-CN" sz="1800" b="0" i="0" u="none" strike="noStrike" kern="0" cap="none" spc="0" normalizeH="0" baseline="0" noProof="1">
-              <a:latin typeface="+mn-lt"/>
-              <a:ea typeface="Arial" panose="020B0604020202020204" pitchFamily="34" charset="0"/>
-              <a:cs typeface="+mn-lt"/>
-            </a:endParaRPr>
           </a:p>
           <a:p>
             <a:pPr marL="742950" marR="0" lvl="2" indent="-285750" algn="l" rtl="0" eaLnBrk="1" fontAlgn="auto" latinLnBrk="0" hangingPunct="1">
@@ -4388,11 +4249,6 @@
               </a:rPr>
               <a:t>Dashboards</a:t>
             </a:r>
-            <a:endParaRPr kumimoji="0" lang="en-US" altLang="zh-CN" sz="1800" b="0" i="0" u="none" strike="noStrike" kern="0" cap="none" spc="0" normalizeH="0" baseline="0" noProof="1">
-              <a:latin typeface="+mn-lt"/>
-              <a:ea typeface="Arial" panose="020B0604020202020204" pitchFamily="34" charset="0"/>
-              <a:cs typeface="+mn-lt"/>
-            </a:endParaRPr>
           </a:p>
           <a:p>
             <a:pPr marL="742950" marR="0" lvl="2" indent="-285750" algn="l" rtl="0" eaLnBrk="1" fontAlgn="auto" latinLnBrk="0" hangingPunct="1">
@@ -4409,11 +4265,6 @@
               </a:rPr>
               <a:t>Visualization</a:t>
             </a:r>
-            <a:endParaRPr kumimoji="0" lang="en-US" altLang="zh-CN" sz="1800" b="0" i="0" u="none" strike="noStrike" kern="0" cap="none" spc="0" normalizeH="0" baseline="0" noProof="1">
-              <a:latin typeface="+mn-lt"/>
-              <a:ea typeface="Arial" panose="020B0604020202020204" pitchFamily="34" charset="0"/>
-              <a:cs typeface="+mn-lt"/>
-            </a:endParaRPr>
           </a:p>
         </p:txBody>
       </p:sp>
@@ -4422,13 +4273,6 @@
   <p:clrMapOvr>
     <a:masterClrMapping/>
   </p:clrMapOvr>
-  <p:timing>
-    <p:tnLst>
-      <p:par>
-        <p:cTn id="1" dur="indefinite" restart="never" nodeType="tmRoot"/>
-      </p:par>
-    </p:tnLst>
-  </p:timing>
 </p:sld>
 </file>
 
@@ -4452,7 +4296,9 @@
       <p:sp>
         <p:nvSpPr>
           <p:cNvPr id="4" name="Title 3"/>
-          <p:cNvSpPr/>
+          <p:cNvSpPr>
+            <a:spLocks noGrp="1"/>
+          </p:cNvSpPr>
           <p:nvPr>
             <p:ph type="title"/>
           </p:nvPr>
@@ -4465,6 +4311,7 @@
         </p:spPr>
         <p:txBody>
           <a:bodyPr/>
+          <a:lstStyle/>
           <a:p>
             <a:r>
               <a:rPr lang="en-US" altLang="en-GB" b="0">
@@ -4498,6 +4345,7 @@
           <a:bodyPr wrap="square">
             <a:spAutoFit/>
           </a:bodyPr>
+          <a:lstStyle/>
           <a:p>
             <a:pPr marL="0" marR="0" lvl="1" indent="0" algn="l" rtl="0" eaLnBrk="1" fontAlgn="auto" latinLnBrk="0" hangingPunct="1">
               <a:buClrTx/>
@@ -4512,6 +4360,28 @@
               </a:rPr>
               <a:t>Data Factory is the Fabric workload used for data integration and data ingestion.</a:t>
             </a:r>
+          </a:p>
+          <a:p>
+            <a:pPr marL="0" marR="0" lvl="1" indent="0" algn="l" rtl="0" eaLnBrk="1" fontAlgn="auto" latinLnBrk="0" hangingPunct="1">
+              <a:buClrTx/>
+              <a:buSzTx/>
+              <a:buNone/>
+            </a:pPr>
+            <a:r>
+              <a:rPr kumimoji="0" lang="en-US" altLang="en-GB" sz="1800" b="0" i="0" u="none" strike="noStrike" kern="0" cap="none" spc="0" normalizeH="0" baseline="0" noProof="1">
+                <a:latin typeface="+mn-lt"/>
+                <a:ea typeface="Arial" panose="020B0604020202020204" pitchFamily="34" charset="0"/>
+                <a:cs typeface="+mn-lt"/>
+              </a:rPr>
+              <a:t>It helps us move and transform data from different sources into Fabric.</a:t>
+            </a:r>
+          </a:p>
+          <a:p>
+            <a:pPr marL="0" marR="0" lvl="1" indent="0" algn="l" rtl="0" eaLnBrk="1" fontAlgn="auto" latinLnBrk="0" hangingPunct="1">
+              <a:buClrTx/>
+              <a:buSzTx/>
+              <a:buNone/>
+            </a:pPr>
             <a:endParaRPr kumimoji="0" lang="en-US" altLang="en-GB" sz="1800" b="0" i="0" u="none" strike="noStrike" kern="0" cap="none" spc="0" normalizeH="0" baseline="0" noProof="1">
               <a:latin typeface="+mn-lt"/>
               <a:ea typeface="Arial" panose="020B0604020202020204" pitchFamily="34" charset="0"/>
@@ -4530,45 +4400,8 @@
                 <a:ea typeface="Arial" panose="020B0604020202020204" pitchFamily="34" charset="0"/>
                 <a:cs typeface="+mn-lt"/>
               </a:rPr>
-              <a:t>It helps us move and transform data from different sources into Fabric.</a:t>
-            </a:r>
-            <a:endParaRPr kumimoji="0" lang="en-US" altLang="en-GB" sz="1800" b="0" i="0" u="none" strike="noStrike" kern="0" cap="none" spc="0" normalizeH="0" baseline="0" noProof="1">
-              <a:latin typeface="+mn-lt"/>
-              <a:ea typeface="Arial" panose="020B0604020202020204" pitchFamily="34" charset="0"/>
-              <a:cs typeface="+mn-lt"/>
-            </a:endParaRPr>
-          </a:p>
-          <a:p>
-            <a:pPr marL="0" marR="0" lvl="1" indent="0" algn="l" rtl="0" eaLnBrk="1" fontAlgn="auto" latinLnBrk="0" hangingPunct="1">
-              <a:buClrTx/>
-              <a:buSzTx/>
-              <a:buNone/>
-            </a:pPr>
-            <a:endParaRPr kumimoji="0" lang="en-US" altLang="en-GB" sz="1800" b="0" i="0" u="none" strike="noStrike" kern="0" cap="none" spc="0" normalizeH="0" baseline="0" noProof="1">
-              <a:latin typeface="+mn-lt"/>
-              <a:ea typeface="Arial" panose="020B0604020202020204" pitchFamily="34" charset="0"/>
-              <a:cs typeface="+mn-lt"/>
-            </a:endParaRPr>
-          </a:p>
-          <a:p>
-            <a:pPr marL="0" marR="0" lvl="1" indent="0" algn="l" rtl="0" eaLnBrk="1" fontAlgn="auto" latinLnBrk="0" hangingPunct="1">
-              <a:buClrTx/>
-              <a:buSzTx/>
-              <a:buNone/>
-            </a:pPr>
-            <a:r>
-              <a:rPr kumimoji="0" lang="en-US" altLang="en-GB" sz="1800" b="0" i="0" u="none" strike="noStrike" kern="0" cap="none" spc="0" normalizeH="0" baseline="0" noProof="1">
-                <a:latin typeface="+mn-lt"/>
-                <a:ea typeface="Arial" panose="020B0604020202020204" pitchFamily="34" charset="0"/>
-                <a:cs typeface="+mn-lt"/>
-              </a:rPr>
               <a:t>Example</a:t>
             </a:r>
-            <a:endParaRPr kumimoji="0" lang="en-US" altLang="en-GB" sz="1800" b="0" i="0" u="none" strike="noStrike" kern="0" cap="none" spc="0" normalizeH="0" baseline="0" noProof="1">
-              <a:latin typeface="+mn-lt"/>
-              <a:ea typeface="Arial" panose="020B0604020202020204" pitchFamily="34" charset="0"/>
-              <a:cs typeface="+mn-lt"/>
-            </a:endParaRPr>
           </a:p>
         </p:txBody>
       </p:sp>
@@ -4581,7 +4414,7 @@
           <p:nvPr/>
         </p:nvPicPr>
         <p:blipFill>
-          <a:blip r:embed="rId1"/>
+          <a:blip r:embed="rId2"/>
           <a:stretch>
             <a:fillRect/>
           </a:stretch>
@@ -4601,13 +4434,6 @@
   <p:clrMapOvr>
     <a:masterClrMapping/>
   </p:clrMapOvr>
-  <p:timing>
-    <p:tnLst>
-      <p:par>
-        <p:cTn id="1" dur="indefinite" restart="never" nodeType="tmRoot"/>
-      </p:par>
-    </p:tnLst>
-  </p:timing>
 </p:sld>
 </file>
 
@@ -4687,7 +4513,6 @@
               <a:rPr lang="en-US" altLang="en-GB" dirty="0"/>
               <a:t>Microsoft Fabric is an end-to-end cloud analytics platform from Microsoft that brings data integration, data engineering, data warehousing, data science, real-time analytics, and Power BI into a single platform.</a:t>
             </a:r>
-            <a:endParaRPr lang="en-US" altLang="en-GB" dirty="0"/>
           </a:p>
           <a:p>
             <a:pPr>
@@ -4707,7 +4532,6 @@
               <a:rPr lang="en-US" altLang="en-GB" dirty="0"/>
               <a:t>Simple definition for students</a:t>
             </a:r>
-            <a:endParaRPr lang="en-US" altLang="en-GB" dirty="0"/>
           </a:p>
           <a:p>
             <a:pPr lvl="1">
@@ -4719,7 +4543,6 @@
               <a:rPr lang="en-US" altLang="en-GB" dirty="0"/>
               <a:t>Microsoft Fabric is a unified analytics platform where we can ingest, store, transform, analyze, and visualize data in one environment.</a:t>
             </a:r>
-            <a:endParaRPr lang="en-US" altLang="en-GB" dirty="0"/>
           </a:p>
         </p:txBody>
       </p:sp>
@@ -4728,13 +4551,6 @@
   <p:clrMapOvr>
     <a:masterClrMapping/>
   </p:clrMapOvr>
-  <p:timing>
-    <p:tnLst>
-      <p:par>
-        <p:cTn id="1" dur="indefinite" restart="never" nodeType="tmRoot"/>
-      </p:par>
-    </p:tnLst>
-  </p:timing>
 </p:sld>
 </file>
 
@@ -4758,7 +4574,9 @@
       <p:sp>
         <p:nvSpPr>
           <p:cNvPr id="4" name="Title 3"/>
-          <p:cNvSpPr/>
+          <p:cNvSpPr>
+            <a:spLocks noGrp="1"/>
+          </p:cNvSpPr>
           <p:nvPr>
             <p:ph type="title"/>
           </p:nvPr>
@@ -4771,6 +4589,7 @@
         </p:spPr>
         <p:txBody>
           <a:bodyPr/>
+          <a:lstStyle/>
           <a:p>
             <a:r>
               <a:rPr lang="en-US" altLang="en-GB" b="0">
@@ -4804,6 +4623,7 @@
           <a:bodyPr wrap="square">
             <a:spAutoFit/>
           </a:bodyPr>
+          <a:lstStyle/>
           <a:p>
             <a:pPr marL="0" marR="0" lvl="1" indent="0" algn="l" rtl="0" eaLnBrk="1" fontAlgn="auto" latinLnBrk="0" hangingPunct="1">
               <a:buClrTx/>
@@ -4818,11 +4638,6 @@
               </a:rPr>
               <a:t>Data Factory provides</a:t>
             </a:r>
-            <a:endParaRPr kumimoji="0" lang="en-US" altLang="en-GB" sz="1800" b="0" i="0" u="none" strike="noStrike" kern="0" cap="none" spc="0" normalizeH="0" baseline="0" noProof="1">
-              <a:latin typeface="+mn-lt"/>
-              <a:ea typeface="Arial" panose="020B0604020202020204" pitchFamily="34" charset="0"/>
-              <a:cs typeface="+mn-lt"/>
-            </a:endParaRPr>
           </a:p>
           <a:p>
             <a:pPr marL="457200" marR="0" lvl="2" indent="0" algn="l" rtl="0" eaLnBrk="1" fontAlgn="auto" latinLnBrk="0" hangingPunct="1">
@@ -4838,11 +4653,6 @@
               </a:rPr>
               <a:t>Pipelines</a:t>
             </a:r>
-            <a:endParaRPr kumimoji="0" lang="en-US" altLang="en-GB" sz="1800" b="0" i="0" u="none" strike="noStrike" kern="0" cap="none" spc="0" normalizeH="0" baseline="0" noProof="1">
-              <a:latin typeface="+mn-lt"/>
-              <a:ea typeface="Arial" panose="020B0604020202020204" pitchFamily="34" charset="0"/>
-              <a:cs typeface="+mn-lt"/>
-            </a:endParaRPr>
           </a:p>
           <a:p>
             <a:pPr marL="457200" marR="0" lvl="2" indent="0" algn="l" rtl="0" eaLnBrk="1" fontAlgn="auto" latinLnBrk="0" hangingPunct="1">
@@ -4858,11 +4668,6 @@
               </a:rPr>
               <a:t>Copy Data</a:t>
             </a:r>
-            <a:endParaRPr kumimoji="0" lang="en-US" altLang="en-GB" sz="1800" b="0" i="0" u="none" strike="noStrike" kern="0" cap="none" spc="0" normalizeH="0" baseline="0" noProof="1">
-              <a:latin typeface="+mn-lt"/>
-              <a:ea typeface="Arial" panose="020B0604020202020204" pitchFamily="34" charset="0"/>
-              <a:cs typeface="+mn-lt"/>
-            </a:endParaRPr>
           </a:p>
           <a:p>
             <a:pPr marL="457200" marR="0" lvl="2" indent="0" algn="l" rtl="0" eaLnBrk="1" fontAlgn="auto" latinLnBrk="0" hangingPunct="1">
@@ -4878,11 +4683,6 @@
               </a:rPr>
               <a:t>Dataflow Gen2</a:t>
             </a:r>
-            <a:endParaRPr kumimoji="0" lang="en-US" altLang="en-GB" sz="1800" b="0" i="0" u="none" strike="noStrike" kern="0" cap="none" spc="0" normalizeH="0" baseline="0" noProof="1">
-              <a:latin typeface="+mn-lt"/>
-              <a:ea typeface="Arial" panose="020B0604020202020204" pitchFamily="34" charset="0"/>
-              <a:cs typeface="+mn-lt"/>
-            </a:endParaRPr>
           </a:p>
           <a:p>
             <a:pPr marL="457200" marR="0" lvl="2" indent="0" algn="l" rtl="0" eaLnBrk="1" fontAlgn="auto" latinLnBrk="0" hangingPunct="1">
@@ -4898,11 +4698,6 @@
               </a:rPr>
               <a:t>Data integration</a:t>
             </a:r>
-            <a:endParaRPr kumimoji="0" lang="en-US" altLang="en-GB" sz="1800" b="0" i="0" u="none" strike="noStrike" kern="0" cap="none" spc="0" normalizeH="0" baseline="0" noProof="1">
-              <a:latin typeface="+mn-lt"/>
-              <a:ea typeface="Arial" panose="020B0604020202020204" pitchFamily="34" charset="0"/>
-              <a:cs typeface="+mn-lt"/>
-            </a:endParaRPr>
           </a:p>
           <a:p>
             <a:pPr marL="457200" marR="0" lvl="2" indent="0" algn="l" rtl="0" eaLnBrk="1" fontAlgn="auto" latinLnBrk="0" hangingPunct="1">
@@ -4918,11 +4713,6 @@
               </a:rPr>
               <a:t>Scheduling</a:t>
             </a:r>
-            <a:endParaRPr kumimoji="0" lang="en-US" altLang="en-GB" sz="1800" b="0" i="0" u="none" strike="noStrike" kern="0" cap="none" spc="0" normalizeH="0" baseline="0" noProof="1">
-              <a:latin typeface="+mn-lt"/>
-              <a:ea typeface="Arial" panose="020B0604020202020204" pitchFamily="34" charset="0"/>
-              <a:cs typeface="+mn-lt"/>
-            </a:endParaRPr>
           </a:p>
           <a:p>
             <a:pPr marL="457200" marR="0" lvl="2" indent="0" algn="l" rtl="0" eaLnBrk="1" fontAlgn="auto" latinLnBrk="0" hangingPunct="1">
@@ -4938,11 +4728,6 @@
               </a:rPr>
               <a:t>Orchestration</a:t>
             </a:r>
-            <a:endParaRPr kumimoji="0" lang="en-US" altLang="en-GB" sz="1800" b="0" i="0" u="none" strike="noStrike" kern="0" cap="none" spc="0" normalizeH="0" baseline="0" noProof="1">
-              <a:latin typeface="+mn-lt"/>
-              <a:ea typeface="Arial" panose="020B0604020202020204" pitchFamily="34" charset="0"/>
-              <a:cs typeface="+mn-lt"/>
-            </a:endParaRPr>
           </a:p>
         </p:txBody>
       </p:sp>
@@ -4951,13 +4736,6 @@
   <p:clrMapOvr>
     <a:masterClrMapping/>
   </p:clrMapOvr>
-  <p:timing>
-    <p:tnLst>
-      <p:par>
-        <p:cTn id="1" dur="indefinite" restart="never" nodeType="tmRoot"/>
-      </p:par>
-    </p:tnLst>
-  </p:timing>
 </p:sld>
 </file>
 
@@ -4981,7 +4759,9 @@
       <p:sp>
         <p:nvSpPr>
           <p:cNvPr id="4" name="Title 3"/>
-          <p:cNvSpPr/>
+          <p:cNvSpPr>
+            <a:spLocks noGrp="1"/>
+          </p:cNvSpPr>
           <p:nvPr>
             <p:ph type="title"/>
           </p:nvPr>
@@ -4994,6 +4774,7 @@
         </p:spPr>
         <p:txBody>
           <a:bodyPr/>
+          <a:lstStyle/>
           <a:p>
             <a:r>
               <a:rPr lang="en-US" altLang="en-GB" b="0">
@@ -5027,6 +4808,7 @@
           <a:bodyPr wrap="square">
             <a:spAutoFit/>
           </a:bodyPr>
+          <a:lstStyle/>
           <a:p>
             <a:pPr marL="0" marR="0" lvl="1" indent="0" algn="l" rtl="0" eaLnBrk="1" fontAlgn="auto" latinLnBrk="0" hangingPunct="1">
               <a:buClrTx/>
@@ -5041,11 +4823,6 @@
               </a:rPr>
               <a:t>A Pipeline is an orchestration mechanism used to execute a series of data activities in a specific order.</a:t>
             </a:r>
-            <a:endParaRPr kumimoji="0" lang="en-US" altLang="en-GB" sz="1800" b="0" i="0" u="none" strike="noStrike" kern="0" cap="none" spc="0" normalizeH="0" baseline="0" noProof="1">
-              <a:latin typeface="+mn-lt"/>
-              <a:ea typeface="Arial" panose="020B0604020202020204" pitchFamily="34" charset="0"/>
-              <a:cs typeface="+mn-lt"/>
-            </a:endParaRPr>
           </a:p>
           <a:p>
             <a:pPr marL="0" marR="0" lvl="1" indent="457200" algn="l" rtl="0" eaLnBrk="1" fontAlgn="auto" latinLnBrk="0" hangingPunct="1">
@@ -5061,11 +4838,6 @@
               </a:rPr>
               <a:t>For example:</a:t>
             </a:r>
-            <a:endParaRPr kumimoji="0" lang="en-US" altLang="en-GB" sz="1800" b="0" i="0" u="none" strike="noStrike" kern="0" cap="none" spc="0" normalizeH="0" baseline="0" noProof="1">
-              <a:latin typeface="+mn-lt"/>
-              <a:ea typeface="Arial" panose="020B0604020202020204" pitchFamily="34" charset="0"/>
-              <a:cs typeface="+mn-lt"/>
-            </a:endParaRPr>
           </a:p>
         </p:txBody>
       </p:sp>
@@ -5078,7 +4850,7 @@
           <p:nvPr/>
         </p:nvPicPr>
         <p:blipFill>
-          <a:blip r:embed="rId1"/>
+          <a:blip r:embed="rId2"/>
           <a:stretch>
             <a:fillRect/>
           </a:stretch>
@@ -5098,13 +4870,6 @@
   <p:clrMapOvr>
     <a:masterClrMapping/>
   </p:clrMapOvr>
-  <p:timing>
-    <p:tnLst>
-      <p:par>
-        <p:cTn id="1" dur="indefinite" restart="never" nodeType="tmRoot"/>
-      </p:par>
-    </p:tnLst>
-  </p:timing>
 </p:sld>
 </file>
 
@@ -5128,7 +4893,9 @@
       <p:sp>
         <p:nvSpPr>
           <p:cNvPr id="4" name="Title 3"/>
-          <p:cNvSpPr/>
+          <p:cNvSpPr>
+            <a:spLocks noGrp="1"/>
+          </p:cNvSpPr>
           <p:nvPr>
             <p:ph type="title"/>
           </p:nvPr>
@@ -5141,6 +4908,7 @@
         </p:spPr>
         <p:txBody>
           <a:bodyPr/>
+          <a:lstStyle/>
           <a:p>
             <a:r>
               <a:rPr lang="en-US" altLang="en-GB" b="0">
@@ -5174,6 +4942,7 @@
           <a:bodyPr wrap="square">
             <a:spAutoFit/>
           </a:bodyPr>
+          <a:lstStyle/>
           <a:p>
             <a:pPr marL="0" marR="0" lvl="1" indent="0" algn="l" rtl="0" eaLnBrk="1" fontAlgn="auto" latinLnBrk="0" hangingPunct="1">
               <a:buClrTx/>
@@ -5188,11 +4957,6 @@
               </a:rPr>
               <a:t>Copy Data is an activity inside a pipeline used to move data from a source to a destination</a:t>
             </a:r>
-            <a:endParaRPr kumimoji="0" lang="en-US" altLang="en-GB" sz="1800" b="0" i="0" u="none" strike="noStrike" kern="0" cap="none" spc="0" normalizeH="0" baseline="0" noProof="1">
-              <a:latin typeface="+mn-lt"/>
-              <a:ea typeface="Arial" panose="020B0604020202020204" pitchFamily="34" charset="0"/>
-              <a:cs typeface="+mn-lt"/>
-            </a:endParaRPr>
           </a:p>
         </p:txBody>
       </p:sp>
@@ -5205,7 +4969,7 @@
           <p:nvPr/>
         </p:nvPicPr>
         <p:blipFill>
-          <a:blip r:embed="rId1"/>
+          <a:blip r:embed="rId2"/>
           <a:stretch>
             <a:fillRect/>
           </a:stretch>
@@ -5225,13 +4989,6 @@
   <p:clrMapOvr>
     <a:masterClrMapping/>
   </p:clrMapOvr>
-  <p:timing>
-    <p:tnLst>
-      <p:par>
-        <p:cTn id="1" dur="indefinite" restart="never" nodeType="tmRoot"/>
-      </p:par>
-    </p:tnLst>
-  </p:timing>
 </p:sld>
 </file>
 
@@ -5255,7 +5012,9 @@
       <p:sp>
         <p:nvSpPr>
           <p:cNvPr id="4" name="Title 3"/>
-          <p:cNvSpPr/>
+          <p:cNvSpPr>
+            <a:spLocks noGrp="1"/>
+          </p:cNvSpPr>
           <p:nvPr>
             <p:ph type="title"/>
           </p:nvPr>
@@ -5268,17 +5027,13 @@
         </p:spPr>
         <p:txBody>
           <a:bodyPr/>
-          <a:p>
-            <a:r>
-              <a:rPr lang="en-US" altLang="en-GB" b="0">
-                <a:latin typeface="+mn-lt"/>
-                <a:ea typeface="Arial" panose="020B0604020202020204" pitchFamily="34" charset="0"/>
-                <a:cs typeface="+mn-lt"/>
-                <a:sym typeface="+mn-ea"/>
-              </a:rPr>
-              <a:t>What is Dataflow Gen2?</a:t>
-            </a:r>
-            <a:endParaRPr lang="en-GB" altLang="en-US"/>
+          <a:lstStyle/>
+          <a:p>
+            <a:r>
+              <a:rPr lang="en-US" b="1" dirty="0" err="1"/>
+              <a:t>Eventstream</a:t>
+            </a:r>
+            <a:endParaRPr lang="en-GB" altLang="en-US" dirty="0"/>
           </a:p>
         </p:txBody>
       </p:sp>
@@ -5291,7 +5046,7 @@
         <p:spPr>
           <a:xfrm>
             <a:off x="513080" y="895350"/>
-            <a:ext cx="8048625" cy="3969385"/>
+            <a:ext cx="8048625" cy="1169551"/>
           </a:xfrm>
           <a:prstGeom prst="rect">
             <a:avLst/>
@@ -5301,272 +5056,76 @@
           <a:bodyPr wrap="square">
             <a:spAutoFit/>
           </a:bodyPr>
-          <a:p>
-            <a:pPr marL="0" marR="0" lvl="1" indent="0" algn="l" rtl="0" eaLnBrk="1" fontAlgn="auto" latinLnBrk="0" hangingPunct="1">
-              <a:buClrTx/>
-              <a:buSzTx/>
-              <a:buNone/>
-            </a:pPr>
-            <a:r>
-              <a:rPr kumimoji="0" lang="en-US" altLang="en-GB" sz="1800" b="0" i="0" u="none" strike="noStrike" kern="0" cap="none" spc="0" normalizeH="0" baseline="0" noProof="1">
-                <a:latin typeface="+mn-lt"/>
-                <a:ea typeface="Arial" panose="020B0604020202020204" pitchFamily="34" charset="0"/>
-                <a:cs typeface="+mn-lt"/>
-              </a:rPr>
-              <a:t>Dataflow Gen2 is a low-code/no-code data transformation and integration capability in Fabric.</a:t>
-            </a:r>
-            <a:endParaRPr kumimoji="0" lang="en-US" altLang="en-GB" sz="1800" b="0" i="0" u="none" strike="noStrike" kern="0" cap="none" spc="0" normalizeH="0" baseline="0" noProof="1">
-              <a:latin typeface="+mn-lt"/>
-              <a:ea typeface="Arial" panose="020B0604020202020204" pitchFamily="34" charset="0"/>
-              <a:cs typeface="+mn-lt"/>
-            </a:endParaRPr>
-          </a:p>
-          <a:p>
-            <a:pPr marL="0" marR="0" lvl="1" indent="0" algn="l" rtl="0" eaLnBrk="1" fontAlgn="auto" latinLnBrk="0" hangingPunct="1">
-              <a:buClrTx/>
-              <a:buSzTx/>
-              <a:buNone/>
-            </a:pPr>
-            <a:r>
-              <a:rPr kumimoji="0" lang="en-US" altLang="en-GB" sz="1800" b="0" i="0" u="none" strike="noStrike" kern="0" cap="none" spc="0" normalizeH="0" baseline="0" noProof="1">
-                <a:latin typeface="+mn-lt"/>
-                <a:ea typeface="Arial" panose="020B0604020202020204" pitchFamily="34" charset="0"/>
-                <a:cs typeface="+mn-lt"/>
-              </a:rPr>
-              <a:t>It is based on the Power Query experience.</a:t>
-            </a:r>
-            <a:endParaRPr kumimoji="0" lang="en-US" altLang="en-GB" sz="1800" b="0" i="0" u="none" strike="noStrike" kern="0" cap="none" spc="0" normalizeH="0" baseline="0" noProof="1">
-              <a:latin typeface="+mn-lt"/>
-              <a:ea typeface="Arial" panose="020B0604020202020204" pitchFamily="34" charset="0"/>
-              <a:cs typeface="+mn-lt"/>
-            </a:endParaRPr>
-          </a:p>
-          <a:p>
-            <a:pPr marL="0" marR="0" lvl="1" indent="0" algn="l" rtl="0" eaLnBrk="1" fontAlgn="auto" latinLnBrk="0" hangingPunct="1">
-              <a:buClrTx/>
-              <a:buSzTx/>
-              <a:buNone/>
-            </a:pPr>
-            <a:r>
-              <a:rPr kumimoji="0" lang="en-US" altLang="en-GB" sz="1800" b="0" i="0" u="none" strike="noStrike" kern="0" cap="none" spc="0" normalizeH="0" baseline="0" noProof="1">
-                <a:latin typeface="+mn-lt"/>
-                <a:ea typeface="Arial" panose="020B0604020202020204" pitchFamily="34" charset="0"/>
-                <a:cs typeface="+mn-lt"/>
-              </a:rPr>
-              <a:t>You can perform transformations such as:</a:t>
-            </a:r>
-            <a:endParaRPr kumimoji="0" lang="en-US" altLang="en-GB" sz="1800" b="0" i="0" u="none" strike="noStrike" kern="0" cap="none" spc="0" normalizeH="0" baseline="0" noProof="1">
-              <a:latin typeface="+mn-lt"/>
-              <a:ea typeface="Arial" panose="020B0604020202020204" pitchFamily="34" charset="0"/>
-              <a:cs typeface="+mn-lt"/>
-            </a:endParaRPr>
-          </a:p>
-          <a:p>
-            <a:pPr marL="0" marR="0" lvl="1" indent="0" algn="l" rtl="0" eaLnBrk="1" fontAlgn="auto" latinLnBrk="0" hangingPunct="1">
-              <a:buClrTx/>
-              <a:buSzTx/>
-              <a:buNone/>
-            </a:pPr>
-            <a:endParaRPr kumimoji="0" lang="en-US" altLang="en-GB" sz="1800" b="0" i="0" u="none" strike="noStrike" kern="0" cap="none" spc="0" normalizeH="0" baseline="0" noProof="1">
-              <a:latin typeface="+mn-lt"/>
-              <a:ea typeface="Arial" panose="020B0604020202020204" pitchFamily="34" charset="0"/>
-              <a:cs typeface="+mn-lt"/>
-            </a:endParaRPr>
-          </a:p>
-          <a:p>
-            <a:pPr marL="457200" marR="0" lvl="2" indent="0" algn="l" rtl="0" eaLnBrk="1" fontAlgn="auto" latinLnBrk="0" hangingPunct="1">
-              <a:buClrTx/>
-              <a:buSzTx/>
-              <a:buNone/>
-            </a:pPr>
-            <a:r>
-              <a:rPr kumimoji="0" lang="en-US" altLang="en-GB" sz="1800" b="0" i="0" u="none" strike="noStrike" kern="0" cap="none" spc="0" normalizeH="0" baseline="0" noProof="1">
-                <a:latin typeface="+mn-lt"/>
-                <a:ea typeface="Arial" panose="020B0604020202020204" pitchFamily="34" charset="0"/>
-                <a:cs typeface="+mn-lt"/>
-              </a:rPr>
-              <a:t>Filter rows</a:t>
-            </a:r>
-            <a:endParaRPr kumimoji="0" lang="en-US" altLang="en-GB" sz="1800" b="0" i="0" u="none" strike="noStrike" kern="0" cap="none" spc="0" normalizeH="0" baseline="0" noProof="1">
-              <a:latin typeface="+mn-lt"/>
-              <a:ea typeface="Arial" panose="020B0604020202020204" pitchFamily="34" charset="0"/>
-              <a:cs typeface="+mn-lt"/>
-            </a:endParaRPr>
-          </a:p>
-          <a:p>
-            <a:pPr marL="457200" marR="0" lvl="2" indent="0" algn="l" rtl="0" eaLnBrk="1" fontAlgn="auto" latinLnBrk="0" hangingPunct="1">
-              <a:buClrTx/>
-              <a:buSzTx/>
-              <a:buNone/>
-            </a:pPr>
-            <a:r>
-              <a:rPr kumimoji="0" lang="en-US" altLang="en-GB" sz="1800" b="0" i="0" u="none" strike="noStrike" kern="0" cap="none" spc="0" normalizeH="0" baseline="0" noProof="1">
-                <a:latin typeface="+mn-lt"/>
-                <a:ea typeface="Arial" panose="020B0604020202020204" pitchFamily="34" charset="0"/>
-                <a:cs typeface="+mn-lt"/>
-              </a:rPr>
-              <a:t>Remove columns</a:t>
-            </a:r>
-            <a:endParaRPr kumimoji="0" lang="en-US" altLang="en-GB" sz="1800" b="0" i="0" u="none" strike="noStrike" kern="0" cap="none" spc="0" normalizeH="0" baseline="0" noProof="1">
-              <a:latin typeface="+mn-lt"/>
-              <a:ea typeface="Arial" panose="020B0604020202020204" pitchFamily="34" charset="0"/>
-              <a:cs typeface="+mn-lt"/>
-            </a:endParaRPr>
-          </a:p>
-          <a:p>
-            <a:pPr marL="457200" marR="0" lvl="2" indent="0" algn="l" rtl="0" eaLnBrk="1" fontAlgn="auto" latinLnBrk="0" hangingPunct="1">
-              <a:buClrTx/>
-              <a:buSzTx/>
-              <a:buNone/>
-            </a:pPr>
-            <a:r>
-              <a:rPr kumimoji="0" lang="en-US" altLang="en-GB" sz="1800" b="0" i="0" u="none" strike="noStrike" kern="0" cap="none" spc="0" normalizeH="0" baseline="0" noProof="1">
-                <a:latin typeface="+mn-lt"/>
-                <a:ea typeface="Arial" panose="020B0604020202020204" pitchFamily="34" charset="0"/>
-                <a:cs typeface="+mn-lt"/>
-              </a:rPr>
-              <a:t>Rename columns</a:t>
-            </a:r>
-            <a:endParaRPr kumimoji="0" lang="en-US" altLang="en-GB" sz="1800" b="0" i="0" u="none" strike="noStrike" kern="0" cap="none" spc="0" normalizeH="0" baseline="0" noProof="1">
-              <a:latin typeface="+mn-lt"/>
-              <a:ea typeface="Arial" panose="020B0604020202020204" pitchFamily="34" charset="0"/>
-              <a:cs typeface="+mn-lt"/>
-            </a:endParaRPr>
-          </a:p>
-          <a:p>
-            <a:pPr marL="457200" marR="0" lvl="2" indent="0" algn="l" rtl="0" eaLnBrk="1" fontAlgn="auto" latinLnBrk="0" hangingPunct="1">
-              <a:buClrTx/>
-              <a:buSzTx/>
-              <a:buNone/>
-            </a:pPr>
-            <a:r>
-              <a:rPr kumimoji="0" lang="en-US" altLang="en-GB" sz="1800" b="0" i="0" u="none" strike="noStrike" kern="0" cap="none" spc="0" normalizeH="0" baseline="0" noProof="1">
-                <a:latin typeface="+mn-lt"/>
-                <a:ea typeface="Arial" panose="020B0604020202020204" pitchFamily="34" charset="0"/>
-                <a:cs typeface="+mn-lt"/>
-              </a:rPr>
-              <a:t>Change data types</a:t>
-            </a:r>
-            <a:endParaRPr kumimoji="0" lang="en-US" altLang="en-GB" sz="1800" b="0" i="0" u="none" strike="noStrike" kern="0" cap="none" spc="0" normalizeH="0" baseline="0" noProof="1">
-              <a:latin typeface="+mn-lt"/>
-              <a:ea typeface="Arial" panose="020B0604020202020204" pitchFamily="34" charset="0"/>
-              <a:cs typeface="+mn-lt"/>
-            </a:endParaRPr>
-          </a:p>
-          <a:p>
-            <a:pPr marL="457200" marR="0" lvl="2" indent="0" algn="l" rtl="0" eaLnBrk="1" fontAlgn="auto" latinLnBrk="0" hangingPunct="1">
-              <a:buClrTx/>
-              <a:buSzTx/>
-              <a:buNone/>
-            </a:pPr>
-            <a:r>
-              <a:rPr kumimoji="0" lang="en-US" altLang="en-GB" sz="1800" b="0" i="0" u="none" strike="noStrike" kern="0" cap="none" spc="0" normalizeH="0" baseline="0" noProof="1">
-                <a:latin typeface="+mn-lt"/>
-                <a:ea typeface="Arial" panose="020B0604020202020204" pitchFamily="34" charset="0"/>
-                <a:cs typeface="+mn-lt"/>
-              </a:rPr>
-              <a:t>Merge</a:t>
-            </a:r>
-            <a:endParaRPr kumimoji="0" lang="en-US" altLang="en-GB" sz="1800" b="0" i="0" u="none" strike="noStrike" kern="0" cap="none" spc="0" normalizeH="0" baseline="0" noProof="1">
-              <a:latin typeface="+mn-lt"/>
-              <a:ea typeface="Arial" panose="020B0604020202020204" pitchFamily="34" charset="0"/>
-              <a:cs typeface="+mn-lt"/>
-            </a:endParaRPr>
-          </a:p>
-          <a:p>
-            <a:pPr marL="457200" marR="0" lvl="2" indent="0" algn="l" rtl="0" eaLnBrk="1" fontAlgn="auto" latinLnBrk="0" hangingPunct="1">
-              <a:buClrTx/>
-              <a:buSzTx/>
-              <a:buNone/>
-            </a:pPr>
-            <a:r>
-              <a:rPr kumimoji="0" lang="en-US" altLang="en-GB" sz="1800" b="0" i="0" u="none" strike="noStrike" kern="0" cap="none" spc="0" normalizeH="0" baseline="0" noProof="1">
-                <a:latin typeface="+mn-lt"/>
-                <a:ea typeface="Arial" panose="020B0604020202020204" pitchFamily="34" charset="0"/>
-                <a:cs typeface="+mn-lt"/>
-              </a:rPr>
-              <a:t>Append</a:t>
-            </a:r>
-            <a:endParaRPr kumimoji="0" lang="en-US" altLang="en-GB" sz="1800" b="0" i="0" u="none" strike="noStrike" kern="0" cap="none" spc="0" normalizeH="0" baseline="0" noProof="1">
-              <a:latin typeface="+mn-lt"/>
-              <a:ea typeface="Arial" panose="020B0604020202020204" pitchFamily="34" charset="0"/>
-              <a:cs typeface="+mn-lt"/>
-            </a:endParaRPr>
-          </a:p>
-          <a:p>
-            <a:pPr marL="457200" marR="0" lvl="2" indent="0" algn="l" rtl="0" eaLnBrk="1" fontAlgn="auto" latinLnBrk="0" hangingPunct="1">
-              <a:buClrTx/>
-              <a:buSzTx/>
-              <a:buNone/>
-            </a:pPr>
-            <a:r>
-              <a:rPr kumimoji="0" lang="en-US" altLang="en-GB" sz="1800" b="0" i="0" u="none" strike="noStrike" kern="0" cap="none" spc="0" normalizeH="0" baseline="0" noProof="1">
-                <a:latin typeface="+mn-lt"/>
-                <a:ea typeface="Arial" panose="020B0604020202020204" pitchFamily="34" charset="0"/>
-                <a:cs typeface="+mn-lt"/>
-              </a:rPr>
-              <a:t>Group By</a:t>
-            </a:r>
-            <a:endParaRPr kumimoji="0" lang="en-US" altLang="en-GB" sz="1800" b="0" i="0" u="none" strike="noStrike" kern="0" cap="none" spc="0" normalizeH="0" baseline="0" noProof="1">
-              <a:latin typeface="+mn-lt"/>
-              <a:ea typeface="Arial" panose="020B0604020202020204" pitchFamily="34" charset="0"/>
-              <a:cs typeface="+mn-lt"/>
-            </a:endParaRPr>
-          </a:p>
-          <a:p>
-            <a:pPr marL="457200" marR="0" lvl="2" indent="0" algn="l" rtl="0" eaLnBrk="1" fontAlgn="auto" latinLnBrk="0" hangingPunct="1">
-              <a:buClrTx/>
-              <a:buSzTx/>
-              <a:buNone/>
-            </a:pPr>
-            <a:r>
-              <a:rPr kumimoji="0" lang="en-US" altLang="en-GB" sz="1800" b="0" i="0" u="none" strike="noStrike" kern="0" cap="none" spc="0" normalizeH="0" baseline="0" noProof="1">
-                <a:latin typeface="+mn-lt"/>
-                <a:ea typeface="Arial" panose="020B0604020202020204" pitchFamily="34" charset="0"/>
-                <a:cs typeface="+mn-lt"/>
-              </a:rPr>
-              <a:t>Replace values</a:t>
-            </a:r>
-            <a:endParaRPr kumimoji="0" lang="en-US" altLang="en-GB" sz="1800" b="0" i="0" u="none" strike="noStrike" kern="0" cap="none" spc="0" normalizeH="0" baseline="0" noProof="1">
-              <a:latin typeface="+mn-lt"/>
-              <a:ea typeface="Arial" panose="020B0604020202020204" pitchFamily="34" charset="0"/>
-              <a:cs typeface="+mn-lt"/>
-            </a:endParaRPr>
-          </a:p>
-          <a:p>
-            <a:pPr marL="457200" marR="0" lvl="2" indent="0" algn="l" rtl="0" eaLnBrk="1" fontAlgn="auto" latinLnBrk="0" hangingPunct="1">
-              <a:buClrTx/>
-              <a:buSzTx/>
-              <a:buNone/>
-            </a:pPr>
-            <a:r>
-              <a:rPr kumimoji="0" lang="en-US" altLang="en-GB" sz="1800" b="0" i="0" u="none" strike="noStrike" kern="0" cap="none" spc="0" normalizeH="0" baseline="0" noProof="1">
-                <a:latin typeface="+mn-lt"/>
-                <a:ea typeface="Arial" panose="020B0604020202020204" pitchFamily="34" charset="0"/>
-                <a:cs typeface="+mn-lt"/>
-              </a:rPr>
-              <a:t>Derived columns</a:t>
-            </a:r>
-            <a:endParaRPr kumimoji="0" lang="en-US" altLang="en-GB" sz="1800" b="0" i="0" u="none" strike="noStrike" kern="0" cap="none" spc="0" normalizeH="0" baseline="0" noProof="1">
-              <a:latin typeface="+mn-lt"/>
-              <a:ea typeface="Arial" panose="020B0604020202020204" pitchFamily="34" charset="0"/>
-              <a:cs typeface="+mn-lt"/>
-            </a:endParaRPr>
-          </a:p>
-        </p:txBody>
-      </p:sp>
+          <a:lstStyle/>
+          <a:p>
+            <a:r>
+              <a:rPr lang="en-US" sz="1400" b="1" dirty="0" err="1"/>
+              <a:t>Eventstream</a:t>
+            </a:r>
+            <a:r>
+              <a:rPr lang="en-US" sz="1400" dirty="0"/>
+              <a:t> in Microsoft Fabric is a </a:t>
+            </a:r>
+            <a:r>
+              <a:rPr lang="en-US" sz="1400" b="1" dirty="0"/>
+              <a:t>real-time data ingestion and processing service</a:t>
+            </a:r>
+            <a:r>
+              <a:rPr lang="en-US" sz="1400" dirty="0"/>
+              <a:t>. It continuously receives streaming data from sources such as applications, IoT devices, stock feeds, logs, and Event Hubs, and routes that data to one or more destinations.</a:t>
+            </a:r>
+          </a:p>
+          <a:p>
+            <a:endParaRPr lang="en-US" sz="1400" dirty="0"/>
+          </a:p>
+          <a:p>
+            <a:r>
+              <a:rPr lang="en-US" sz="1400" dirty="0"/>
+              <a:t>Suppose you receive stock data every second:</a:t>
+            </a:r>
+          </a:p>
+        </p:txBody>
+      </p:sp>
+      <p:pic>
+        <p:nvPicPr>
+          <p:cNvPr id="6" name="Picture 5">
+            <a:extLst>
+              <a:ext uri="{FF2B5EF4-FFF2-40B4-BE49-F238E27FC236}">
+                <a16:creationId xmlns:a16="http://schemas.microsoft.com/office/drawing/2014/main" id="{976F7C68-05BD-9F1C-5515-E42238D22515}"/>
+              </a:ext>
+            </a:extLst>
+          </p:cNvPr>
+          <p:cNvPicPr>
+            <a:picLocks noChangeAspect="1"/>
+          </p:cNvPicPr>
+          <p:nvPr/>
+        </p:nvPicPr>
+        <p:blipFill>
+          <a:blip r:embed="rId2"/>
+          <a:stretch>
+            <a:fillRect/>
+          </a:stretch>
+        </p:blipFill>
+        <p:spPr>
+          <a:xfrm>
+            <a:off x="1219200" y="2299306"/>
+            <a:ext cx="2692538" cy="1873346"/>
+          </a:xfrm>
+          <a:prstGeom prst="rect">
+            <a:avLst/>
+          </a:prstGeom>
+        </p:spPr>
+      </p:pic>
     </p:spTree>
+    <p:extLst>
+      <p:ext uri="{BB962C8B-B14F-4D97-AF65-F5344CB8AC3E}">
+        <p14:creationId xmlns:p14="http://schemas.microsoft.com/office/powerpoint/2010/main" val="1182436740"/>
+      </p:ext>
+    </p:extLst>
   </p:cSld>
   <p:clrMapOvr>
     <a:masterClrMapping/>
   </p:clrMapOvr>
-  <p:timing>
-    <p:tnLst>
-      <p:par>
-        <p:cTn id="1" dur="indefinite" restart="never" nodeType="tmRoot"/>
-      </p:par>
-    </p:tnLst>
-  </p:timing>
 </p:sld>
 </file>
 
@@ -5590,7 +5149,9 @@
       <p:sp>
         <p:nvSpPr>
           <p:cNvPr id="4" name="Title 3"/>
-          <p:cNvSpPr/>
+          <p:cNvSpPr>
+            <a:spLocks noGrp="1"/>
+          </p:cNvSpPr>
           <p:nvPr>
             <p:ph type="title"/>
           </p:nvPr>
@@ -5603,12 +5164,732 @@
         </p:spPr>
         <p:txBody>
           <a:bodyPr/>
+          <a:lstStyle/>
+          <a:p>
+            <a:r>
+              <a:rPr lang="en-US" b="1" dirty="0" err="1"/>
+              <a:t>Eventstream</a:t>
+            </a:r>
+            <a:endParaRPr lang="en-GB" altLang="en-US" dirty="0"/>
+          </a:p>
+        </p:txBody>
+      </p:sp>
+      <p:sp>
+        <p:nvSpPr>
+          <p:cNvPr id="5" name="Text Box 4"/>
+          <p:cNvSpPr txBox="1"/>
+          <p:nvPr/>
+        </p:nvSpPr>
+        <p:spPr>
+          <a:xfrm>
+            <a:off x="513080" y="895350"/>
+            <a:ext cx="8048625" cy="1169551"/>
+          </a:xfrm>
+          <a:prstGeom prst="rect">
+            <a:avLst/>
+          </a:prstGeom>
+        </p:spPr>
+        <p:txBody>
+          <a:bodyPr wrap="square">
+            <a:spAutoFit/>
+          </a:bodyPr>
+          <a:lstStyle/>
+          <a:p>
+            <a:r>
+              <a:rPr lang="en-US" sz="1400" b="1" dirty="0" err="1"/>
+              <a:t>Eventstream</a:t>
+            </a:r>
+            <a:r>
+              <a:rPr lang="en-US" sz="1400" dirty="0"/>
+              <a:t> in Microsoft Fabric is a </a:t>
+            </a:r>
+            <a:r>
+              <a:rPr lang="en-US" sz="1400" b="1" dirty="0"/>
+              <a:t>real-time data ingestion and processing service</a:t>
+            </a:r>
+            <a:r>
+              <a:rPr lang="en-US" sz="1400" dirty="0"/>
+              <a:t>. It continuously receives streaming data from sources such as applications, IoT devices, stock feeds, logs, and Event Hubs, and routes that data to one or more destinations.</a:t>
+            </a:r>
+          </a:p>
+          <a:p>
+            <a:endParaRPr lang="en-US" sz="1400" dirty="0"/>
+          </a:p>
+          <a:p>
+            <a:r>
+              <a:rPr lang="en-US" sz="1400" dirty="0"/>
+              <a:t>Suppose you receive stock data every second:</a:t>
+            </a:r>
+          </a:p>
+        </p:txBody>
+      </p:sp>
+      <p:pic>
+        <p:nvPicPr>
+          <p:cNvPr id="6" name="Picture 5">
+            <a:extLst>
+              <a:ext uri="{FF2B5EF4-FFF2-40B4-BE49-F238E27FC236}">
+                <a16:creationId xmlns:a16="http://schemas.microsoft.com/office/drawing/2014/main" id="{976F7C68-05BD-9F1C-5515-E42238D22515}"/>
+              </a:ext>
+            </a:extLst>
+          </p:cNvPr>
+          <p:cNvPicPr>
+            <a:picLocks noChangeAspect="1"/>
+          </p:cNvPicPr>
+          <p:nvPr/>
+        </p:nvPicPr>
+        <p:blipFill>
+          <a:blip r:embed="rId2"/>
+          <a:stretch>
+            <a:fillRect/>
+          </a:stretch>
+        </p:blipFill>
+        <p:spPr>
+          <a:xfrm>
+            <a:off x="1219200" y="2299306"/>
+            <a:ext cx="2692538" cy="1873346"/>
+          </a:xfrm>
+          <a:prstGeom prst="rect">
+            <a:avLst/>
+          </a:prstGeom>
+        </p:spPr>
+      </p:pic>
+    </p:spTree>
+    <p:extLst>
+      <p:ext uri="{BB962C8B-B14F-4D97-AF65-F5344CB8AC3E}">
+        <p14:creationId xmlns:p14="http://schemas.microsoft.com/office/powerpoint/2010/main" val="1446184628"/>
+      </p:ext>
+    </p:extLst>
+  </p:cSld>
+  <p:clrMapOvr>
+    <a:masterClrMapping/>
+  </p:clrMapOvr>
+</p:sld>
+</file>
+
+<file path=ppt/slides/slide25.xml><?xml version="1.0" encoding="utf-8"?>
+<p:sld xmlns:a="http://schemas.openxmlformats.org/drawingml/2006/main" xmlns:r="http://schemas.openxmlformats.org/officeDocument/2006/relationships" xmlns:p="http://schemas.openxmlformats.org/presentationml/2006/main">
+  <p:cSld>
+    <p:spTree>
+      <p:nvGrpSpPr>
+        <p:cNvPr id="1" name=""/>
+        <p:cNvGrpSpPr/>
+        <p:nvPr/>
+      </p:nvGrpSpPr>
+      <p:grpSpPr>
+        <a:xfrm>
+          <a:off x="0" y="0"/>
+          <a:ext cx="0" cy="0"/>
+          <a:chOff x="0" y="0"/>
+          <a:chExt cx="0" cy="0"/>
+        </a:xfrm>
+      </p:grpSpPr>
+      <p:sp>
+        <p:nvSpPr>
+          <p:cNvPr id="4" name="Title 3"/>
+          <p:cNvSpPr>
+            <a:spLocks noGrp="1"/>
+          </p:cNvSpPr>
+          <p:nvPr>
+            <p:ph type="title"/>
+          </p:nvPr>
+        </p:nvSpPr>
+        <p:spPr>
+          <a:xfrm>
+            <a:off x="457200" y="169564"/>
+            <a:ext cx="5715635" cy="368935"/>
+          </a:xfrm>
+        </p:spPr>
+        <p:txBody>
+          <a:bodyPr/>
+          <a:lstStyle/>
+          <a:p>
+            <a:r>
+              <a:rPr lang="en-US" b="1" dirty="0" err="1"/>
+              <a:t>Eventstream</a:t>
+            </a:r>
+            <a:endParaRPr lang="en-GB" altLang="en-US" dirty="0"/>
+          </a:p>
+        </p:txBody>
+      </p:sp>
+      <p:sp>
+        <p:nvSpPr>
+          <p:cNvPr id="3" name="TextBox 2">
+            <a:extLst>
+              <a:ext uri="{FF2B5EF4-FFF2-40B4-BE49-F238E27FC236}">
+                <a16:creationId xmlns:a16="http://schemas.microsoft.com/office/drawing/2014/main" id="{F9E30F1A-6FF7-3866-4165-BE4FECF05810}"/>
+              </a:ext>
+            </a:extLst>
+          </p:cNvPr>
+          <p:cNvSpPr txBox="1"/>
+          <p:nvPr/>
+        </p:nvSpPr>
+        <p:spPr>
+          <a:xfrm>
+            <a:off x="609600" y="742295"/>
+            <a:ext cx="6248400" cy="4401205"/>
+          </a:xfrm>
+          <a:prstGeom prst="rect">
+            <a:avLst/>
+          </a:prstGeom>
+          <a:noFill/>
+        </p:spPr>
+        <p:txBody>
+          <a:bodyPr wrap="square">
+            <a:spAutoFit/>
+          </a:bodyPr>
+          <a:lstStyle/>
+          <a:p>
+            <a:r>
+              <a:rPr lang="en-US" sz="1400" b="1" dirty="0"/>
+              <a:t>What does </a:t>
+            </a:r>
+            <a:r>
+              <a:rPr lang="en-US" sz="1400" b="1" dirty="0" err="1"/>
+              <a:t>Eventstream</a:t>
+            </a:r>
+            <a:r>
+              <a:rPr lang="en-US" sz="1400" b="1" dirty="0"/>
+              <a:t> do?</a:t>
+            </a:r>
+          </a:p>
+          <a:p>
+            <a:pPr>
+              <a:buFont typeface="+mj-lt"/>
+              <a:buAutoNum type="arabicPeriod"/>
+            </a:pPr>
+            <a:r>
+              <a:rPr lang="en-US" sz="1400" b="1" dirty="0"/>
+              <a:t>Receive real-time events</a:t>
+            </a:r>
+            <a:r>
+              <a:rPr lang="en-US" sz="1400" dirty="0"/>
+              <a:t> </a:t>
+            </a:r>
+          </a:p>
+          <a:p>
+            <a:pPr marL="742950" lvl="1" indent="-285750">
+              <a:buFont typeface="+mj-lt"/>
+              <a:buAutoNum type="arabicPeriod"/>
+            </a:pPr>
+            <a:r>
+              <a:rPr lang="en-US" sz="1400" dirty="0"/>
+              <a:t>Azure Event Hubs </a:t>
+            </a:r>
+          </a:p>
+          <a:p>
+            <a:pPr marL="742950" lvl="1" indent="-285750">
+              <a:buFont typeface="+mj-lt"/>
+              <a:buAutoNum type="arabicPeriod"/>
+            </a:pPr>
+            <a:r>
+              <a:rPr lang="en-US" sz="1400" dirty="0"/>
+              <a:t>Custom applications </a:t>
+            </a:r>
+          </a:p>
+          <a:p>
+            <a:pPr marL="742950" lvl="1" indent="-285750">
+              <a:buFont typeface="+mj-lt"/>
+              <a:buAutoNum type="arabicPeriod"/>
+            </a:pPr>
+            <a:r>
+              <a:rPr lang="en-US" sz="1400" dirty="0"/>
+              <a:t>IoT data </a:t>
+            </a:r>
+          </a:p>
+          <a:p>
+            <a:pPr marL="742950" lvl="1" indent="-285750">
+              <a:buFont typeface="+mj-lt"/>
+              <a:buAutoNum type="arabicPeriod"/>
+            </a:pPr>
+            <a:r>
+              <a:rPr lang="en-US" sz="1400" dirty="0"/>
+              <a:t>Real-time feeds </a:t>
+            </a:r>
+          </a:p>
+          <a:p>
+            <a:pPr>
+              <a:buFont typeface="+mj-lt"/>
+              <a:buAutoNum type="arabicPeriod"/>
+            </a:pPr>
+            <a:r>
+              <a:rPr lang="en-US" sz="1400" b="1" dirty="0"/>
+              <a:t>Process/filter events</a:t>
+            </a:r>
+            <a:r>
+              <a:rPr lang="en-US" sz="1400" dirty="0"/>
+              <a:t> </a:t>
+            </a:r>
+          </a:p>
+          <a:p>
+            <a:pPr marL="742950" lvl="1" indent="-285750">
+              <a:buFont typeface="+mj-lt"/>
+              <a:buAutoNum type="arabicPeriod"/>
+            </a:pPr>
+            <a:r>
+              <a:rPr lang="en-US" sz="1400" dirty="0"/>
+              <a:t>Filter records </a:t>
+            </a:r>
+          </a:p>
+          <a:p>
+            <a:pPr marL="742950" lvl="1" indent="-285750">
+              <a:buFont typeface="+mj-lt"/>
+              <a:buAutoNum type="arabicPeriod"/>
+            </a:pPr>
+            <a:r>
+              <a:rPr lang="en-US" sz="1400" dirty="0"/>
+              <a:t>Transform data </a:t>
+            </a:r>
+          </a:p>
+          <a:p>
+            <a:pPr marL="742950" lvl="1" indent="-285750">
+              <a:buFont typeface="+mj-lt"/>
+              <a:buAutoNum type="arabicPeriod"/>
+            </a:pPr>
+            <a:r>
+              <a:rPr lang="en-US" sz="1400" dirty="0"/>
+              <a:t>Manage event fields </a:t>
+            </a:r>
+          </a:p>
+          <a:p>
+            <a:pPr marL="742950" lvl="1" indent="-285750">
+              <a:buFont typeface="+mj-lt"/>
+              <a:buAutoNum type="arabicPeriod"/>
+            </a:pPr>
+            <a:r>
+              <a:rPr lang="en-US" sz="1400" dirty="0"/>
+              <a:t>Route different events to different destinations </a:t>
+            </a:r>
+          </a:p>
+          <a:p>
+            <a:pPr>
+              <a:buFont typeface="+mj-lt"/>
+              <a:buAutoNum type="arabicPeriod"/>
+            </a:pPr>
+            <a:r>
+              <a:rPr lang="en-US" sz="1400" b="1" dirty="0"/>
+              <a:t>Send data to destinations</a:t>
+            </a:r>
+            <a:r>
+              <a:rPr lang="en-US" sz="1400" dirty="0"/>
+              <a:t> </a:t>
+            </a:r>
+          </a:p>
+          <a:p>
+            <a:pPr marL="742950" lvl="1" indent="-285750">
+              <a:buFont typeface="+mj-lt"/>
+              <a:buAutoNum type="arabicPeriod"/>
+            </a:pPr>
+            <a:r>
+              <a:rPr lang="en-US" sz="1400" b="1" dirty="0" err="1"/>
+              <a:t>Eventhouse</a:t>
+            </a:r>
+            <a:r>
+              <a:rPr lang="en-US" sz="1400" dirty="0"/>
+              <a:t> </a:t>
+            </a:r>
+          </a:p>
+          <a:p>
+            <a:pPr marL="742950" lvl="1" indent="-285750">
+              <a:buFont typeface="+mj-lt"/>
+              <a:buAutoNum type="arabicPeriod"/>
+            </a:pPr>
+            <a:r>
+              <a:rPr lang="en-US" sz="1400" dirty="0"/>
+              <a:t>Lakehouse </a:t>
+            </a:r>
+          </a:p>
+          <a:p>
+            <a:pPr marL="742950" lvl="1" indent="-285750">
+              <a:buFont typeface="+mj-lt"/>
+              <a:buAutoNum type="arabicPeriod"/>
+            </a:pPr>
+            <a:r>
+              <a:rPr lang="en-US" sz="1400" dirty="0"/>
+              <a:t>Custom endpoints </a:t>
+            </a:r>
+          </a:p>
+          <a:p>
+            <a:pPr marL="742950" lvl="1" indent="-285750">
+              <a:buFont typeface="+mj-lt"/>
+              <a:buAutoNum type="arabicPeriod"/>
+            </a:pPr>
+            <a:r>
+              <a:rPr lang="en-US" sz="1400" dirty="0"/>
+              <a:t>Other supported Fabric destinations </a:t>
+            </a:r>
+          </a:p>
+          <a:p>
+            <a:pPr>
+              <a:buFont typeface="+mj-lt"/>
+              <a:buAutoNum type="arabicPeriod"/>
+            </a:pPr>
+            <a:r>
+              <a:rPr lang="en-US" sz="1400" b="1" dirty="0"/>
+              <a:t>Enable real-time analytics</a:t>
+            </a:r>
+            <a:r>
+              <a:rPr lang="en-US" sz="1400" dirty="0"/>
+              <a:t> </a:t>
+            </a:r>
+          </a:p>
+          <a:p>
+            <a:pPr marL="742950" lvl="1" indent="-285750">
+              <a:buFont typeface="+mj-lt"/>
+              <a:buAutoNum type="arabicPeriod"/>
+            </a:pPr>
+            <a:r>
+              <a:rPr lang="en-US" sz="1400" dirty="0"/>
+              <a:t>KQL queries </a:t>
+            </a:r>
+          </a:p>
+          <a:p>
+            <a:pPr marL="742950" lvl="1" indent="-285750">
+              <a:buFont typeface="+mj-lt"/>
+              <a:buAutoNum type="arabicPeriod"/>
+            </a:pPr>
+            <a:r>
+              <a:rPr lang="en-US" sz="1400" dirty="0"/>
+              <a:t>Real-time dashboards </a:t>
+            </a:r>
+          </a:p>
+          <a:p>
+            <a:pPr marL="742950" lvl="1" indent="-285750">
+              <a:buFont typeface="+mj-lt"/>
+              <a:buAutoNum type="arabicPeriod"/>
+            </a:pPr>
+            <a:r>
+              <a:rPr lang="en-US" sz="1400" dirty="0"/>
+              <a:t>Power BI real-time reporting</a:t>
+            </a:r>
+          </a:p>
+        </p:txBody>
+      </p:sp>
+    </p:spTree>
+    <p:extLst>
+      <p:ext uri="{BB962C8B-B14F-4D97-AF65-F5344CB8AC3E}">
+        <p14:creationId xmlns:p14="http://schemas.microsoft.com/office/powerpoint/2010/main" val="2358609482"/>
+      </p:ext>
+    </p:extLst>
+  </p:cSld>
+  <p:clrMapOvr>
+    <a:masterClrMapping/>
+  </p:clrMapOvr>
+</p:sld>
+</file>
+
+<file path=ppt/slides/slide26.xml><?xml version="1.0" encoding="utf-8"?>
+<p:sld xmlns:a="http://schemas.openxmlformats.org/drawingml/2006/main" xmlns:r="http://schemas.openxmlformats.org/officeDocument/2006/relationships" xmlns:p="http://schemas.openxmlformats.org/presentationml/2006/main">
+  <p:cSld>
+    <p:spTree>
+      <p:nvGrpSpPr>
+        <p:cNvPr id="1" name=""/>
+        <p:cNvGrpSpPr/>
+        <p:nvPr/>
+      </p:nvGrpSpPr>
+      <p:grpSpPr>
+        <a:xfrm>
+          <a:off x="0" y="0"/>
+          <a:ext cx="0" cy="0"/>
+          <a:chOff x="0" y="0"/>
+          <a:chExt cx="0" cy="0"/>
+        </a:xfrm>
+      </p:grpSpPr>
+      <p:sp>
+        <p:nvSpPr>
+          <p:cNvPr id="4" name="Title 3"/>
+          <p:cNvSpPr>
+            <a:spLocks noGrp="1"/>
+          </p:cNvSpPr>
+          <p:nvPr>
+            <p:ph type="title"/>
+          </p:nvPr>
+        </p:nvSpPr>
+        <p:spPr>
+          <a:xfrm>
+            <a:off x="512900" y="322232"/>
+            <a:ext cx="5715635" cy="368935"/>
+          </a:xfrm>
+        </p:spPr>
+        <p:txBody>
+          <a:bodyPr/>
+          <a:lstStyle/>
+          <a:p>
+            <a:r>
+              <a:rPr lang="en-US" altLang="en-GB" b="0">
+                <a:latin typeface="+mn-lt"/>
+                <a:ea typeface="Arial" panose="020B0604020202020204" pitchFamily="34" charset="0"/>
+                <a:cs typeface="+mn-lt"/>
+                <a:sym typeface="+mn-ea"/>
+              </a:rPr>
+              <a:t>What is Dataflow Gen2?</a:t>
+            </a:r>
+            <a:endParaRPr lang="en-GB" altLang="en-US"/>
+          </a:p>
+        </p:txBody>
+      </p:sp>
+      <p:sp>
+        <p:nvSpPr>
+          <p:cNvPr id="5" name="Text Box 4"/>
+          <p:cNvSpPr txBox="1"/>
+          <p:nvPr/>
+        </p:nvSpPr>
+        <p:spPr>
+          <a:xfrm>
+            <a:off x="513080" y="895350"/>
+            <a:ext cx="8048625" cy="3969385"/>
+          </a:xfrm>
+          <a:prstGeom prst="rect">
+            <a:avLst/>
+          </a:prstGeom>
+        </p:spPr>
+        <p:txBody>
+          <a:bodyPr wrap="square">
+            <a:spAutoFit/>
+          </a:bodyPr>
+          <a:lstStyle/>
+          <a:p>
+            <a:pPr marL="0" marR="0" lvl="1" indent="0" algn="l" rtl="0" eaLnBrk="1" fontAlgn="auto" latinLnBrk="0" hangingPunct="1">
+              <a:buClrTx/>
+              <a:buSzTx/>
+              <a:buNone/>
+            </a:pPr>
+            <a:r>
+              <a:rPr kumimoji="0" lang="en-US" altLang="en-GB" sz="1800" b="0" i="0" u="none" strike="noStrike" kern="0" cap="none" spc="0" normalizeH="0" baseline="0" noProof="1">
+                <a:latin typeface="+mn-lt"/>
+                <a:ea typeface="Arial" panose="020B0604020202020204" pitchFamily="34" charset="0"/>
+                <a:cs typeface="+mn-lt"/>
+              </a:rPr>
+              <a:t>Dataflow Gen2 is a low-code/no-code data transformation and integration capability in Fabric.</a:t>
+            </a:r>
+          </a:p>
+          <a:p>
+            <a:pPr marL="0" marR="0" lvl="1" indent="0" algn="l" rtl="0" eaLnBrk="1" fontAlgn="auto" latinLnBrk="0" hangingPunct="1">
+              <a:buClrTx/>
+              <a:buSzTx/>
+              <a:buNone/>
+            </a:pPr>
+            <a:r>
+              <a:rPr kumimoji="0" lang="en-US" altLang="en-GB" sz="1800" b="0" i="0" u="none" strike="noStrike" kern="0" cap="none" spc="0" normalizeH="0" baseline="0" noProof="1">
+                <a:latin typeface="+mn-lt"/>
+                <a:ea typeface="Arial" panose="020B0604020202020204" pitchFamily="34" charset="0"/>
+                <a:cs typeface="+mn-lt"/>
+              </a:rPr>
+              <a:t>It is based on the Power Query experience.</a:t>
+            </a:r>
+          </a:p>
+          <a:p>
+            <a:pPr marL="0" marR="0" lvl="1" indent="0" algn="l" rtl="0" eaLnBrk="1" fontAlgn="auto" latinLnBrk="0" hangingPunct="1">
+              <a:buClrTx/>
+              <a:buSzTx/>
+              <a:buNone/>
+            </a:pPr>
+            <a:r>
+              <a:rPr kumimoji="0" lang="en-US" altLang="en-GB" sz="1800" b="0" i="0" u="none" strike="noStrike" kern="0" cap="none" spc="0" normalizeH="0" baseline="0" noProof="1">
+                <a:latin typeface="+mn-lt"/>
+                <a:ea typeface="Arial" panose="020B0604020202020204" pitchFamily="34" charset="0"/>
+                <a:cs typeface="+mn-lt"/>
+              </a:rPr>
+              <a:t>You can perform transformations such as:</a:t>
+            </a:r>
+          </a:p>
+          <a:p>
+            <a:pPr marL="0" marR="0" lvl="1" indent="0" algn="l" rtl="0" eaLnBrk="1" fontAlgn="auto" latinLnBrk="0" hangingPunct="1">
+              <a:buClrTx/>
+              <a:buSzTx/>
+              <a:buNone/>
+            </a:pPr>
+            <a:endParaRPr kumimoji="0" lang="en-US" altLang="en-GB" sz="1800" b="0" i="0" u="none" strike="noStrike" kern="0" cap="none" spc="0" normalizeH="0" baseline="0" noProof="1">
+              <a:latin typeface="+mn-lt"/>
+              <a:ea typeface="Arial" panose="020B0604020202020204" pitchFamily="34" charset="0"/>
+              <a:cs typeface="+mn-lt"/>
+            </a:endParaRPr>
+          </a:p>
+          <a:p>
+            <a:pPr marL="457200" marR="0" lvl="2" indent="0" algn="l" rtl="0" eaLnBrk="1" fontAlgn="auto" latinLnBrk="0" hangingPunct="1">
+              <a:buClrTx/>
+              <a:buSzTx/>
+              <a:buNone/>
+            </a:pPr>
+            <a:r>
+              <a:rPr kumimoji="0" lang="en-US" altLang="en-GB" sz="1800" b="0" i="0" u="none" strike="noStrike" kern="0" cap="none" spc="0" normalizeH="0" baseline="0" noProof="1">
+                <a:latin typeface="+mn-lt"/>
+                <a:ea typeface="Arial" panose="020B0604020202020204" pitchFamily="34" charset="0"/>
+                <a:cs typeface="+mn-lt"/>
+              </a:rPr>
+              <a:t>Filter rows</a:t>
+            </a:r>
+          </a:p>
+          <a:p>
+            <a:pPr marL="457200" marR="0" lvl="2" indent="0" algn="l" rtl="0" eaLnBrk="1" fontAlgn="auto" latinLnBrk="0" hangingPunct="1">
+              <a:buClrTx/>
+              <a:buSzTx/>
+              <a:buNone/>
+            </a:pPr>
+            <a:r>
+              <a:rPr kumimoji="0" lang="en-US" altLang="en-GB" sz="1800" b="0" i="0" u="none" strike="noStrike" kern="0" cap="none" spc="0" normalizeH="0" baseline="0" noProof="1">
+                <a:latin typeface="+mn-lt"/>
+                <a:ea typeface="Arial" panose="020B0604020202020204" pitchFamily="34" charset="0"/>
+                <a:cs typeface="+mn-lt"/>
+              </a:rPr>
+              <a:t>Remove columns</a:t>
+            </a:r>
+          </a:p>
+          <a:p>
+            <a:pPr marL="457200" marR="0" lvl="2" indent="0" algn="l" rtl="0" eaLnBrk="1" fontAlgn="auto" latinLnBrk="0" hangingPunct="1">
+              <a:buClrTx/>
+              <a:buSzTx/>
+              <a:buNone/>
+            </a:pPr>
+            <a:r>
+              <a:rPr kumimoji="0" lang="en-US" altLang="en-GB" sz="1800" b="0" i="0" u="none" strike="noStrike" kern="0" cap="none" spc="0" normalizeH="0" baseline="0" noProof="1">
+                <a:latin typeface="+mn-lt"/>
+                <a:ea typeface="Arial" panose="020B0604020202020204" pitchFamily="34" charset="0"/>
+                <a:cs typeface="+mn-lt"/>
+              </a:rPr>
+              <a:t>Rename columns</a:t>
+            </a:r>
+          </a:p>
+          <a:p>
+            <a:pPr marL="457200" marR="0" lvl="2" indent="0" algn="l" rtl="0" eaLnBrk="1" fontAlgn="auto" latinLnBrk="0" hangingPunct="1">
+              <a:buClrTx/>
+              <a:buSzTx/>
+              <a:buNone/>
+            </a:pPr>
+            <a:r>
+              <a:rPr kumimoji="0" lang="en-US" altLang="en-GB" sz="1800" b="0" i="0" u="none" strike="noStrike" kern="0" cap="none" spc="0" normalizeH="0" baseline="0" noProof="1">
+                <a:latin typeface="+mn-lt"/>
+                <a:ea typeface="Arial" panose="020B0604020202020204" pitchFamily="34" charset="0"/>
+                <a:cs typeface="+mn-lt"/>
+              </a:rPr>
+              <a:t>Change data types</a:t>
+            </a:r>
+          </a:p>
+          <a:p>
+            <a:pPr marL="457200" marR="0" lvl="2" indent="0" algn="l" rtl="0" eaLnBrk="1" fontAlgn="auto" latinLnBrk="0" hangingPunct="1">
+              <a:buClrTx/>
+              <a:buSzTx/>
+              <a:buNone/>
+            </a:pPr>
+            <a:r>
+              <a:rPr kumimoji="0" lang="en-US" altLang="en-GB" sz="1800" b="0" i="0" u="none" strike="noStrike" kern="0" cap="none" spc="0" normalizeH="0" baseline="0" noProof="1">
+                <a:latin typeface="+mn-lt"/>
+                <a:ea typeface="Arial" panose="020B0604020202020204" pitchFamily="34" charset="0"/>
+                <a:cs typeface="+mn-lt"/>
+              </a:rPr>
+              <a:t>Merge</a:t>
+            </a:r>
+          </a:p>
+          <a:p>
+            <a:pPr marL="457200" marR="0" lvl="2" indent="0" algn="l" rtl="0" eaLnBrk="1" fontAlgn="auto" latinLnBrk="0" hangingPunct="1">
+              <a:buClrTx/>
+              <a:buSzTx/>
+              <a:buNone/>
+            </a:pPr>
+            <a:r>
+              <a:rPr kumimoji="0" lang="en-US" altLang="en-GB" sz="1800" b="0" i="0" u="none" strike="noStrike" kern="0" cap="none" spc="0" normalizeH="0" baseline="0" noProof="1">
+                <a:latin typeface="+mn-lt"/>
+                <a:ea typeface="Arial" panose="020B0604020202020204" pitchFamily="34" charset="0"/>
+                <a:cs typeface="+mn-lt"/>
+              </a:rPr>
+              <a:t>Append</a:t>
+            </a:r>
+          </a:p>
+          <a:p>
+            <a:pPr marL="457200" marR="0" lvl="2" indent="0" algn="l" rtl="0" eaLnBrk="1" fontAlgn="auto" latinLnBrk="0" hangingPunct="1">
+              <a:buClrTx/>
+              <a:buSzTx/>
+              <a:buNone/>
+            </a:pPr>
+            <a:r>
+              <a:rPr kumimoji="0" lang="en-US" altLang="en-GB" sz="1800" b="0" i="0" u="none" strike="noStrike" kern="0" cap="none" spc="0" normalizeH="0" baseline="0" noProof="1">
+                <a:latin typeface="+mn-lt"/>
+                <a:ea typeface="Arial" panose="020B0604020202020204" pitchFamily="34" charset="0"/>
+                <a:cs typeface="+mn-lt"/>
+              </a:rPr>
+              <a:t>Group By</a:t>
+            </a:r>
+          </a:p>
+          <a:p>
+            <a:pPr marL="457200" marR="0" lvl="2" indent="0" algn="l" rtl="0" eaLnBrk="1" fontAlgn="auto" latinLnBrk="0" hangingPunct="1">
+              <a:buClrTx/>
+              <a:buSzTx/>
+              <a:buNone/>
+            </a:pPr>
+            <a:r>
+              <a:rPr kumimoji="0" lang="en-US" altLang="en-GB" sz="1800" b="0" i="0" u="none" strike="noStrike" kern="0" cap="none" spc="0" normalizeH="0" baseline="0" noProof="1">
+                <a:latin typeface="+mn-lt"/>
+                <a:ea typeface="Arial" panose="020B0604020202020204" pitchFamily="34" charset="0"/>
+                <a:cs typeface="+mn-lt"/>
+              </a:rPr>
+              <a:t>Replace values</a:t>
+            </a:r>
+          </a:p>
+          <a:p>
+            <a:pPr marL="457200" marR="0" lvl="2" indent="0" algn="l" rtl="0" eaLnBrk="1" fontAlgn="auto" latinLnBrk="0" hangingPunct="1">
+              <a:buClrTx/>
+              <a:buSzTx/>
+              <a:buNone/>
+            </a:pPr>
+            <a:r>
+              <a:rPr kumimoji="0" lang="en-US" altLang="en-GB" sz="1800" b="0" i="0" u="none" strike="noStrike" kern="0" cap="none" spc="0" normalizeH="0" baseline="0" noProof="1">
+                <a:latin typeface="+mn-lt"/>
+                <a:ea typeface="Arial" panose="020B0604020202020204" pitchFamily="34" charset="0"/>
+                <a:cs typeface="+mn-lt"/>
+              </a:rPr>
+              <a:t>Derived columns</a:t>
+            </a:r>
+          </a:p>
+        </p:txBody>
+      </p:sp>
+    </p:spTree>
+  </p:cSld>
+  <p:clrMapOvr>
+    <a:masterClrMapping/>
+  </p:clrMapOvr>
+</p:sld>
+</file>
+
+<file path=ppt/slides/slide27.xml><?xml version="1.0" encoding="utf-8"?>
+<p:sld xmlns:a="http://schemas.openxmlformats.org/drawingml/2006/main" xmlns:r="http://schemas.openxmlformats.org/officeDocument/2006/relationships" xmlns:p="http://schemas.openxmlformats.org/presentationml/2006/main">
+  <p:cSld>
+    <p:spTree>
+      <p:nvGrpSpPr>
+        <p:cNvPr id="1" name=""/>
+        <p:cNvGrpSpPr/>
+        <p:nvPr/>
+      </p:nvGrpSpPr>
+      <p:grpSpPr>
+        <a:xfrm>
+          <a:off x="0" y="0"/>
+          <a:ext cx="0" cy="0"/>
+          <a:chOff x="0" y="0"/>
+          <a:chExt cx="0" cy="0"/>
+        </a:xfrm>
+      </p:grpSpPr>
+      <p:sp>
+        <p:nvSpPr>
+          <p:cNvPr id="4" name="Title 3"/>
+          <p:cNvSpPr>
+            <a:spLocks noGrp="1"/>
+          </p:cNvSpPr>
+          <p:nvPr>
+            <p:ph type="title"/>
+          </p:nvPr>
+        </p:nvSpPr>
+        <p:spPr>
+          <a:xfrm>
+            <a:off x="512900" y="322232"/>
+            <a:ext cx="5715635" cy="368935"/>
+          </a:xfrm>
+        </p:spPr>
+        <p:txBody>
+          <a:bodyPr/>
+          <a:lstStyle/>
           <a:p>
             <a:r>
               <a:rPr lang="en-US" altLang="en-GB"/>
               <a:t>Dataflow Gen2 vs Copy Data</a:t>
             </a:r>
-            <a:endParaRPr lang="en-US" altLang="en-GB"/>
           </a:p>
         </p:txBody>
       </p:sp>
@@ -5620,29 +5901,41 @@
         </p:nvGraphicFramePr>
         <p:xfrm>
           <a:off x="609600" y="876935"/>
-          <a:ext cx="7863840" cy="0"/>
+          <a:ext cx="7863840" cy="1645920"/>
         </p:xfrm>
         <a:graphic>
           <a:graphicData uri="http://schemas.openxmlformats.org/drawingml/2006/table">
             <a:tbl>
               <a:tblPr/>
               <a:tblGrid>
-                <a:gridCol w="3931920"/>
-                <a:gridCol w="3931920"/>
+                <a:gridCol w="3931920">
+                  <a:extLst>
+                    <a:ext uri="{9D8B030D-6E8A-4147-A177-3AD203B41FA5}">
+                      <a16:colId xmlns:a16="http://schemas.microsoft.com/office/drawing/2014/main" val="20000"/>
+                    </a:ext>
+                  </a:extLst>
+                </a:gridCol>
+                <a:gridCol w="3931920">
+                  <a:extLst>
+                    <a:ext uri="{9D8B030D-6E8A-4147-A177-3AD203B41FA5}">
+                      <a16:colId xmlns:a16="http://schemas.microsoft.com/office/drawing/2014/main" val="20001"/>
+                    </a:ext>
+                  </a:extLst>
+                </a:gridCol>
               </a:tblGrid>
               <a:tr h="0">
                 <a:tc>
                   <a:txBody>
                     <a:bodyPr/>
+                    <a:lstStyle/>
                     <a:p>
                       <a:r>
                         <a:rPr lang="en-US" altLang="zh-CN" sz="1800"/>
                         <a:t>Copy Data</a:t>
                       </a:r>
-                      <a:endParaRPr lang="en-US" altLang="zh-CN" sz="1800"/>
                     </a:p>
                   </a:txBody>
-                  <a:tcPr marL="0" marR="0" marT="0" marB="0" anchor="ctr" anchorCtr="0">
+                  <a:tcPr marL="0" marR="0" marT="0" marB="0" anchor="ctr">
                     <a:lnL w="12700">
                       <a:solidFill>
                         <a:schemeClr val="tx1"/>
@@ -5673,15 +5966,15 @@
                 <a:tc>
                   <a:txBody>
                     <a:bodyPr/>
+                    <a:lstStyle/>
                     <a:p>
                       <a:r>
                         <a:rPr lang="en-US" altLang="zh-CN" sz="1800"/>
                         <a:t>Dataflow Gen2</a:t>
                       </a:r>
-                      <a:endParaRPr lang="en-US" altLang="zh-CN" sz="1800"/>
                     </a:p>
                   </a:txBody>
-                  <a:tcPr marL="0" marR="0" marT="0" marB="0" anchor="ctr" anchorCtr="0">
+                  <a:tcPr marL="0" marR="0" marT="0" marB="0" anchor="ctr">
                     <a:lnL w="12700">
                       <a:solidFill>
                         <a:schemeClr val="tx1"/>
@@ -5709,20 +6002,25 @@
                     <a:noFill/>
                   </a:tcPr>
                 </a:tc>
+                <a:extLst>
+                  <a:ext uri="{0D108BD9-81ED-4DB2-BD59-A6C34878D82A}">
+                    <a16:rowId xmlns:a16="http://schemas.microsoft.com/office/drawing/2014/main" val="10000"/>
+                  </a:ext>
+                </a:extLst>
               </a:tr>
               <a:tr h="0">
                 <a:tc>
                   <a:txBody>
                     <a:bodyPr/>
+                    <a:lstStyle/>
                     <a:p>
                       <a:r>
                         <a:rPr lang="en-US" altLang="zh-CN" sz="1800"/>
                         <a:t>Mainly moves data</a:t>
                       </a:r>
-                      <a:endParaRPr lang="en-US" altLang="zh-CN" sz="1800"/>
                     </a:p>
                   </a:txBody>
-                  <a:tcPr marL="0" marR="0" marT="0" marB="0" anchor="ctr" anchorCtr="0">
+                  <a:tcPr marL="0" marR="0" marT="0" marB="0" anchor="ctr">
                     <a:lnL w="12700">
                       <a:solidFill>
                         <a:schemeClr val="tx1"/>
@@ -5753,15 +6051,15 @@
                 <a:tc>
                   <a:txBody>
                     <a:bodyPr/>
+                    <a:lstStyle/>
                     <a:p>
                       <a:r>
                         <a:rPr lang="en-US" altLang="zh-CN" sz="1800"/>
                         <a:t>Moves + transforms data</a:t>
                       </a:r>
-                      <a:endParaRPr lang="en-US" altLang="zh-CN" sz="1800"/>
                     </a:p>
                   </a:txBody>
-                  <a:tcPr marL="0" marR="0" marT="0" marB="0" anchor="ctr" anchorCtr="0">
+                  <a:tcPr marL="0" marR="0" marT="0" marB="0" anchor="ctr">
                     <a:lnL w="12700">
                       <a:solidFill>
                         <a:schemeClr val="tx1"/>
@@ -5789,20 +6087,25 @@
                     <a:noFill/>
                   </a:tcPr>
                 </a:tc>
+                <a:extLst>
+                  <a:ext uri="{0D108BD9-81ED-4DB2-BD59-A6C34878D82A}">
+                    <a16:rowId xmlns:a16="http://schemas.microsoft.com/office/drawing/2014/main" val="10001"/>
+                  </a:ext>
+                </a:extLst>
               </a:tr>
               <a:tr h="0">
                 <a:tc>
                   <a:txBody>
                     <a:bodyPr/>
+                    <a:lstStyle/>
                     <a:p>
                       <a:r>
                         <a:rPr lang="en-US" altLang="zh-CN" sz="1800"/>
                         <a:t>Simple ingestion</a:t>
                       </a:r>
-                      <a:endParaRPr lang="en-US" altLang="zh-CN" sz="1800"/>
                     </a:p>
                   </a:txBody>
-                  <a:tcPr marL="0" marR="0" marT="0" marB="0" anchor="ctr" anchorCtr="0">
+                  <a:tcPr marL="0" marR="0" marT="0" marB="0" anchor="ctr">
                     <a:lnL w="12700">
                       <a:solidFill>
                         <a:schemeClr val="tx1"/>
@@ -5833,15 +6136,15 @@
                 <a:tc>
                   <a:txBody>
                     <a:bodyPr/>
+                    <a:lstStyle/>
                     <a:p>
                       <a:r>
                         <a:rPr lang="en-US" altLang="zh-CN" sz="1800"/>
                         <a:t>Transformation-focused</a:t>
                       </a:r>
-                      <a:endParaRPr lang="en-US" altLang="zh-CN" sz="1800"/>
                     </a:p>
                   </a:txBody>
-                  <a:tcPr marL="0" marR="0" marT="0" marB="0" anchor="ctr" anchorCtr="0">
+                  <a:tcPr marL="0" marR="0" marT="0" marB="0" anchor="ctr">
                     <a:lnL w="12700">
                       <a:solidFill>
                         <a:schemeClr val="tx1"/>
@@ -5869,20 +6172,25 @@
                     <a:noFill/>
                   </a:tcPr>
                 </a:tc>
+                <a:extLst>
+                  <a:ext uri="{0D108BD9-81ED-4DB2-BD59-A6C34878D82A}">
+                    <a16:rowId xmlns:a16="http://schemas.microsoft.com/office/drawing/2014/main" val="10002"/>
+                  </a:ext>
+                </a:extLst>
               </a:tr>
               <a:tr h="0">
                 <a:tc>
                   <a:txBody>
                     <a:bodyPr/>
+                    <a:lstStyle/>
                     <a:p>
                       <a:r>
                         <a:rPr lang="en-US" altLang="zh-CN" sz="1800"/>
                         <a:t>Pipeline activity</a:t>
                       </a:r>
-                      <a:endParaRPr lang="en-US" altLang="zh-CN" sz="1800"/>
                     </a:p>
                   </a:txBody>
-                  <a:tcPr marL="0" marR="0" marT="0" marB="0" anchor="ctr" anchorCtr="0">
+                  <a:tcPr marL="0" marR="0" marT="0" marB="0" anchor="ctr">
                     <a:lnL w="12700">
                       <a:solidFill>
                         <a:schemeClr val="tx1"/>
@@ -5913,15 +6221,15 @@
                 <a:tc>
                   <a:txBody>
                     <a:bodyPr/>
+                    <a:lstStyle/>
                     <a:p>
                       <a:r>
                         <a:rPr lang="en-US" altLang="zh-CN" sz="1800"/>
                         <a:t>Power Query experience</a:t>
                       </a:r>
-                      <a:endParaRPr lang="en-US" altLang="zh-CN" sz="1800"/>
                     </a:p>
                   </a:txBody>
-                  <a:tcPr marL="0" marR="0" marT="0" marB="0" anchor="ctr" anchorCtr="0">
+                  <a:tcPr marL="0" marR="0" marT="0" marB="0" anchor="ctr">
                     <a:lnL w="12700">
                       <a:solidFill>
                         <a:schemeClr val="tx1"/>
@@ -5949,20 +6257,25 @@
                     <a:noFill/>
                   </a:tcPr>
                 </a:tc>
+                <a:extLst>
+                  <a:ext uri="{0D108BD9-81ED-4DB2-BD59-A6C34878D82A}">
+                    <a16:rowId xmlns:a16="http://schemas.microsoft.com/office/drawing/2014/main" val="10003"/>
+                  </a:ext>
+                </a:extLst>
               </a:tr>
               <a:tr h="0">
                 <a:tc>
                   <a:txBody>
                     <a:bodyPr/>
+                    <a:lstStyle/>
                     <a:p>
                       <a:r>
                         <a:rPr lang="en-US" altLang="zh-CN" sz="1800"/>
                         <a:t>Low transformation capability</a:t>
                       </a:r>
-                      <a:endParaRPr lang="en-US" altLang="zh-CN" sz="1800"/>
                     </a:p>
                   </a:txBody>
-                  <a:tcPr marL="0" marR="0" marT="0" marB="0" anchor="ctr" anchorCtr="0">
+                  <a:tcPr marL="0" marR="0" marT="0" marB="0" anchor="ctr">
                     <a:lnL w="12700">
                       <a:solidFill>
                         <a:schemeClr val="tx1"/>
@@ -5993,15 +6306,15 @@
                 <a:tc>
                   <a:txBody>
                     <a:bodyPr/>
+                    <a:lstStyle/>
                     <a:p>
                       <a:r>
                         <a:rPr lang="en-US" altLang="zh-CN" sz="1800"/>
                         <a:t>Rich transformations</a:t>
                       </a:r>
-                      <a:endParaRPr lang="en-US" altLang="zh-CN" sz="1800"/>
                     </a:p>
                   </a:txBody>
-                  <a:tcPr marL="0" marR="0" marT="0" marB="0" anchor="ctr" anchorCtr="0">
+                  <a:tcPr marL="0" marR="0" marT="0" marB="0" anchor="ctr">
                     <a:lnL w="12700">
                       <a:solidFill>
                         <a:schemeClr val="tx1"/>
@@ -6029,20 +6342,25 @@
                     <a:noFill/>
                   </a:tcPr>
                 </a:tc>
+                <a:extLst>
+                  <a:ext uri="{0D108BD9-81ED-4DB2-BD59-A6C34878D82A}">
+                    <a16:rowId xmlns:a16="http://schemas.microsoft.com/office/drawing/2014/main" val="10004"/>
+                  </a:ext>
+                </a:extLst>
               </a:tr>
               <a:tr h="0">
                 <a:tc>
                   <a:txBody>
                     <a:bodyPr/>
+                    <a:lstStyle/>
                     <a:p>
                       <a:r>
                         <a:rPr lang="en-US" altLang="zh-CN" sz="1800"/>
                         <a:t>A → B</a:t>
                       </a:r>
-                      <a:endParaRPr lang="en-US" altLang="zh-CN" sz="1800"/>
                     </a:p>
                   </a:txBody>
-                  <a:tcPr marL="0" marR="0" marT="0" marB="0" anchor="ctr" anchorCtr="0">
+                  <a:tcPr marL="0" marR="0" marT="0" marB="0" anchor="ctr">
                     <a:lnL w="12700">
                       <a:solidFill>
                         <a:schemeClr val="tx1"/>
@@ -6073,15 +6391,15 @@
                 <a:tc>
                   <a:txBody>
                     <a:bodyPr/>
+                    <a:lstStyle/>
                     <a:p>
                       <a:r>
                         <a:rPr lang="en-US" altLang="zh-CN" sz="1800"/>
                         <a:t>Source → Transform → Destination</a:t>
                       </a:r>
-                      <a:endParaRPr lang="en-US" altLang="zh-CN" sz="1800"/>
                     </a:p>
                   </a:txBody>
-                  <a:tcPr marL="0" marR="0" marT="0" marB="0" anchor="ctr" anchorCtr="0">
+                  <a:tcPr marL="0" marR="0" marT="0" marB="0" anchor="ctr">
                     <a:lnL w="12700">
                       <a:solidFill>
                         <a:schemeClr val="tx1"/>
@@ -6109,6 +6427,11 @@
                     <a:noFill/>
                   </a:tcPr>
                 </a:tc>
+                <a:extLst>
+                  <a:ext uri="{0D108BD9-81ED-4DB2-BD59-A6C34878D82A}">
+                    <a16:rowId xmlns:a16="http://schemas.microsoft.com/office/drawing/2014/main" val="10005"/>
+                  </a:ext>
+                </a:extLst>
               </a:tr>
             </a:tbl>
           </a:graphicData>
@@ -6119,17 +6442,10 @@
   <p:clrMapOvr>
     <a:masterClrMapping/>
   </p:clrMapOvr>
-  <p:timing>
-    <p:tnLst>
-      <p:par>
-        <p:cTn id="1" dur="indefinite" restart="never" nodeType="tmRoot"/>
-      </p:par>
-    </p:tnLst>
-  </p:timing>
 </p:sld>
 </file>
 
-<file path=ppt/slides/slide25.xml><?xml version="1.0" encoding="utf-8"?>
+<file path=ppt/slides/slide28.xml><?xml version="1.0" encoding="utf-8"?>
 <p:sld xmlns:a="http://schemas.openxmlformats.org/drawingml/2006/main" xmlns:r="http://schemas.openxmlformats.org/officeDocument/2006/relationships" xmlns:p="http://schemas.openxmlformats.org/presentationml/2006/main">
   <p:cSld>
     <p:spTree>
@@ -6148,8 +6464,8 @@
       </p:grpSpPr>
       <p:sp>
         <p:nvSpPr>
-          <p:cNvPr id="2" name="object 2"/>
-          <p:cNvSpPr txBox="1">
+          <p:cNvPr id="4" name="Title 3"/>
+          <p:cNvSpPr>
             <a:spLocks noGrp="1"/>
           </p:cNvSpPr>
           <p:nvPr>
@@ -6158,98 +6474,513 @@
         </p:nvSpPr>
         <p:spPr>
           <a:xfrm>
-            <a:off x="3268093" y="2233930"/>
-            <a:ext cx="2608580" cy="635000"/>
+            <a:off x="512900" y="322232"/>
+            <a:ext cx="5715635" cy="368935"/>
+          </a:xfrm>
+        </p:spPr>
+        <p:txBody>
+          <a:bodyPr/>
+          <a:lstStyle/>
+          <a:p>
+            <a:r>
+              <a:rPr lang="en-US" dirty="0"/>
+              <a:t>A </a:t>
+            </a:r>
+            <a:r>
+              <a:rPr lang="en-US" b="1" dirty="0"/>
+              <a:t>Deployment Pipeline</a:t>
+            </a:r>
+            <a:endParaRPr lang="en-US" altLang="en-GB" dirty="0"/>
+          </a:p>
+        </p:txBody>
+      </p:sp>
+      <p:sp>
+        <p:nvSpPr>
+          <p:cNvPr id="5" name="TextBox 4">
+            <a:extLst>
+              <a:ext uri="{FF2B5EF4-FFF2-40B4-BE49-F238E27FC236}">
+                <a16:creationId xmlns:a16="http://schemas.microsoft.com/office/drawing/2014/main" id="{04009FA7-51D2-A030-A4E8-979397E5EE72}"/>
+              </a:ext>
+            </a:extLst>
+          </p:cNvPr>
+          <p:cNvSpPr txBox="1"/>
+          <p:nvPr/>
+        </p:nvSpPr>
+        <p:spPr>
+          <a:xfrm>
+            <a:off x="512900" y="895350"/>
+            <a:ext cx="8478700" cy="3323987"/>
           </a:xfrm>
           <a:prstGeom prst="rect">
             <a:avLst/>
           </a:prstGeom>
-        </p:spPr>
-        <p:txBody>
-          <a:bodyPr vert="horz" wrap="square" lIns="0" tIns="12700" rIns="0" bIns="0" rtlCol="0">
+          <a:noFill/>
+        </p:spPr>
+        <p:txBody>
+          <a:bodyPr wrap="square">
             <a:spAutoFit/>
           </a:bodyPr>
           <a:lstStyle/>
           <a:p>
-            <a:pPr marL="12700">
-              <a:lnSpc>
-                <a:spcPct val="100000"/>
-              </a:lnSpc>
-              <a:spcBef>
-                <a:spcPts val="100"/>
-              </a:spcBef>
-            </a:pPr>
-            <a:r>
-              <a:rPr sz="4000" b="0" spc="275" dirty="0">
-                <a:solidFill>
-                  <a:srgbClr val="FFFFFF"/>
-                </a:solidFill>
-                <a:latin typeface="Calibri" panose="020F0502020204030204"/>
-                <a:cs typeface="Calibri" panose="020F0502020204030204"/>
-              </a:rPr>
-              <a:t>Thank</a:t>
-            </a:r>
-            <a:r>
-              <a:rPr sz="4000" b="0" spc="180" dirty="0">
-                <a:solidFill>
-                  <a:srgbClr val="FFFFFF"/>
-                </a:solidFill>
-                <a:latin typeface="Calibri" panose="020F0502020204030204"/>
-                <a:cs typeface="Calibri" panose="020F0502020204030204"/>
-              </a:rPr>
-              <a:t> </a:t>
-            </a:r>
-            <a:r>
-              <a:rPr sz="4000" b="0" spc="85" dirty="0">
-                <a:solidFill>
-                  <a:srgbClr val="FFFFFF"/>
-                </a:solidFill>
-                <a:latin typeface="Calibri" panose="020F0502020204030204"/>
-                <a:cs typeface="Calibri" panose="020F0502020204030204"/>
-              </a:rPr>
-              <a:t>You!</a:t>
-            </a:r>
-            <a:endParaRPr sz="4000">
-              <a:latin typeface="Calibri" panose="020F0502020204030204"/>
-              <a:cs typeface="Calibri" panose="020F0502020204030204"/>
-            </a:endParaRPr>
+            <a:r>
+              <a:rPr lang="en-US" sz="1400" dirty="0"/>
+              <a:t>A </a:t>
+            </a:r>
+            <a:r>
+              <a:rPr lang="en-US" sz="1400" b="1" dirty="0"/>
+              <a:t>Deployment Pipeline</a:t>
+            </a:r>
+            <a:r>
+              <a:rPr lang="en-US" sz="1400" dirty="0"/>
+              <a:t> in Power BI Service is a feature used to </a:t>
+            </a:r>
+            <a:r>
+              <a:rPr lang="en-US" sz="1400" b="1" dirty="0"/>
+              <a:t>move Power BI content through different development stages</a:t>
+            </a:r>
+            <a:r>
+              <a:rPr lang="en-US" sz="1400" dirty="0"/>
+              <a:t> in a </a:t>
+            </a:r>
+            <a:r>
+              <a:rPr lang="en-US" sz="1400" dirty="0">
+                <a:latin typeface="+mn-lt"/>
+              </a:rPr>
+              <a:t>controlled</a:t>
+            </a:r>
+            <a:r>
+              <a:rPr lang="en-US" sz="1400" dirty="0"/>
+              <a:t> and organized way.</a:t>
+            </a:r>
+          </a:p>
+          <a:p>
+            <a:endParaRPr lang="en-US" sz="1400" dirty="0"/>
+          </a:p>
+          <a:p>
+            <a:r>
+              <a:rPr lang="en-US" sz="1400" dirty="0"/>
+              <a:t>Suppose you are developing a Power BI sales report.</a:t>
+            </a:r>
+          </a:p>
+          <a:p>
+            <a:r>
+              <a:rPr lang="en-US" sz="1400" dirty="0"/>
+              <a:t>You don't want to directly modify the report that business users are currently using.</a:t>
+            </a:r>
+          </a:p>
+          <a:p>
+            <a:endParaRPr lang="en-US" sz="1400" dirty="0"/>
+          </a:p>
+          <a:p>
+            <a:r>
+              <a:rPr lang="en-US" sz="1400" b="1" dirty="0"/>
+              <a:t>Development</a:t>
+            </a:r>
+          </a:p>
+          <a:p>
+            <a:r>
+              <a:rPr lang="en-US" sz="1400" dirty="0"/>
+              <a:t>This is where developers create and modify:</a:t>
+            </a:r>
+          </a:p>
+          <a:p>
+            <a:pPr lvl="1">
+              <a:buFont typeface="Arial" panose="020B0604020202020204" pitchFamily="34" charset="0"/>
+              <a:buChar char="•"/>
+            </a:pPr>
+            <a:r>
+              <a:rPr lang="en-US" sz="1400" dirty="0"/>
+              <a:t>Reports </a:t>
+            </a:r>
+          </a:p>
+          <a:p>
+            <a:pPr lvl="1">
+              <a:buFont typeface="Arial" panose="020B0604020202020204" pitchFamily="34" charset="0"/>
+              <a:buChar char="•"/>
+            </a:pPr>
+            <a:r>
+              <a:rPr lang="en-US" sz="1400" dirty="0"/>
+              <a:t>Semantic models </a:t>
+            </a:r>
+          </a:p>
+          <a:p>
+            <a:pPr lvl="1">
+              <a:buFont typeface="Arial" panose="020B0604020202020204" pitchFamily="34" charset="0"/>
+              <a:buChar char="•"/>
+            </a:pPr>
+            <a:r>
+              <a:rPr lang="en-US" sz="1400" dirty="0"/>
+              <a:t>Dashboards </a:t>
+            </a:r>
+          </a:p>
+          <a:p>
+            <a:pPr lvl="1">
+              <a:buFont typeface="Arial" panose="020B0604020202020204" pitchFamily="34" charset="0"/>
+              <a:buChar char="•"/>
+            </a:pPr>
+            <a:r>
+              <a:rPr lang="en-US" sz="1400" dirty="0"/>
+              <a:t>Dataflows </a:t>
+            </a:r>
+          </a:p>
+          <a:p>
+            <a:pPr lvl="1">
+              <a:buFont typeface="Arial" panose="020B0604020202020204" pitchFamily="34" charset="0"/>
+              <a:buChar char="•"/>
+            </a:pPr>
+            <a:r>
+              <a:rPr lang="en-US" sz="1400" dirty="0"/>
+              <a:t>Other supported Power BI/Fabric content</a:t>
+            </a:r>
+          </a:p>
+          <a:p>
+            <a:endParaRPr lang="en-US" sz="1400" dirty="0"/>
+          </a:p>
+          <a:p>
+            <a:endParaRPr lang="en-IN" sz="1400" dirty="0"/>
           </a:p>
         </p:txBody>
       </p:sp>
       <p:pic>
         <p:nvPicPr>
-          <p:cNvPr id="3" name="object 3"/>
-          <p:cNvPicPr/>
+          <p:cNvPr id="7" name="Picture 6">
+            <a:extLst>
+              <a:ext uri="{FF2B5EF4-FFF2-40B4-BE49-F238E27FC236}">
+                <a16:creationId xmlns:a16="http://schemas.microsoft.com/office/drawing/2014/main" id="{D319283F-8643-38E1-A181-1103E1D406F2}"/>
+              </a:ext>
+            </a:extLst>
+          </p:cNvPr>
+          <p:cNvPicPr>
+            <a:picLocks noChangeAspect="1"/>
+          </p:cNvPicPr>
           <p:nvPr/>
         </p:nvPicPr>
         <p:blipFill>
-          <a:blip r:embed="rId1" cstate="print"/>
+          <a:blip r:embed="rId2"/>
           <a:stretch>
             <a:fillRect/>
           </a:stretch>
         </p:blipFill>
         <p:spPr>
           <a:xfrm>
-            <a:off x="0" y="0"/>
-            <a:ext cx="2133336" cy="5137782"/>
+            <a:off x="5715000" y="2190750"/>
+            <a:ext cx="2006703" cy="1530429"/>
           </a:xfrm>
           <a:prstGeom prst="rect">
             <a:avLst/>
           </a:prstGeom>
         </p:spPr>
       </p:pic>
+      <p:sp>
+        <p:nvSpPr>
+          <p:cNvPr id="9" name="TextBox 8">
+            <a:extLst>
+              <a:ext uri="{FF2B5EF4-FFF2-40B4-BE49-F238E27FC236}">
+                <a16:creationId xmlns:a16="http://schemas.microsoft.com/office/drawing/2014/main" id="{137782E1-8C75-58CF-C524-E0E9AD213A81}"/>
+              </a:ext>
+            </a:extLst>
+          </p:cNvPr>
+          <p:cNvSpPr txBox="1"/>
+          <p:nvPr/>
+        </p:nvSpPr>
+        <p:spPr>
+          <a:xfrm>
+            <a:off x="609600" y="4100354"/>
+            <a:ext cx="8077200" cy="369332"/>
+          </a:xfrm>
+          <a:prstGeom prst="rect">
+            <a:avLst/>
+          </a:prstGeom>
+          <a:noFill/>
+        </p:spPr>
+        <p:txBody>
+          <a:bodyPr wrap="square">
+            <a:spAutoFit/>
+          </a:bodyPr>
+          <a:lstStyle/>
+          <a:p>
+            <a:r>
+              <a:rPr lang="en-US" dirty="0">
+                <a:latin typeface="+mn-lt"/>
+              </a:rPr>
+              <a:t>You can make changes without affecting production users.</a:t>
+            </a:r>
+            <a:endParaRPr lang="en-IN" dirty="0">
+              <a:latin typeface="+mn-lt"/>
+            </a:endParaRPr>
+          </a:p>
+        </p:txBody>
+      </p:sp>
     </p:spTree>
+    <p:extLst>
+      <p:ext uri="{BB962C8B-B14F-4D97-AF65-F5344CB8AC3E}">
+        <p14:creationId xmlns:p14="http://schemas.microsoft.com/office/powerpoint/2010/main" val="2972958700"/>
+      </p:ext>
+    </p:extLst>
   </p:cSld>
   <p:clrMapOvr>
     <a:masterClrMapping/>
   </p:clrMapOvr>
-  <p:timing>
-    <p:tnLst>
-      <p:par>
-        <p:cTn id="1" dur="indefinite" restart="never" nodeType="tmRoot"/>
-      </p:par>
-    </p:tnLst>
-  </p:timing>
+</p:sld>
+</file>
+
+<file path=ppt/slides/slide29.xml><?xml version="1.0" encoding="utf-8"?>
+<p:sld xmlns:a="http://schemas.openxmlformats.org/drawingml/2006/main" xmlns:r="http://schemas.openxmlformats.org/officeDocument/2006/relationships" xmlns:p="http://schemas.openxmlformats.org/presentationml/2006/main">
+  <p:cSld>
+    <p:spTree>
+      <p:nvGrpSpPr>
+        <p:cNvPr id="1" name=""/>
+        <p:cNvGrpSpPr/>
+        <p:nvPr/>
+      </p:nvGrpSpPr>
+      <p:grpSpPr>
+        <a:xfrm>
+          <a:off x="0" y="0"/>
+          <a:ext cx="0" cy="0"/>
+          <a:chOff x="0" y="0"/>
+          <a:chExt cx="0" cy="0"/>
+        </a:xfrm>
+      </p:grpSpPr>
+      <p:sp>
+        <p:nvSpPr>
+          <p:cNvPr id="4" name="Title 3"/>
+          <p:cNvSpPr>
+            <a:spLocks noGrp="1"/>
+          </p:cNvSpPr>
+          <p:nvPr>
+            <p:ph type="title"/>
+          </p:nvPr>
+        </p:nvSpPr>
+        <p:spPr>
+          <a:xfrm>
+            <a:off x="512900" y="322232"/>
+            <a:ext cx="5715635" cy="368935"/>
+          </a:xfrm>
+        </p:spPr>
+        <p:txBody>
+          <a:bodyPr/>
+          <a:lstStyle/>
+          <a:p>
+            <a:r>
+              <a:rPr lang="en-US" dirty="0"/>
+              <a:t>A </a:t>
+            </a:r>
+            <a:r>
+              <a:rPr lang="en-US" b="1" dirty="0"/>
+              <a:t>Deployment Pipeline</a:t>
+            </a:r>
+            <a:endParaRPr lang="en-US" altLang="en-GB" dirty="0"/>
+          </a:p>
+        </p:txBody>
+      </p:sp>
+      <p:sp>
+        <p:nvSpPr>
+          <p:cNvPr id="5" name="TextBox 4">
+            <a:extLst>
+              <a:ext uri="{FF2B5EF4-FFF2-40B4-BE49-F238E27FC236}">
+                <a16:creationId xmlns:a16="http://schemas.microsoft.com/office/drawing/2014/main" id="{04009FA7-51D2-A030-A4E8-979397E5EE72}"/>
+              </a:ext>
+            </a:extLst>
+          </p:cNvPr>
+          <p:cNvSpPr txBox="1"/>
+          <p:nvPr/>
+        </p:nvSpPr>
+        <p:spPr>
+          <a:xfrm>
+            <a:off x="512900" y="895350"/>
+            <a:ext cx="8478700" cy="523220"/>
+          </a:xfrm>
+          <a:prstGeom prst="rect">
+            <a:avLst/>
+          </a:prstGeom>
+          <a:noFill/>
+        </p:spPr>
+        <p:txBody>
+          <a:bodyPr wrap="square">
+            <a:spAutoFit/>
+          </a:bodyPr>
+          <a:lstStyle/>
+          <a:p>
+            <a:endParaRPr lang="en-US" sz="1400" dirty="0"/>
+          </a:p>
+          <a:p>
+            <a:endParaRPr lang="en-IN" sz="1400" dirty="0"/>
+          </a:p>
+        </p:txBody>
+      </p:sp>
+      <p:sp>
+        <p:nvSpPr>
+          <p:cNvPr id="3" name="TextBox 2">
+            <a:extLst>
+              <a:ext uri="{FF2B5EF4-FFF2-40B4-BE49-F238E27FC236}">
+                <a16:creationId xmlns:a16="http://schemas.microsoft.com/office/drawing/2014/main" id="{86ACF92B-9E99-9A26-2A8C-B3F568B9E2D5}"/>
+              </a:ext>
+            </a:extLst>
+          </p:cNvPr>
+          <p:cNvSpPr txBox="1"/>
+          <p:nvPr/>
+        </p:nvSpPr>
+        <p:spPr>
+          <a:xfrm>
+            <a:off x="228600" y="863160"/>
+            <a:ext cx="6629400" cy="2246769"/>
+          </a:xfrm>
+          <a:prstGeom prst="rect">
+            <a:avLst/>
+          </a:prstGeom>
+          <a:noFill/>
+        </p:spPr>
+        <p:txBody>
+          <a:bodyPr wrap="square">
+            <a:spAutoFit/>
+          </a:bodyPr>
+          <a:lstStyle/>
+          <a:p>
+            <a:r>
+              <a:rPr lang="en-US" sz="1400" b="1" dirty="0">
+                <a:latin typeface="+mn-lt"/>
+              </a:rPr>
+              <a:t>Test</a:t>
+            </a:r>
+          </a:p>
+          <a:p>
+            <a:r>
+              <a:rPr lang="en-US" sz="1400" dirty="0">
+                <a:latin typeface="+mn-lt"/>
+              </a:rPr>
+              <a:t>The content is deployed from Development to Test.</a:t>
+            </a:r>
+          </a:p>
+          <a:p>
+            <a:r>
+              <a:rPr lang="en-US" sz="1400" dirty="0">
+                <a:latin typeface="+mn-lt"/>
+              </a:rPr>
+              <a:t>Testers/business analysts can verify:</a:t>
+            </a:r>
+          </a:p>
+          <a:p>
+            <a:pPr>
+              <a:buFont typeface="Arial" panose="020B0604020202020204" pitchFamily="34" charset="0"/>
+              <a:buChar char="•"/>
+            </a:pPr>
+            <a:r>
+              <a:rPr lang="en-US" sz="1400" dirty="0">
+                <a:latin typeface="+mn-lt"/>
+              </a:rPr>
+              <a:t>Data is correct </a:t>
+            </a:r>
+          </a:p>
+          <a:p>
+            <a:pPr>
+              <a:buFont typeface="Arial" panose="020B0604020202020204" pitchFamily="34" charset="0"/>
+              <a:buChar char="•"/>
+            </a:pPr>
+            <a:r>
+              <a:rPr lang="en-US" sz="1400" dirty="0">
+                <a:latin typeface="+mn-lt"/>
+              </a:rPr>
+              <a:t>DAX calculations are correct </a:t>
+            </a:r>
+          </a:p>
+          <a:p>
+            <a:pPr>
+              <a:buFont typeface="Arial" panose="020B0604020202020204" pitchFamily="34" charset="0"/>
+              <a:buChar char="•"/>
+            </a:pPr>
+            <a:r>
+              <a:rPr lang="en-US" sz="1400" dirty="0">
+                <a:latin typeface="+mn-lt"/>
+              </a:rPr>
+              <a:t>Filters work </a:t>
+            </a:r>
+          </a:p>
+          <a:p>
+            <a:pPr>
+              <a:buFont typeface="Arial" panose="020B0604020202020204" pitchFamily="34" charset="0"/>
+              <a:buChar char="•"/>
+            </a:pPr>
+            <a:r>
+              <a:rPr lang="en-US" sz="1400" dirty="0">
+                <a:latin typeface="+mn-lt"/>
+              </a:rPr>
+              <a:t>RLS works </a:t>
+            </a:r>
+          </a:p>
+          <a:p>
+            <a:pPr>
+              <a:buFont typeface="Arial" panose="020B0604020202020204" pitchFamily="34" charset="0"/>
+              <a:buChar char="•"/>
+            </a:pPr>
+            <a:r>
+              <a:rPr lang="en-US" sz="1400" dirty="0">
+                <a:latin typeface="+mn-lt"/>
+              </a:rPr>
+              <a:t>Visuals are correct </a:t>
+            </a:r>
+          </a:p>
+          <a:p>
+            <a:pPr>
+              <a:buFont typeface="Arial" panose="020B0604020202020204" pitchFamily="34" charset="0"/>
+              <a:buChar char="•"/>
+            </a:pPr>
+            <a:r>
+              <a:rPr lang="en-US" sz="1400" dirty="0">
+                <a:latin typeface="+mn-lt"/>
+              </a:rPr>
+              <a:t>Performance is acceptable </a:t>
+            </a:r>
+          </a:p>
+          <a:p>
+            <a:r>
+              <a:rPr lang="en-US" sz="1400" dirty="0">
+                <a:latin typeface="+mn-lt"/>
+              </a:rPr>
+              <a:t>For example:</a:t>
+            </a:r>
+          </a:p>
+        </p:txBody>
+      </p:sp>
+      <p:pic>
+        <p:nvPicPr>
+          <p:cNvPr id="7" name="Picture 6">
+            <a:extLst>
+              <a:ext uri="{FF2B5EF4-FFF2-40B4-BE49-F238E27FC236}">
+                <a16:creationId xmlns:a16="http://schemas.microsoft.com/office/drawing/2014/main" id="{86D5ABBD-8689-8AA9-6B1E-8EAD19333079}"/>
+              </a:ext>
+            </a:extLst>
+          </p:cNvPr>
+          <p:cNvPicPr>
+            <a:picLocks noChangeAspect="1"/>
+          </p:cNvPicPr>
+          <p:nvPr/>
+        </p:nvPicPr>
+        <p:blipFill>
+          <a:blip r:embed="rId2"/>
+          <a:stretch>
+            <a:fillRect/>
+          </a:stretch>
+        </p:blipFill>
+        <p:spPr>
+          <a:xfrm>
+            <a:off x="381000" y="3281922"/>
+            <a:ext cx="2121009" cy="1682836"/>
+          </a:xfrm>
+          <a:prstGeom prst="rect">
+            <a:avLst/>
+          </a:prstGeom>
+        </p:spPr>
+      </p:pic>
+    </p:spTree>
+    <p:extLst>
+      <p:ext uri="{BB962C8B-B14F-4D97-AF65-F5344CB8AC3E}">
+        <p14:creationId xmlns:p14="http://schemas.microsoft.com/office/powerpoint/2010/main" val="2326520044"/>
+      </p:ext>
+    </p:extLst>
+  </p:cSld>
+  <p:clrMapOvr>
+    <a:masterClrMapping/>
+  </p:clrMapOvr>
 </p:sld>
 </file>
 
@@ -6294,7 +7025,6 @@
               <a:rPr lang="en-US" altLang="en-GB" sz="2000" dirty="0"/>
               <a:t>Traditional approach			Fabric approch</a:t>
             </a:r>
-            <a:endParaRPr lang="en-US" altLang="en-GB" sz="2000" dirty="0"/>
           </a:p>
         </p:txBody>
       </p:sp>
@@ -6318,12 +7048,12 @@
           <a:bodyPr wrap="square" rtlCol="0" anchor="t">
             <a:spAutoFit/>
           </a:bodyPr>
+          <a:lstStyle/>
           <a:p>
             <a:r>
               <a:rPr lang="en-US" altLang="en-GB" sz="1200"/>
               <a:t>Data Sources</a:t>
             </a:r>
-            <a:endParaRPr lang="en-US" altLang="en-GB" sz="1200"/>
           </a:p>
           <a:p>
             <a:r>
@@ -6334,14 +7064,12 @@
               <a:rPr lang="en-US" altLang="en-US" sz="1200"/>
               <a:t>↓</a:t>
             </a:r>
-            <a:endParaRPr lang="en-US" altLang="en-US" sz="1200"/>
           </a:p>
           <a:p>
             <a:r>
               <a:rPr lang="en-US" altLang="en-GB" sz="1200"/>
               <a:t>Azure Data Factory</a:t>
             </a:r>
-            <a:endParaRPr lang="en-US" altLang="en-GB" sz="1200"/>
           </a:p>
           <a:p>
             <a:r>
@@ -6352,14 +7080,12 @@
               <a:rPr lang="en-US" altLang="en-US" sz="1200"/>
               <a:t>↓</a:t>
             </a:r>
-            <a:endParaRPr lang="en-US" altLang="en-US" sz="1200"/>
           </a:p>
           <a:p>
             <a:r>
               <a:rPr lang="en-US" altLang="en-GB" sz="1200"/>
               <a:t>Data Lake</a:t>
             </a:r>
-            <a:endParaRPr lang="en-US" altLang="en-GB" sz="1200"/>
           </a:p>
           <a:p>
             <a:r>
@@ -6370,14 +7096,12 @@
               <a:rPr lang="en-US" altLang="en-US" sz="1200"/>
               <a:t>↓</a:t>
             </a:r>
-            <a:endParaRPr lang="en-US" altLang="en-US" sz="1200"/>
           </a:p>
           <a:p>
             <a:r>
               <a:rPr lang="en-US" altLang="en-GB" sz="1200"/>
               <a:t>Databricks / Spark</a:t>
             </a:r>
-            <a:endParaRPr lang="en-US" altLang="en-GB" sz="1200"/>
           </a:p>
           <a:p>
             <a:r>
@@ -6388,14 +7112,12 @@
               <a:rPr lang="en-US" altLang="en-US" sz="1200"/>
               <a:t>↓</a:t>
             </a:r>
-            <a:endParaRPr lang="en-US" altLang="en-US" sz="1200"/>
           </a:p>
           <a:p>
             <a:r>
               <a:rPr lang="en-US" altLang="en-GB" sz="1200"/>
               <a:t>SQL Data Warehouse</a:t>
             </a:r>
-            <a:endParaRPr lang="en-US" altLang="en-GB" sz="1200"/>
           </a:p>
           <a:p>
             <a:r>
@@ -6406,14 +7128,12 @@
               <a:rPr lang="en-US" altLang="en-US" sz="1200"/>
               <a:t>↓</a:t>
             </a:r>
-            <a:endParaRPr lang="en-US" altLang="en-US" sz="1200"/>
           </a:p>
           <a:p>
             <a:r>
               <a:rPr lang="en-US" altLang="en-GB" sz="1200"/>
               <a:t>Power BI</a:t>
             </a:r>
-            <a:endParaRPr lang="en-US" altLang="en-GB" sz="1200"/>
           </a:p>
         </p:txBody>
       </p:sp>
@@ -6437,12 +7157,12 @@
           <a:bodyPr wrap="square" rtlCol="0" anchor="t">
             <a:spAutoFit/>
           </a:bodyPr>
+          <a:lstStyle/>
           <a:p>
             <a:r>
               <a:rPr lang="en-US" altLang="en-GB" sz="1200"/>
               <a:t>                 	        Microsoft Fabric</a:t>
             </a:r>
-            <a:endParaRPr lang="en-US" altLang="en-GB" sz="1200"/>
           </a:p>
           <a:p>
             <a:r>
@@ -6453,7 +7173,6 @@
               <a:rPr lang="en-US" altLang="en-US" sz="1200"/>
               <a:t>│</a:t>
             </a:r>
-            <a:endParaRPr lang="en-US" altLang="en-US" sz="1200"/>
           </a:p>
           <a:p>
             <a:r>
@@ -6464,7 +7183,6 @@
               <a:rPr lang="en-US" altLang="en-US" sz="1200"/>
               <a:t>┌────────────────────────────┐</a:t>
             </a:r>
-            <a:endParaRPr lang="en-US" altLang="en-US" sz="1200"/>
           </a:p>
           <a:p>
             <a:r>
@@ -6483,14 +7201,12 @@
               <a:rPr lang="en-US" altLang="en-US" sz="1200"/>
               <a:t>↓</a:t>
             </a:r>
-            <a:endParaRPr lang="en-US" altLang="en-US" sz="1200"/>
           </a:p>
           <a:p>
             <a:r>
               <a:rPr lang="en-US" altLang="en-GB" sz="1200"/>
               <a:t>   Data Factory    Data Engineering  	        Warehouse</a:t>
             </a:r>
-            <a:endParaRPr lang="en-US" altLang="en-GB" sz="1200"/>
           </a:p>
           <a:p>
             <a:r>
@@ -6522,7 +7238,6 @@
               <a:rPr lang="en-US" altLang="en-GB" sz="1200"/>
               <a:t>                 	            OneLake</a:t>
             </a:r>
-            <a:endParaRPr lang="en-US" altLang="en-GB" sz="1200"/>
           </a:p>
           <a:p>
             <a:r>
@@ -6533,14 +7248,12 @@
               <a:rPr lang="en-US" altLang="en-US" sz="1200"/>
               <a:t>↓</a:t>
             </a:r>
-            <a:endParaRPr lang="en-US" altLang="en-US" sz="1200"/>
           </a:p>
           <a:p>
             <a:r>
               <a:rPr lang="en-US" altLang="en-GB" sz="1200"/>
               <a:t>                  	           Power BI</a:t>
             </a:r>
-            <a:endParaRPr lang="en-US" altLang="en-GB" sz="1200"/>
           </a:p>
         </p:txBody>
       </p:sp>
@@ -6549,13 +7262,1939 @@
   <p:clrMapOvr>
     <a:masterClrMapping/>
   </p:clrMapOvr>
-  <p:timing>
-    <p:tnLst>
-      <p:par>
-        <p:cTn id="1" dur="indefinite" restart="never" nodeType="tmRoot"/>
-      </p:par>
-    </p:tnLst>
-  </p:timing>
+</p:sld>
+</file>
+
+<file path=ppt/slides/slide30.xml><?xml version="1.0" encoding="utf-8"?>
+<p:sld xmlns:a="http://schemas.openxmlformats.org/drawingml/2006/main" xmlns:r="http://schemas.openxmlformats.org/officeDocument/2006/relationships" xmlns:p="http://schemas.openxmlformats.org/presentationml/2006/main">
+  <p:cSld>
+    <p:spTree>
+      <p:nvGrpSpPr>
+        <p:cNvPr id="1" name=""/>
+        <p:cNvGrpSpPr/>
+        <p:nvPr/>
+      </p:nvGrpSpPr>
+      <p:grpSpPr>
+        <a:xfrm>
+          <a:off x="0" y="0"/>
+          <a:ext cx="0" cy="0"/>
+          <a:chOff x="0" y="0"/>
+          <a:chExt cx="0" cy="0"/>
+        </a:xfrm>
+      </p:grpSpPr>
+      <p:sp>
+        <p:nvSpPr>
+          <p:cNvPr id="4" name="Title 3"/>
+          <p:cNvSpPr>
+            <a:spLocks noGrp="1"/>
+          </p:cNvSpPr>
+          <p:nvPr>
+            <p:ph type="title"/>
+          </p:nvPr>
+        </p:nvSpPr>
+        <p:spPr>
+          <a:xfrm>
+            <a:off x="512900" y="322232"/>
+            <a:ext cx="5715635" cy="368935"/>
+          </a:xfrm>
+        </p:spPr>
+        <p:txBody>
+          <a:bodyPr/>
+          <a:lstStyle/>
+          <a:p>
+            <a:r>
+              <a:rPr lang="en-US" dirty="0"/>
+              <a:t>A </a:t>
+            </a:r>
+            <a:r>
+              <a:rPr lang="en-US" b="1" dirty="0"/>
+              <a:t>Deployment Pipeline</a:t>
+            </a:r>
+            <a:endParaRPr lang="en-US" altLang="en-GB" dirty="0"/>
+          </a:p>
+        </p:txBody>
+      </p:sp>
+      <p:sp>
+        <p:nvSpPr>
+          <p:cNvPr id="5" name="TextBox 4">
+            <a:extLst>
+              <a:ext uri="{FF2B5EF4-FFF2-40B4-BE49-F238E27FC236}">
+                <a16:creationId xmlns:a16="http://schemas.microsoft.com/office/drawing/2014/main" id="{04009FA7-51D2-A030-A4E8-979397E5EE72}"/>
+              </a:ext>
+            </a:extLst>
+          </p:cNvPr>
+          <p:cNvSpPr txBox="1"/>
+          <p:nvPr/>
+        </p:nvSpPr>
+        <p:spPr>
+          <a:xfrm>
+            <a:off x="512900" y="895350"/>
+            <a:ext cx="8478700" cy="523220"/>
+          </a:xfrm>
+          <a:prstGeom prst="rect">
+            <a:avLst/>
+          </a:prstGeom>
+          <a:noFill/>
+        </p:spPr>
+        <p:txBody>
+          <a:bodyPr wrap="square">
+            <a:spAutoFit/>
+          </a:bodyPr>
+          <a:lstStyle/>
+          <a:p>
+            <a:endParaRPr lang="en-US" sz="1400" dirty="0"/>
+          </a:p>
+          <a:p>
+            <a:endParaRPr lang="en-IN" sz="1400" dirty="0"/>
+          </a:p>
+        </p:txBody>
+      </p:sp>
+      <p:sp>
+        <p:nvSpPr>
+          <p:cNvPr id="3" name="TextBox 2">
+            <a:extLst>
+              <a:ext uri="{FF2B5EF4-FFF2-40B4-BE49-F238E27FC236}">
+                <a16:creationId xmlns:a16="http://schemas.microsoft.com/office/drawing/2014/main" id="{86ACF92B-9E99-9A26-2A8C-B3F568B9E2D5}"/>
+              </a:ext>
+            </a:extLst>
+          </p:cNvPr>
+          <p:cNvSpPr txBox="1"/>
+          <p:nvPr/>
+        </p:nvSpPr>
+        <p:spPr>
+          <a:xfrm>
+            <a:off x="228600" y="863160"/>
+            <a:ext cx="6629400" cy="523220"/>
+          </a:xfrm>
+          <a:prstGeom prst="rect">
+            <a:avLst/>
+          </a:prstGeom>
+          <a:noFill/>
+        </p:spPr>
+        <p:txBody>
+          <a:bodyPr wrap="square">
+            <a:spAutoFit/>
+          </a:bodyPr>
+          <a:lstStyle/>
+          <a:p>
+            <a:r>
+              <a:rPr lang="en-US" sz="1400" b="1" dirty="0"/>
+              <a:t>Production</a:t>
+            </a:r>
+          </a:p>
+          <a:p>
+            <a:r>
+              <a:rPr lang="en-US" sz="1400" dirty="0"/>
+              <a:t>After testing is completed, deploy the approved content to Production.</a:t>
+            </a:r>
+          </a:p>
+        </p:txBody>
+      </p:sp>
+      <p:pic>
+        <p:nvPicPr>
+          <p:cNvPr id="6" name="Picture 5">
+            <a:extLst>
+              <a:ext uri="{FF2B5EF4-FFF2-40B4-BE49-F238E27FC236}">
+                <a16:creationId xmlns:a16="http://schemas.microsoft.com/office/drawing/2014/main" id="{0BC8992D-D0A2-F76B-11F0-FCE28709D794}"/>
+              </a:ext>
+            </a:extLst>
+          </p:cNvPr>
+          <p:cNvPicPr>
+            <a:picLocks noChangeAspect="1"/>
+          </p:cNvPicPr>
+          <p:nvPr/>
+        </p:nvPicPr>
+        <p:blipFill>
+          <a:blip r:embed="rId2"/>
+          <a:stretch>
+            <a:fillRect/>
+          </a:stretch>
+        </p:blipFill>
+        <p:spPr>
+          <a:xfrm>
+            <a:off x="214277" y="1551928"/>
+            <a:ext cx="1911448" cy="1619333"/>
+          </a:xfrm>
+          <a:prstGeom prst="rect">
+            <a:avLst/>
+          </a:prstGeom>
+        </p:spPr>
+      </p:pic>
+    </p:spTree>
+    <p:extLst>
+      <p:ext uri="{BB962C8B-B14F-4D97-AF65-F5344CB8AC3E}">
+        <p14:creationId xmlns:p14="http://schemas.microsoft.com/office/powerpoint/2010/main" val="3608467323"/>
+      </p:ext>
+    </p:extLst>
+  </p:cSld>
+  <p:clrMapOvr>
+    <a:masterClrMapping/>
+  </p:clrMapOvr>
+</p:sld>
+</file>
+
+<file path=ppt/slides/slide31.xml><?xml version="1.0" encoding="utf-8"?>
+<p:sld xmlns:a="http://schemas.openxmlformats.org/drawingml/2006/main" xmlns:r="http://schemas.openxmlformats.org/officeDocument/2006/relationships" xmlns:p="http://schemas.openxmlformats.org/presentationml/2006/main">
+  <p:cSld>
+    <p:spTree>
+      <p:nvGrpSpPr>
+        <p:cNvPr id="1" name=""/>
+        <p:cNvGrpSpPr/>
+        <p:nvPr/>
+      </p:nvGrpSpPr>
+      <p:grpSpPr>
+        <a:xfrm>
+          <a:off x="0" y="0"/>
+          <a:ext cx="0" cy="0"/>
+          <a:chOff x="0" y="0"/>
+          <a:chExt cx="0" cy="0"/>
+        </a:xfrm>
+      </p:grpSpPr>
+      <p:sp>
+        <p:nvSpPr>
+          <p:cNvPr id="4" name="Title 3"/>
+          <p:cNvSpPr>
+            <a:spLocks noGrp="1"/>
+          </p:cNvSpPr>
+          <p:nvPr>
+            <p:ph type="title"/>
+          </p:nvPr>
+        </p:nvSpPr>
+        <p:spPr>
+          <a:xfrm>
+            <a:off x="512900" y="322232"/>
+            <a:ext cx="5715635" cy="368935"/>
+          </a:xfrm>
+        </p:spPr>
+        <p:txBody>
+          <a:bodyPr/>
+          <a:lstStyle/>
+          <a:p>
+            <a:r>
+              <a:rPr lang="en-US" dirty="0"/>
+              <a:t>A </a:t>
+            </a:r>
+            <a:r>
+              <a:rPr lang="en-US" b="1" dirty="0"/>
+              <a:t>Deployment Pipeline</a:t>
+            </a:r>
+            <a:endParaRPr lang="en-US" altLang="en-GB" dirty="0"/>
+          </a:p>
+        </p:txBody>
+      </p:sp>
+      <p:sp>
+        <p:nvSpPr>
+          <p:cNvPr id="5" name="TextBox 4">
+            <a:extLst>
+              <a:ext uri="{FF2B5EF4-FFF2-40B4-BE49-F238E27FC236}">
+                <a16:creationId xmlns:a16="http://schemas.microsoft.com/office/drawing/2014/main" id="{04009FA7-51D2-A030-A4E8-979397E5EE72}"/>
+              </a:ext>
+            </a:extLst>
+          </p:cNvPr>
+          <p:cNvSpPr txBox="1"/>
+          <p:nvPr/>
+        </p:nvSpPr>
+        <p:spPr>
+          <a:xfrm>
+            <a:off x="512900" y="895350"/>
+            <a:ext cx="8478700" cy="523220"/>
+          </a:xfrm>
+          <a:prstGeom prst="rect">
+            <a:avLst/>
+          </a:prstGeom>
+          <a:noFill/>
+        </p:spPr>
+        <p:txBody>
+          <a:bodyPr wrap="square">
+            <a:spAutoFit/>
+          </a:bodyPr>
+          <a:lstStyle/>
+          <a:p>
+            <a:endParaRPr lang="en-US" sz="1400" dirty="0"/>
+          </a:p>
+          <a:p>
+            <a:endParaRPr lang="en-IN" sz="1400" dirty="0"/>
+          </a:p>
+        </p:txBody>
+      </p:sp>
+      <p:sp>
+        <p:nvSpPr>
+          <p:cNvPr id="3" name="TextBox 2">
+            <a:extLst>
+              <a:ext uri="{FF2B5EF4-FFF2-40B4-BE49-F238E27FC236}">
+                <a16:creationId xmlns:a16="http://schemas.microsoft.com/office/drawing/2014/main" id="{86ACF92B-9E99-9A26-2A8C-B3F568B9E2D5}"/>
+              </a:ext>
+            </a:extLst>
+          </p:cNvPr>
+          <p:cNvSpPr txBox="1"/>
+          <p:nvPr/>
+        </p:nvSpPr>
+        <p:spPr>
+          <a:xfrm>
+            <a:off x="228600" y="863160"/>
+            <a:ext cx="6629400" cy="307777"/>
+          </a:xfrm>
+          <a:prstGeom prst="rect">
+            <a:avLst/>
+          </a:prstGeom>
+          <a:noFill/>
+        </p:spPr>
+        <p:txBody>
+          <a:bodyPr wrap="square">
+            <a:spAutoFit/>
+          </a:bodyPr>
+          <a:lstStyle/>
+          <a:p>
+            <a:r>
+              <a:rPr lang="en-US" sz="1400" dirty="0"/>
+              <a:t>In a modern Power BI project, you can use both:</a:t>
+            </a:r>
+          </a:p>
+        </p:txBody>
+      </p:sp>
+      <p:pic>
+        <p:nvPicPr>
+          <p:cNvPr id="7" name="Picture 6">
+            <a:extLst>
+              <a:ext uri="{FF2B5EF4-FFF2-40B4-BE49-F238E27FC236}">
+                <a16:creationId xmlns:a16="http://schemas.microsoft.com/office/drawing/2014/main" id="{FCA2202D-C79D-C971-23F9-BA912589706A}"/>
+              </a:ext>
+            </a:extLst>
+          </p:cNvPr>
+          <p:cNvPicPr>
+            <a:picLocks noChangeAspect="1"/>
+          </p:cNvPicPr>
+          <p:nvPr/>
+        </p:nvPicPr>
+        <p:blipFill>
+          <a:blip r:embed="rId2"/>
+          <a:stretch>
+            <a:fillRect/>
+          </a:stretch>
+        </p:blipFill>
+        <p:spPr>
+          <a:xfrm>
+            <a:off x="512900" y="1450760"/>
+            <a:ext cx="2114659" cy="2654436"/>
+          </a:xfrm>
+          <a:prstGeom prst="rect">
+            <a:avLst/>
+          </a:prstGeom>
+        </p:spPr>
+      </p:pic>
+    </p:spTree>
+    <p:extLst>
+      <p:ext uri="{BB962C8B-B14F-4D97-AF65-F5344CB8AC3E}">
+        <p14:creationId xmlns:p14="http://schemas.microsoft.com/office/powerpoint/2010/main" val="965861638"/>
+      </p:ext>
+    </p:extLst>
+  </p:cSld>
+  <p:clrMapOvr>
+    <a:masterClrMapping/>
+  </p:clrMapOvr>
+</p:sld>
+</file>
+
+<file path=ppt/slides/slide32.xml><?xml version="1.0" encoding="utf-8"?>
+<p:sld xmlns:a="http://schemas.openxmlformats.org/drawingml/2006/main" xmlns:r="http://schemas.openxmlformats.org/officeDocument/2006/relationships" xmlns:p="http://schemas.openxmlformats.org/presentationml/2006/main">
+  <p:cSld>
+    <p:spTree>
+      <p:nvGrpSpPr>
+        <p:cNvPr id="1" name=""/>
+        <p:cNvGrpSpPr/>
+        <p:nvPr/>
+      </p:nvGrpSpPr>
+      <p:grpSpPr>
+        <a:xfrm>
+          <a:off x="0" y="0"/>
+          <a:ext cx="0" cy="0"/>
+          <a:chOff x="0" y="0"/>
+          <a:chExt cx="0" cy="0"/>
+        </a:xfrm>
+      </p:grpSpPr>
+      <p:sp>
+        <p:nvSpPr>
+          <p:cNvPr id="4" name="Title 3"/>
+          <p:cNvSpPr>
+            <a:spLocks noGrp="1"/>
+          </p:cNvSpPr>
+          <p:nvPr>
+            <p:ph type="title"/>
+          </p:nvPr>
+        </p:nvSpPr>
+        <p:spPr>
+          <a:xfrm>
+            <a:off x="304800" y="322232"/>
+            <a:ext cx="5923735" cy="368935"/>
+          </a:xfrm>
+        </p:spPr>
+        <p:txBody>
+          <a:bodyPr/>
+          <a:lstStyle/>
+          <a:p>
+            <a:r>
+              <a:rPr lang="en-US" sz="2400" dirty="0"/>
+              <a:t>Power BI REST API</a:t>
+            </a:r>
+            <a:endParaRPr lang="en-US" altLang="en-GB" dirty="0"/>
+          </a:p>
+        </p:txBody>
+      </p:sp>
+      <p:sp>
+        <p:nvSpPr>
+          <p:cNvPr id="5" name="TextBox 4">
+            <a:extLst>
+              <a:ext uri="{FF2B5EF4-FFF2-40B4-BE49-F238E27FC236}">
+                <a16:creationId xmlns:a16="http://schemas.microsoft.com/office/drawing/2014/main" id="{04009FA7-51D2-A030-A4E8-979397E5EE72}"/>
+              </a:ext>
+            </a:extLst>
+          </p:cNvPr>
+          <p:cNvSpPr txBox="1"/>
+          <p:nvPr/>
+        </p:nvSpPr>
+        <p:spPr>
+          <a:xfrm>
+            <a:off x="512900" y="895350"/>
+            <a:ext cx="8478700" cy="523220"/>
+          </a:xfrm>
+          <a:prstGeom prst="rect">
+            <a:avLst/>
+          </a:prstGeom>
+          <a:noFill/>
+        </p:spPr>
+        <p:txBody>
+          <a:bodyPr wrap="square">
+            <a:spAutoFit/>
+          </a:bodyPr>
+          <a:lstStyle/>
+          <a:p>
+            <a:endParaRPr lang="en-US" sz="1400" dirty="0"/>
+          </a:p>
+          <a:p>
+            <a:endParaRPr lang="en-IN" sz="1400" dirty="0"/>
+          </a:p>
+        </p:txBody>
+      </p:sp>
+      <p:sp>
+        <p:nvSpPr>
+          <p:cNvPr id="3" name="TextBox 2">
+            <a:extLst>
+              <a:ext uri="{FF2B5EF4-FFF2-40B4-BE49-F238E27FC236}">
+                <a16:creationId xmlns:a16="http://schemas.microsoft.com/office/drawing/2014/main" id="{86ACF92B-9E99-9A26-2A8C-B3F568B9E2D5}"/>
+              </a:ext>
+            </a:extLst>
+          </p:cNvPr>
+          <p:cNvSpPr txBox="1"/>
+          <p:nvPr/>
+        </p:nvSpPr>
+        <p:spPr>
+          <a:xfrm>
+            <a:off x="228600" y="863160"/>
+            <a:ext cx="8763000" cy="954107"/>
+          </a:xfrm>
+          <a:prstGeom prst="rect">
+            <a:avLst/>
+          </a:prstGeom>
+          <a:noFill/>
+        </p:spPr>
+        <p:txBody>
+          <a:bodyPr wrap="square">
+            <a:spAutoFit/>
+          </a:bodyPr>
+          <a:lstStyle/>
+          <a:p>
+            <a:r>
+              <a:rPr lang="en-US" sz="1400" dirty="0"/>
+              <a:t>REST API (Representational State Transfer Application Programming Interface) allows applications to communicate with each other over HTTP.</a:t>
+            </a:r>
+          </a:p>
+          <a:p>
+            <a:endParaRPr lang="en-US" sz="1400" dirty="0"/>
+          </a:p>
+          <a:p>
+            <a:r>
+              <a:rPr lang="en-US" sz="1400" dirty="0"/>
+              <a:t>For example:</a:t>
+            </a:r>
+          </a:p>
+        </p:txBody>
+      </p:sp>
+      <p:pic>
+        <p:nvPicPr>
+          <p:cNvPr id="6" name="Picture 5">
+            <a:extLst>
+              <a:ext uri="{FF2B5EF4-FFF2-40B4-BE49-F238E27FC236}">
+                <a16:creationId xmlns:a16="http://schemas.microsoft.com/office/drawing/2014/main" id="{88978B76-7B49-5ADF-438C-187D540DE099}"/>
+              </a:ext>
+            </a:extLst>
+          </p:cNvPr>
+          <p:cNvPicPr>
+            <a:picLocks noChangeAspect="1"/>
+          </p:cNvPicPr>
+          <p:nvPr/>
+        </p:nvPicPr>
+        <p:blipFill>
+          <a:blip r:embed="rId2"/>
+          <a:stretch>
+            <a:fillRect/>
+          </a:stretch>
+        </p:blipFill>
+        <p:spPr>
+          <a:xfrm>
+            <a:off x="304800" y="1989260"/>
+            <a:ext cx="1625684" cy="1238314"/>
+          </a:xfrm>
+          <a:prstGeom prst="rect">
+            <a:avLst/>
+          </a:prstGeom>
+        </p:spPr>
+      </p:pic>
+      <p:sp>
+        <p:nvSpPr>
+          <p:cNvPr id="9" name="TextBox 8">
+            <a:extLst>
+              <a:ext uri="{FF2B5EF4-FFF2-40B4-BE49-F238E27FC236}">
+                <a16:creationId xmlns:a16="http://schemas.microsoft.com/office/drawing/2014/main" id="{FD58191D-9377-7655-D997-EB9E9004EB32}"/>
+              </a:ext>
+            </a:extLst>
+          </p:cNvPr>
+          <p:cNvSpPr txBox="1"/>
+          <p:nvPr/>
+        </p:nvSpPr>
+        <p:spPr>
+          <a:xfrm>
+            <a:off x="228600" y="3326234"/>
+            <a:ext cx="8610600" cy="523220"/>
+          </a:xfrm>
+          <a:prstGeom prst="rect">
+            <a:avLst/>
+          </a:prstGeom>
+          <a:noFill/>
+        </p:spPr>
+        <p:txBody>
+          <a:bodyPr wrap="square">
+            <a:spAutoFit/>
+          </a:bodyPr>
+          <a:lstStyle/>
+          <a:p>
+            <a:r>
+              <a:rPr lang="en-US" sz="1400" dirty="0">
+                <a:latin typeface="+mn-lt"/>
+              </a:rPr>
+              <a:t>Instead of manually performing an operation in Power BI Service, an application can perform it programmatically using an API.</a:t>
+            </a:r>
+          </a:p>
+        </p:txBody>
+      </p:sp>
+    </p:spTree>
+    <p:extLst>
+      <p:ext uri="{BB962C8B-B14F-4D97-AF65-F5344CB8AC3E}">
+        <p14:creationId xmlns:p14="http://schemas.microsoft.com/office/powerpoint/2010/main" val="3835547054"/>
+      </p:ext>
+    </p:extLst>
+  </p:cSld>
+  <p:clrMapOvr>
+    <a:masterClrMapping/>
+  </p:clrMapOvr>
+</p:sld>
+</file>
+
+<file path=ppt/slides/slide33.xml><?xml version="1.0" encoding="utf-8"?>
+<p:sld xmlns:a="http://schemas.openxmlformats.org/drawingml/2006/main" xmlns:r="http://schemas.openxmlformats.org/officeDocument/2006/relationships" xmlns:p="http://schemas.openxmlformats.org/presentationml/2006/main">
+  <p:cSld>
+    <p:spTree>
+      <p:nvGrpSpPr>
+        <p:cNvPr id="1" name=""/>
+        <p:cNvGrpSpPr/>
+        <p:nvPr/>
+      </p:nvGrpSpPr>
+      <p:grpSpPr>
+        <a:xfrm>
+          <a:off x="0" y="0"/>
+          <a:ext cx="0" cy="0"/>
+          <a:chOff x="0" y="0"/>
+          <a:chExt cx="0" cy="0"/>
+        </a:xfrm>
+      </p:grpSpPr>
+      <p:sp>
+        <p:nvSpPr>
+          <p:cNvPr id="4" name="Title 3"/>
+          <p:cNvSpPr>
+            <a:spLocks noGrp="1"/>
+          </p:cNvSpPr>
+          <p:nvPr>
+            <p:ph type="title"/>
+          </p:nvPr>
+        </p:nvSpPr>
+        <p:spPr>
+          <a:xfrm>
+            <a:off x="304800" y="322232"/>
+            <a:ext cx="5923735" cy="368935"/>
+          </a:xfrm>
+        </p:spPr>
+        <p:txBody>
+          <a:bodyPr/>
+          <a:lstStyle/>
+          <a:p>
+            <a:r>
+              <a:rPr lang="en-US" sz="2400" dirty="0"/>
+              <a:t>Power BI REST API</a:t>
+            </a:r>
+            <a:endParaRPr lang="en-US" altLang="en-GB" dirty="0"/>
+          </a:p>
+        </p:txBody>
+      </p:sp>
+      <p:sp>
+        <p:nvSpPr>
+          <p:cNvPr id="5" name="TextBox 4">
+            <a:extLst>
+              <a:ext uri="{FF2B5EF4-FFF2-40B4-BE49-F238E27FC236}">
+                <a16:creationId xmlns:a16="http://schemas.microsoft.com/office/drawing/2014/main" id="{04009FA7-51D2-A030-A4E8-979397E5EE72}"/>
+              </a:ext>
+            </a:extLst>
+          </p:cNvPr>
+          <p:cNvSpPr txBox="1"/>
+          <p:nvPr/>
+        </p:nvSpPr>
+        <p:spPr>
+          <a:xfrm>
+            <a:off x="512900" y="895350"/>
+            <a:ext cx="8478700" cy="523220"/>
+          </a:xfrm>
+          <a:prstGeom prst="rect">
+            <a:avLst/>
+          </a:prstGeom>
+          <a:noFill/>
+        </p:spPr>
+        <p:txBody>
+          <a:bodyPr wrap="square">
+            <a:spAutoFit/>
+          </a:bodyPr>
+          <a:lstStyle/>
+          <a:p>
+            <a:endParaRPr lang="en-US" sz="1400" dirty="0"/>
+          </a:p>
+          <a:p>
+            <a:endParaRPr lang="en-IN" sz="1400" dirty="0"/>
+          </a:p>
+        </p:txBody>
+      </p:sp>
+      <p:sp>
+        <p:nvSpPr>
+          <p:cNvPr id="3" name="TextBox 2">
+            <a:extLst>
+              <a:ext uri="{FF2B5EF4-FFF2-40B4-BE49-F238E27FC236}">
+                <a16:creationId xmlns:a16="http://schemas.microsoft.com/office/drawing/2014/main" id="{86ACF92B-9E99-9A26-2A8C-B3F568B9E2D5}"/>
+              </a:ext>
+            </a:extLst>
+          </p:cNvPr>
+          <p:cNvSpPr txBox="1"/>
+          <p:nvPr/>
+        </p:nvSpPr>
+        <p:spPr>
+          <a:xfrm>
+            <a:off x="228600" y="863160"/>
+            <a:ext cx="8686800" cy="3323987"/>
+          </a:xfrm>
+          <a:prstGeom prst="rect">
+            <a:avLst/>
+          </a:prstGeom>
+          <a:noFill/>
+        </p:spPr>
+        <p:txBody>
+          <a:bodyPr wrap="square">
+            <a:spAutoFit/>
+          </a:bodyPr>
+          <a:lstStyle/>
+          <a:p>
+            <a:r>
+              <a:rPr lang="en-US" sz="1400" b="1" dirty="0"/>
+              <a:t>Why do we use REST API in Power BI?</a:t>
+            </a:r>
+          </a:p>
+          <a:p>
+            <a:r>
+              <a:rPr lang="en-US" sz="1400" dirty="0"/>
+              <a:t>Power BI Service provides many operations that can be automated.</a:t>
+            </a:r>
+          </a:p>
+          <a:p>
+            <a:r>
+              <a:rPr lang="en-US" sz="1400" dirty="0"/>
+              <a:t>For example:</a:t>
+            </a:r>
+          </a:p>
+          <a:p>
+            <a:endParaRPr lang="en-US" sz="1400" dirty="0"/>
+          </a:p>
+          <a:p>
+            <a:pPr marL="342900" indent="-342900">
+              <a:buFont typeface="Arial" panose="020B0604020202020204" pitchFamily="34" charset="0"/>
+              <a:buChar char="•"/>
+            </a:pPr>
+            <a:r>
+              <a:rPr lang="en-US" sz="1400" dirty="0"/>
+              <a:t>Create workspaces </a:t>
+            </a:r>
+          </a:p>
+          <a:p>
+            <a:pPr marL="342900" indent="-342900">
+              <a:buFont typeface="Arial" panose="020B0604020202020204" pitchFamily="34" charset="0"/>
+              <a:buChar char="•"/>
+            </a:pPr>
+            <a:r>
+              <a:rPr lang="en-US" sz="1400" dirty="0"/>
+              <a:t>Get workspace information </a:t>
+            </a:r>
+          </a:p>
+          <a:p>
+            <a:pPr marL="342900" indent="-342900">
+              <a:buFont typeface="Arial" panose="020B0604020202020204" pitchFamily="34" charset="0"/>
+              <a:buChar char="•"/>
+            </a:pPr>
+            <a:r>
+              <a:rPr lang="en-US" sz="1400" dirty="0"/>
+              <a:t>Get reports </a:t>
+            </a:r>
+          </a:p>
+          <a:p>
+            <a:pPr marL="342900" indent="-342900">
+              <a:buFont typeface="Arial" panose="020B0604020202020204" pitchFamily="34" charset="0"/>
+              <a:buChar char="•"/>
+            </a:pPr>
+            <a:r>
+              <a:rPr lang="en-US" sz="1400" dirty="0"/>
+              <a:t>Get dashboards </a:t>
+            </a:r>
+          </a:p>
+          <a:p>
+            <a:pPr marL="342900" indent="-342900">
+              <a:buFont typeface="Arial" panose="020B0604020202020204" pitchFamily="34" charset="0"/>
+              <a:buChar char="•"/>
+            </a:pPr>
+            <a:r>
+              <a:rPr lang="en-US" sz="1400" dirty="0"/>
+              <a:t>Get semantic models </a:t>
+            </a:r>
+          </a:p>
+          <a:p>
+            <a:pPr marL="342900" indent="-342900">
+              <a:buFont typeface="Arial" panose="020B0604020202020204" pitchFamily="34" charset="0"/>
+              <a:buChar char="•"/>
+            </a:pPr>
+            <a:r>
+              <a:rPr lang="en-US" sz="1400" dirty="0"/>
+              <a:t>Refresh semantic models </a:t>
+            </a:r>
+          </a:p>
+          <a:p>
+            <a:pPr marL="342900" indent="-342900">
+              <a:buFont typeface="Arial" panose="020B0604020202020204" pitchFamily="34" charset="0"/>
+              <a:buChar char="•"/>
+            </a:pPr>
+            <a:r>
+              <a:rPr lang="en-US" sz="1400" dirty="0"/>
+              <a:t>Deploy content </a:t>
+            </a:r>
+          </a:p>
+          <a:p>
+            <a:pPr marL="342900" indent="-342900">
+              <a:buFont typeface="Arial" panose="020B0604020202020204" pitchFamily="34" charset="0"/>
+              <a:buChar char="•"/>
+            </a:pPr>
+            <a:r>
+              <a:rPr lang="en-US" sz="1400" dirty="0"/>
+              <a:t>Manage users and permissions </a:t>
+            </a:r>
+          </a:p>
+          <a:p>
+            <a:pPr marL="342900" indent="-342900">
+              <a:buFont typeface="Arial" panose="020B0604020202020204" pitchFamily="34" charset="0"/>
+              <a:buChar char="•"/>
+            </a:pPr>
+            <a:r>
+              <a:rPr lang="en-US" sz="1400" dirty="0"/>
+              <a:t>Export reports </a:t>
+            </a:r>
+          </a:p>
+          <a:p>
+            <a:pPr marL="342900" indent="-342900">
+              <a:buFont typeface="Arial" panose="020B0604020202020204" pitchFamily="34" charset="0"/>
+              <a:buChar char="•"/>
+            </a:pPr>
+            <a:r>
+              <a:rPr lang="en-US" sz="1400" dirty="0"/>
+              <a:t>Run queries </a:t>
+            </a:r>
+          </a:p>
+          <a:p>
+            <a:pPr marL="342900" indent="-342900">
+              <a:buFont typeface="Arial" panose="020B0604020202020204" pitchFamily="34" charset="0"/>
+              <a:buChar char="•"/>
+            </a:pPr>
+            <a:r>
+              <a:rPr lang="en-US" sz="1400" dirty="0"/>
+              <a:t>Monitor Power BI resources</a:t>
+            </a:r>
+          </a:p>
+        </p:txBody>
+      </p:sp>
+      <p:pic>
+        <p:nvPicPr>
+          <p:cNvPr id="7" name="Picture 6">
+            <a:extLst>
+              <a:ext uri="{FF2B5EF4-FFF2-40B4-BE49-F238E27FC236}">
+                <a16:creationId xmlns:a16="http://schemas.microsoft.com/office/drawing/2014/main" id="{1ED54E36-331D-33CD-2C6A-AC2EEE2738B1}"/>
+              </a:ext>
+            </a:extLst>
+          </p:cNvPr>
+          <p:cNvPicPr>
+            <a:picLocks noChangeAspect="1"/>
+          </p:cNvPicPr>
+          <p:nvPr/>
+        </p:nvPicPr>
+        <p:blipFill>
+          <a:blip r:embed="rId2"/>
+          <a:stretch>
+            <a:fillRect/>
+          </a:stretch>
+        </p:blipFill>
+        <p:spPr>
+          <a:xfrm>
+            <a:off x="6019800" y="956353"/>
+            <a:ext cx="2444876" cy="3638737"/>
+          </a:xfrm>
+          <a:prstGeom prst="rect">
+            <a:avLst/>
+          </a:prstGeom>
+        </p:spPr>
+      </p:pic>
+    </p:spTree>
+    <p:extLst>
+      <p:ext uri="{BB962C8B-B14F-4D97-AF65-F5344CB8AC3E}">
+        <p14:creationId xmlns:p14="http://schemas.microsoft.com/office/powerpoint/2010/main" val="3402450559"/>
+      </p:ext>
+    </p:extLst>
+  </p:cSld>
+  <p:clrMapOvr>
+    <a:masterClrMapping/>
+  </p:clrMapOvr>
+</p:sld>
+</file>
+
+<file path=ppt/slides/slide34.xml><?xml version="1.0" encoding="utf-8"?>
+<p:sld xmlns:a="http://schemas.openxmlformats.org/drawingml/2006/main" xmlns:r="http://schemas.openxmlformats.org/officeDocument/2006/relationships" xmlns:p="http://schemas.openxmlformats.org/presentationml/2006/main">
+  <p:cSld>
+    <p:spTree>
+      <p:nvGrpSpPr>
+        <p:cNvPr id="1" name=""/>
+        <p:cNvGrpSpPr/>
+        <p:nvPr/>
+      </p:nvGrpSpPr>
+      <p:grpSpPr>
+        <a:xfrm>
+          <a:off x="0" y="0"/>
+          <a:ext cx="0" cy="0"/>
+          <a:chOff x="0" y="0"/>
+          <a:chExt cx="0" cy="0"/>
+        </a:xfrm>
+      </p:grpSpPr>
+      <p:sp>
+        <p:nvSpPr>
+          <p:cNvPr id="4" name="Title 3"/>
+          <p:cNvSpPr>
+            <a:spLocks noGrp="1"/>
+          </p:cNvSpPr>
+          <p:nvPr>
+            <p:ph type="title"/>
+          </p:nvPr>
+        </p:nvSpPr>
+        <p:spPr>
+          <a:xfrm>
+            <a:off x="304800" y="322232"/>
+            <a:ext cx="5923735" cy="368935"/>
+          </a:xfrm>
+        </p:spPr>
+        <p:txBody>
+          <a:bodyPr/>
+          <a:lstStyle/>
+          <a:p>
+            <a:r>
+              <a:rPr lang="en-US" sz="2400" b="1" dirty="0"/>
+              <a:t>How REST API works</a:t>
+            </a:r>
+          </a:p>
+        </p:txBody>
+      </p:sp>
+      <p:sp>
+        <p:nvSpPr>
+          <p:cNvPr id="5" name="TextBox 4">
+            <a:extLst>
+              <a:ext uri="{FF2B5EF4-FFF2-40B4-BE49-F238E27FC236}">
+                <a16:creationId xmlns:a16="http://schemas.microsoft.com/office/drawing/2014/main" id="{04009FA7-51D2-A030-A4E8-979397E5EE72}"/>
+              </a:ext>
+            </a:extLst>
+          </p:cNvPr>
+          <p:cNvSpPr txBox="1"/>
+          <p:nvPr/>
+        </p:nvSpPr>
+        <p:spPr>
+          <a:xfrm>
+            <a:off x="512900" y="895350"/>
+            <a:ext cx="8478700" cy="523220"/>
+          </a:xfrm>
+          <a:prstGeom prst="rect">
+            <a:avLst/>
+          </a:prstGeom>
+          <a:noFill/>
+        </p:spPr>
+        <p:txBody>
+          <a:bodyPr wrap="square">
+            <a:spAutoFit/>
+          </a:bodyPr>
+          <a:lstStyle/>
+          <a:p>
+            <a:endParaRPr lang="en-US" sz="1400" dirty="0"/>
+          </a:p>
+          <a:p>
+            <a:endParaRPr lang="en-IN" sz="1400" dirty="0"/>
+          </a:p>
+        </p:txBody>
+      </p:sp>
+      <p:sp>
+        <p:nvSpPr>
+          <p:cNvPr id="3" name="TextBox 2">
+            <a:extLst>
+              <a:ext uri="{FF2B5EF4-FFF2-40B4-BE49-F238E27FC236}">
+                <a16:creationId xmlns:a16="http://schemas.microsoft.com/office/drawing/2014/main" id="{86ACF92B-9E99-9A26-2A8C-B3F568B9E2D5}"/>
+              </a:ext>
+            </a:extLst>
+          </p:cNvPr>
+          <p:cNvSpPr txBox="1"/>
+          <p:nvPr/>
+        </p:nvSpPr>
+        <p:spPr>
+          <a:xfrm>
+            <a:off x="228600" y="863160"/>
+            <a:ext cx="8686800" cy="307777"/>
+          </a:xfrm>
+          <a:prstGeom prst="rect">
+            <a:avLst/>
+          </a:prstGeom>
+          <a:noFill/>
+        </p:spPr>
+        <p:txBody>
+          <a:bodyPr wrap="square">
+            <a:spAutoFit/>
+          </a:bodyPr>
+          <a:lstStyle/>
+          <a:p>
+            <a:r>
+              <a:rPr lang="en-US" sz="1400" dirty="0"/>
+              <a:t>The basic communication is:</a:t>
+            </a:r>
+          </a:p>
+        </p:txBody>
+      </p:sp>
+      <p:pic>
+        <p:nvPicPr>
+          <p:cNvPr id="6" name="Picture 5">
+            <a:extLst>
+              <a:ext uri="{FF2B5EF4-FFF2-40B4-BE49-F238E27FC236}">
+                <a16:creationId xmlns:a16="http://schemas.microsoft.com/office/drawing/2014/main" id="{E3C92C06-25F7-3509-3EDD-31CD451EA8D5}"/>
+              </a:ext>
+            </a:extLst>
+          </p:cNvPr>
+          <p:cNvPicPr>
+            <a:picLocks noChangeAspect="1"/>
+          </p:cNvPicPr>
+          <p:nvPr/>
+        </p:nvPicPr>
+        <p:blipFill>
+          <a:blip r:embed="rId2"/>
+          <a:stretch>
+            <a:fillRect/>
+          </a:stretch>
+        </p:blipFill>
+        <p:spPr>
+          <a:xfrm>
+            <a:off x="304800" y="1418570"/>
+            <a:ext cx="1778091" cy="2025754"/>
+          </a:xfrm>
+          <a:prstGeom prst="rect">
+            <a:avLst/>
+          </a:prstGeom>
+        </p:spPr>
+      </p:pic>
+    </p:spTree>
+    <p:extLst>
+      <p:ext uri="{BB962C8B-B14F-4D97-AF65-F5344CB8AC3E}">
+        <p14:creationId xmlns:p14="http://schemas.microsoft.com/office/powerpoint/2010/main" val="1321464221"/>
+      </p:ext>
+    </p:extLst>
+  </p:cSld>
+  <p:clrMapOvr>
+    <a:masterClrMapping/>
+  </p:clrMapOvr>
+</p:sld>
+</file>
+
+<file path=ppt/slides/slide35.xml><?xml version="1.0" encoding="utf-8"?>
+<p:sld xmlns:a="http://schemas.openxmlformats.org/drawingml/2006/main" xmlns:r="http://schemas.openxmlformats.org/officeDocument/2006/relationships" xmlns:p="http://schemas.openxmlformats.org/presentationml/2006/main">
+  <p:cSld>
+    <p:spTree>
+      <p:nvGrpSpPr>
+        <p:cNvPr id="1" name=""/>
+        <p:cNvGrpSpPr/>
+        <p:nvPr/>
+      </p:nvGrpSpPr>
+      <p:grpSpPr>
+        <a:xfrm>
+          <a:off x="0" y="0"/>
+          <a:ext cx="0" cy="0"/>
+          <a:chOff x="0" y="0"/>
+          <a:chExt cx="0" cy="0"/>
+        </a:xfrm>
+      </p:grpSpPr>
+      <p:sp>
+        <p:nvSpPr>
+          <p:cNvPr id="4" name="Title 3"/>
+          <p:cNvSpPr>
+            <a:spLocks noGrp="1"/>
+          </p:cNvSpPr>
+          <p:nvPr>
+            <p:ph type="title"/>
+          </p:nvPr>
+        </p:nvSpPr>
+        <p:spPr>
+          <a:xfrm>
+            <a:off x="304800" y="322232"/>
+            <a:ext cx="5923735" cy="368935"/>
+          </a:xfrm>
+        </p:spPr>
+        <p:txBody>
+          <a:bodyPr/>
+          <a:lstStyle/>
+          <a:p>
+            <a:r>
+              <a:rPr lang="en-US" sz="2400" b="1" dirty="0"/>
+              <a:t>REST API </a:t>
+            </a:r>
+            <a:r>
+              <a:rPr lang="en-US" dirty="0"/>
+              <a:t>methods</a:t>
+            </a:r>
+            <a:endParaRPr lang="en-US" sz="2400" b="1" dirty="0"/>
+          </a:p>
+        </p:txBody>
+      </p:sp>
+      <p:sp>
+        <p:nvSpPr>
+          <p:cNvPr id="5" name="TextBox 4">
+            <a:extLst>
+              <a:ext uri="{FF2B5EF4-FFF2-40B4-BE49-F238E27FC236}">
+                <a16:creationId xmlns:a16="http://schemas.microsoft.com/office/drawing/2014/main" id="{04009FA7-51D2-A030-A4E8-979397E5EE72}"/>
+              </a:ext>
+            </a:extLst>
+          </p:cNvPr>
+          <p:cNvSpPr txBox="1"/>
+          <p:nvPr/>
+        </p:nvSpPr>
+        <p:spPr>
+          <a:xfrm>
+            <a:off x="512900" y="895350"/>
+            <a:ext cx="8478700" cy="523220"/>
+          </a:xfrm>
+          <a:prstGeom prst="rect">
+            <a:avLst/>
+          </a:prstGeom>
+          <a:noFill/>
+        </p:spPr>
+        <p:txBody>
+          <a:bodyPr wrap="square">
+            <a:spAutoFit/>
+          </a:bodyPr>
+          <a:lstStyle/>
+          <a:p>
+            <a:endParaRPr lang="en-US" sz="1400" dirty="0"/>
+          </a:p>
+          <a:p>
+            <a:endParaRPr lang="en-IN" sz="1400" dirty="0"/>
+          </a:p>
+        </p:txBody>
+      </p:sp>
+      <p:pic>
+        <p:nvPicPr>
+          <p:cNvPr id="7" name="Picture 6">
+            <a:extLst>
+              <a:ext uri="{FF2B5EF4-FFF2-40B4-BE49-F238E27FC236}">
+                <a16:creationId xmlns:a16="http://schemas.microsoft.com/office/drawing/2014/main" id="{BE7AC7EA-E241-2981-5A8A-4E0874EDFCDB}"/>
+              </a:ext>
+            </a:extLst>
+          </p:cNvPr>
+          <p:cNvPicPr>
+            <a:picLocks noChangeAspect="1"/>
+          </p:cNvPicPr>
+          <p:nvPr/>
+        </p:nvPicPr>
+        <p:blipFill>
+          <a:blip r:embed="rId2"/>
+          <a:stretch>
+            <a:fillRect/>
+          </a:stretch>
+        </p:blipFill>
+        <p:spPr>
+          <a:xfrm>
+            <a:off x="304800" y="1215588"/>
+            <a:ext cx="7131417" cy="2825895"/>
+          </a:xfrm>
+          <a:prstGeom prst="rect">
+            <a:avLst/>
+          </a:prstGeom>
+        </p:spPr>
+      </p:pic>
+    </p:spTree>
+    <p:extLst>
+      <p:ext uri="{BB962C8B-B14F-4D97-AF65-F5344CB8AC3E}">
+        <p14:creationId xmlns:p14="http://schemas.microsoft.com/office/powerpoint/2010/main" val="2494229122"/>
+      </p:ext>
+    </p:extLst>
+  </p:cSld>
+  <p:clrMapOvr>
+    <a:masterClrMapping/>
+  </p:clrMapOvr>
+</p:sld>
+</file>
+
+<file path=ppt/slides/slide36.xml><?xml version="1.0" encoding="utf-8"?>
+<p:sld xmlns:a="http://schemas.openxmlformats.org/drawingml/2006/main" xmlns:r="http://schemas.openxmlformats.org/officeDocument/2006/relationships" xmlns:p="http://schemas.openxmlformats.org/presentationml/2006/main">
+  <p:cSld>
+    <p:spTree>
+      <p:nvGrpSpPr>
+        <p:cNvPr id="1" name=""/>
+        <p:cNvGrpSpPr/>
+        <p:nvPr/>
+      </p:nvGrpSpPr>
+      <p:grpSpPr>
+        <a:xfrm>
+          <a:off x="0" y="0"/>
+          <a:ext cx="0" cy="0"/>
+          <a:chOff x="0" y="0"/>
+          <a:chExt cx="0" cy="0"/>
+        </a:xfrm>
+      </p:grpSpPr>
+      <p:sp>
+        <p:nvSpPr>
+          <p:cNvPr id="4" name="Title 3"/>
+          <p:cNvSpPr>
+            <a:spLocks noGrp="1"/>
+          </p:cNvSpPr>
+          <p:nvPr>
+            <p:ph type="title"/>
+          </p:nvPr>
+        </p:nvSpPr>
+        <p:spPr>
+          <a:xfrm>
+            <a:off x="304800" y="322232"/>
+            <a:ext cx="5923735" cy="368935"/>
+          </a:xfrm>
+        </p:spPr>
+        <p:txBody>
+          <a:bodyPr/>
+          <a:lstStyle/>
+          <a:p>
+            <a:r>
+              <a:rPr lang="en-IN" sz="2400" dirty="0"/>
+              <a:t>Example: Get Reports</a:t>
+            </a:r>
+          </a:p>
+        </p:txBody>
+      </p:sp>
+      <p:sp>
+        <p:nvSpPr>
+          <p:cNvPr id="5" name="TextBox 4">
+            <a:extLst>
+              <a:ext uri="{FF2B5EF4-FFF2-40B4-BE49-F238E27FC236}">
+                <a16:creationId xmlns:a16="http://schemas.microsoft.com/office/drawing/2014/main" id="{04009FA7-51D2-A030-A4E8-979397E5EE72}"/>
+              </a:ext>
+            </a:extLst>
+          </p:cNvPr>
+          <p:cNvSpPr txBox="1"/>
+          <p:nvPr/>
+        </p:nvSpPr>
+        <p:spPr>
+          <a:xfrm>
+            <a:off x="512900" y="895350"/>
+            <a:ext cx="8478700" cy="523220"/>
+          </a:xfrm>
+          <a:prstGeom prst="rect">
+            <a:avLst/>
+          </a:prstGeom>
+          <a:noFill/>
+        </p:spPr>
+        <p:txBody>
+          <a:bodyPr wrap="square">
+            <a:spAutoFit/>
+          </a:bodyPr>
+          <a:lstStyle/>
+          <a:p>
+            <a:endParaRPr lang="en-US" sz="1400" dirty="0"/>
+          </a:p>
+          <a:p>
+            <a:endParaRPr lang="en-IN" sz="1400" dirty="0"/>
+          </a:p>
+        </p:txBody>
+      </p:sp>
+      <p:sp>
+        <p:nvSpPr>
+          <p:cNvPr id="3" name="TextBox 2">
+            <a:extLst>
+              <a:ext uri="{FF2B5EF4-FFF2-40B4-BE49-F238E27FC236}">
+                <a16:creationId xmlns:a16="http://schemas.microsoft.com/office/drawing/2014/main" id="{D8121D0A-C273-A8DB-3358-781F8A3BF42F}"/>
+              </a:ext>
+            </a:extLst>
+          </p:cNvPr>
+          <p:cNvSpPr txBox="1"/>
+          <p:nvPr/>
+        </p:nvSpPr>
+        <p:spPr>
+          <a:xfrm>
+            <a:off x="381000" y="895350"/>
+            <a:ext cx="6477000" cy="954107"/>
+          </a:xfrm>
+          <a:prstGeom prst="rect">
+            <a:avLst/>
+          </a:prstGeom>
+          <a:noFill/>
+        </p:spPr>
+        <p:txBody>
+          <a:bodyPr wrap="square">
+            <a:spAutoFit/>
+          </a:bodyPr>
+          <a:lstStyle/>
+          <a:p>
+            <a:r>
+              <a:rPr lang="en-IN" sz="1400" dirty="0">
+                <a:latin typeface="+mn-lt"/>
+              </a:rPr>
+              <a:t>Suppose you want to retrieve reports from a workspace.</a:t>
+            </a:r>
+          </a:p>
+          <a:p>
+            <a:r>
+              <a:rPr lang="en-IN" sz="1400" dirty="0">
+                <a:latin typeface="+mn-lt"/>
+              </a:rPr>
+              <a:t>Your application sends a:</a:t>
+            </a:r>
+          </a:p>
+          <a:p>
+            <a:r>
+              <a:rPr lang="en-IN" sz="1400" dirty="0">
+                <a:latin typeface="+mn-lt"/>
+              </a:rPr>
+              <a:t>	GET Request</a:t>
+            </a:r>
+          </a:p>
+          <a:p>
+            <a:r>
+              <a:rPr lang="en-IN" sz="1400" dirty="0">
+                <a:latin typeface="+mn-lt"/>
+              </a:rPr>
+              <a:t>to the Power BI REST API.</a:t>
+            </a:r>
+          </a:p>
+        </p:txBody>
+      </p:sp>
+      <p:pic>
+        <p:nvPicPr>
+          <p:cNvPr id="8" name="Picture 7">
+            <a:extLst>
+              <a:ext uri="{FF2B5EF4-FFF2-40B4-BE49-F238E27FC236}">
+                <a16:creationId xmlns:a16="http://schemas.microsoft.com/office/drawing/2014/main" id="{50DEF50E-14C3-03B1-6C90-88D3D3818181}"/>
+              </a:ext>
+            </a:extLst>
+          </p:cNvPr>
+          <p:cNvPicPr>
+            <a:picLocks noChangeAspect="1"/>
+          </p:cNvPicPr>
+          <p:nvPr/>
+        </p:nvPicPr>
+        <p:blipFill>
+          <a:blip r:embed="rId2"/>
+          <a:stretch>
+            <a:fillRect/>
+          </a:stretch>
+        </p:blipFill>
+        <p:spPr>
+          <a:xfrm>
+            <a:off x="512900" y="2053640"/>
+            <a:ext cx="2806844" cy="2216264"/>
+          </a:xfrm>
+          <a:prstGeom prst="rect">
+            <a:avLst/>
+          </a:prstGeom>
+        </p:spPr>
+      </p:pic>
+      <p:pic>
+        <p:nvPicPr>
+          <p:cNvPr id="10" name="Picture 9">
+            <a:extLst>
+              <a:ext uri="{FF2B5EF4-FFF2-40B4-BE49-F238E27FC236}">
+                <a16:creationId xmlns:a16="http://schemas.microsoft.com/office/drawing/2014/main" id="{4DFE955D-EEF6-B914-980A-04163BC36418}"/>
+              </a:ext>
+            </a:extLst>
+          </p:cNvPr>
+          <p:cNvPicPr>
+            <a:picLocks noChangeAspect="1"/>
+          </p:cNvPicPr>
+          <p:nvPr/>
+        </p:nvPicPr>
+        <p:blipFill>
+          <a:blip r:embed="rId3"/>
+          <a:stretch>
+            <a:fillRect/>
+          </a:stretch>
+        </p:blipFill>
+        <p:spPr>
+          <a:xfrm>
+            <a:off x="4228855" y="1849457"/>
+            <a:ext cx="4762745" cy="2779693"/>
+          </a:xfrm>
+          <a:prstGeom prst="rect">
+            <a:avLst/>
+          </a:prstGeom>
+        </p:spPr>
+      </p:pic>
+    </p:spTree>
+    <p:extLst>
+      <p:ext uri="{BB962C8B-B14F-4D97-AF65-F5344CB8AC3E}">
+        <p14:creationId xmlns:p14="http://schemas.microsoft.com/office/powerpoint/2010/main" val="778544011"/>
+      </p:ext>
+    </p:extLst>
+  </p:cSld>
+  <p:clrMapOvr>
+    <a:masterClrMapping/>
+  </p:clrMapOvr>
+</p:sld>
+</file>
+
+<file path=ppt/slides/slide37.xml><?xml version="1.0" encoding="utf-8"?>
+<p:sld xmlns:a="http://schemas.openxmlformats.org/drawingml/2006/main" xmlns:r="http://schemas.openxmlformats.org/officeDocument/2006/relationships" xmlns:p="http://schemas.openxmlformats.org/presentationml/2006/main">
+  <p:cSld>
+    <p:spTree>
+      <p:nvGrpSpPr>
+        <p:cNvPr id="1" name=""/>
+        <p:cNvGrpSpPr/>
+        <p:nvPr/>
+      </p:nvGrpSpPr>
+      <p:grpSpPr>
+        <a:xfrm>
+          <a:off x="0" y="0"/>
+          <a:ext cx="0" cy="0"/>
+          <a:chOff x="0" y="0"/>
+          <a:chExt cx="0" cy="0"/>
+        </a:xfrm>
+      </p:grpSpPr>
+      <p:sp>
+        <p:nvSpPr>
+          <p:cNvPr id="4" name="Title 3"/>
+          <p:cNvSpPr>
+            <a:spLocks noGrp="1"/>
+          </p:cNvSpPr>
+          <p:nvPr>
+            <p:ph type="title"/>
+          </p:nvPr>
+        </p:nvSpPr>
+        <p:spPr>
+          <a:xfrm>
+            <a:off x="304800" y="322232"/>
+            <a:ext cx="5923735" cy="368935"/>
+          </a:xfrm>
+        </p:spPr>
+        <p:txBody>
+          <a:bodyPr/>
+          <a:lstStyle/>
+          <a:p>
+            <a:r>
+              <a:rPr lang="en-US" dirty="0"/>
+              <a:t>Power BI REST API Use Cases</a:t>
+            </a:r>
+            <a:endParaRPr lang="en-IN" sz="2400" dirty="0"/>
+          </a:p>
+        </p:txBody>
+      </p:sp>
+      <p:sp>
+        <p:nvSpPr>
+          <p:cNvPr id="5" name="TextBox 4">
+            <a:extLst>
+              <a:ext uri="{FF2B5EF4-FFF2-40B4-BE49-F238E27FC236}">
+                <a16:creationId xmlns:a16="http://schemas.microsoft.com/office/drawing/2014/main" id="{04009FA7-51D2-A030-A4E8-979397E5EE72}"/>
+              </a:ext>
+            </a:extLst>
+          </p:cNvPr>
+          <p:cNvSpPr txBox="1"/>
+          <p:nvPr/>
+        </p:nvSpPr>
+        <p:spPr>
+          <a:xfrm>
+            <a:off x="512900" y="895350"/>
+            <a:ext cx="8478700" cy="523220"/>
+          </a:xfrm>
+          <a:prstGeom prst="rect">
+            <a:avLst/>
+          </a:prstGeom>
+          <a:noFill/>
+        </p:spPr>
+        <p:txBody>
+          <a:bodyPr wrap="square">
+            <a:spAutoFit/>
+          </a:bodyPr>
+          <a:lstStyle/>
+          <a:p>
+            <a:endParaRPr lang="en-US" sz="1400" dirty="0"/>
+          </a:p>
+          <a:p>
+            <a:endParaRPr lang="en-IN" sz="1400" dirty="0"/>
+          </a:p>
+        </p:txBody>
+      </p:sp>
+      <p:sp>
+        <p:nvSpPr>
+          <p:cNvPr id="6" name="TextBox 5">
+            <a:extLst>
+              <a:ext uri="{FF2B5EF4-FFF2-40B4-BE49-F238E27FC236}">
+                <a16:creationId xmlns:a16="http://schemas.microsoft.com/office/drawing/2014/main" id="{F65D1946-9426-4E83-4A01-37D26D39097B}"/>
+              </a:ext>
+            </a:extLst>
+          </p:cNvPr>
+          <p:cNvSpPr txBox="1"/>
+          <p:nvPr/>
+        </p:nvSpPr>
+        <p:spPr>
+          <a:xfrm>
+            <a:off x="457200" y="715660"/>
+            <a:ext cx="7696200" cy="523220"/>
+          </a:xfrm>
+          <a:prstGeom prst="rect">
+            <a:avLst/>
+          </a:prstGeom>
+          <a:noFill/>
+        </p:spPr>
+        <p:txBody>
+          <a:bodyPr wrap="square">
+            <a:spAutoFit/>
+          </a:bodyPr>
+          <a:lstStyle/>
+          <a:p>
+            <a:r>
+              <a:rPr lang="en-US" sz="1400" b="1" dirty="0">
+                <a:latin typeface="+mn-lt"/>
+              </a:rPr>
+              <a:t>Use Case 1 — Refresh Semantic Model</a:t>
+            </a:r>
+          </a:p>
+          <a:p>
+            <a:r>
+              <a:rPr lang="en-US" sz="1400" dirty="0">
+                <a:latin typeface="+mn-lt"/>
+              </a:rPr>
+              <a:t>Instead of manually clicking </a:t>
+            </a:r>
+            <a:r>
+              <a:rPr lang="en-US" sz="1400" b="1" dirty="0">
+                <a:latin typeface="+mn-lt"/>
+              </a:rPr>
+              <a:t>Refresh</a:t>
+            </a:r>
+            <a:r>
+              <a:rPr lang="en-US" sz="1400" dirty="0">
+                <a:latin typeface="+mn-lt"/>
+              </a:rPr>
+              <a:t>, an application can trigger a refresh.</a:t>
+            </a:r>
+          </a:p>
+        </p:txBody>
+      </p:sp>
+      <p:pic>
+        <p:nvPicPr>
+          <p:cNvPr id="9" name="Picture 8">
+            <a:extLst>
+              <a:ext uri="{FF2B5EF4-FFF2-40B4-BE49-F238E27FC236}">
+                <a16:creationId xmlns:a16="http://schemas.microsoft.com/office/drawing/2014/main" id="{2B1593AC-9E89-20BF-9EF6-3D6C35EC8062}"/>
+              </a:ext>
+            </a:extLst>
+          </p:cNvPr>
+          <p:cNvPicPr>
+            <a:picLocks noChangeAspect="1"/>
+          </p:cNvPicPr>
+          <p:nvPr/>
+        </p:nvPicPr>
+        <p:blipFill>
+          <a:blip r:embed="rId2"/>
+          <a:stretch>
+            <a:fillRect/>
+          </a:stretch>
+        </p:blipFill>
+        <p:spPr>
+          <a:xfrm>
+            <a:off x="522640" y="1439052"/>
+            <a:ext cx="1720938" cy="1492327"/>
+          </a:xfrm>
+          <a:prstGeom prst="rect">
+            <a:avLst/>
+          </a:prstGeom>
+        </p:spPr>
+      </p:pic>
+    </p:spTree>
+    <p:extLst>
+      <p:ext uri="{BB962C8B-B14F-4D97-AF65-F5344CB8AC3E}">
+        <p14:creationId xmlns:p14="http://schemas.microsoft.com/office/powerpoint/2010/main" val="3035544933"/>
+      </p:ext>
+    </p:extLst>
+  </p:cSld>
+  <p:clrMapOvr>
+    <a:masterClrMapping/>
+  </p:clrMapOvr>
+</p:sld>
+</file>
+
+<file path=ppt/slides/slide38.xml><?xml version="1.0" encoding="utf-8"?>
+<p:sld xmlns:a="http://schemas.openxmlformats.org/drawingml/2006/main" xmlns:r="http://schemas.openxmlformats.org/officeDocument/2006/relationships" xmlns:p="http://schemas.openxmlformats.org/presentationml/2006/main">
+  <p:cSld>
+    <p:spTree>
+      <p:nvGrpSpPr>
+        <p:cNvPr id="1" name=""/>
+        <p:cNvGrpSpPr/>
+        <p:nvPr/>
+      </p:nvGrpSpPr>
+      <p:grpSpPr>
+        <a:xfrm>
+          <a:off x="0" y="0"/>
+          <a:ext cx="0" cy="0"/>
+          <a:chOff x="0" y="0"/>
+          <a:chExt cx="0" cy="0"/>
+        </a:xfrm>
+      </p:grpSpPr>
+      <p:sp>
+        <p:nvSpPr>
+          <p:cNvPr id="4" name="Title 3"/>
+          <p:cNvSpPr>
+            <a:spLocks noGrp="1"/>
+          </p:cNvSpPr>
+          <p:nvPr>
+            <p:ph type="title"/>
+          </p:nvPr>
+        </p:nvSpPr>
+        <p:spPr>
+          <a:xfrm>
+            <a:off x="304800" y="322232"/>
+            <a:ext cx="5923735" cy="368935"/>
+          </a:xfrm>
+        </p:spPr>
+        <p:txBody>
+          <a:bodyPr/>
+          <a:lstStyle/>
+          <a:p>
+            <a:r>
+              <a:rPr lang="en-US" dirty="0"/>
+              <a:t>Power BI REST API Use Cases</a:t>
+            </a:r>
+            <a:endParaRPr lang="en-IN" sz="2400" dirty="0"/>
+          </a:p>
+        </p:txBody>
+      </p:sp>
+      <p:sp>
+        <p:nvSpPr>
+          <p:cNvPr id="5" name="TextBox 4">
+            <a:extLst>
+              <a:ext uri="{FF2B5EF4-FFF2-40B4-BE49-F238E27FC236}">
+                <a16:creationId xmlns:a16="http://schemas.microsoft.com/office/drawing/2014/main" id="{04009FA7-51D2-A030-A4E8-979397E5EE72}"/>
+              </a:ext>
+            </a:extLst>
+          </p:cNvPr>
+          <p:cNvSpPr txBox="1"/>
+          <p:nvPr/>
+        </p:nvSpPr>
+        <p:spPr>
+          <a:xfrm>
+            <a:off x="512900" y="895350"/>
+            <a:ext cx="8478700" cy="523220"/>
+          </a:xfrm>
+          <a:prstGeom prst="rect">
+            <a:avLst/>
+          </a:prstGeom>
+          <a:noFill/>
+        </p:spPr>
+        <p:txBody>
+          <a:bodyPr wrap="square">
+            <a:spAutoFit/>
+          </a:bodyPr>
+          <a:lstStyle/>
+          <a:p>
+            <a:endParaRPr lang="en-US" sz="1400" dirty="0"/>
+          </a:p>
+          <a:p>
+            <a:endParaRPr lang="en-IN" sz="1400" dirty="0"/>
+          </a:p>
+        </p:txBody>
+      </p:sp>
+      <p:sp>
+        <p:nvSpPr>
+          <p:cNvPr id="6" name="TextBox 5">
+            <a:extLst>
+              <a:ext uri="{FF2B5EF4-FFF2-40B4-BE49-F238E27FC236}">
+                <a16:creationId xmlns:a16="http://schemas.microsoft.com/office/drawing/2014/main" id="{F65D1946-9426-4E83-4A01-37D26D39097B}"/>
+              </a:ext>
+            </a:extLst>
+          </p:cNvPr>
+          <p:cNvSpPr txBox="1"/>
+          <p:nvPr/>
+        </p:nvSpPr>
+        <p:spPr>
+          <a:xfrm>
+            <a:off x="457200" y="715660"/>
+            <a:ext cx="7696200" cy="523220"/>
+          </a:xfrm>
+          <a:prstGeom prst="rect">
+            <a:avLst/>
+          </a:prstGeom>
+          <a:noFill/>
+        </p:spPr>
+        <p:txBody>
+          <a:bodyPr wrap="square">
+            <a:spAutoFit/>
+          </a:bodyPr>
+          <a:lstStyle/>
+          <a:p>
+            <a:r>
+              <a:rPr lang="en-US" sz="1400" b="1" dirty="0">
+                <a:latin typeface="+mn-lt"/>
+              </a:rPr>
+              <a:t>Workspace Management</a:t>
+            </a:r>
+          </a:p>
+          <a:p>
+            <a:r>
+              <a:rPr lang="en-US" sz="1400" dirty="0">
+                <a:latin typeface="+mn-lt"/>
+              </a:rPr>
+              <a:t>Organizations can automate workspace-related operations</a:t>
+            </a:r>
+            <a:r>
+              <a:rPr lang="en-US" sz="1400" b="1" dirty="0">
+                <a:latin typeface="+mn-lt"/>
+              </a:rPr>
+              <a:t>.</a:t>
+            </a:r>
+            <a:endParaRPr lang="en-US" sz="1400" dirty="0">
+              <a:latin typeface="+mn-lt"/>
+            </a:endParaRPr>
+          </a:p>
+        </p:txBody>
+      </p:sp>
+      <p:pic>
+        <p:nvPicPr>
+          <p:cNvPr id="3" name="Picture 2">
+            <a:extLst>
+              <a:ext uri="{FF2B5EF4-FFF2-40B4-BE49-F238E27FC236}">
+                <a16:creationId xmlns:a16="http://schemas.microsoft.com/office/drawing/2014/main" id="{311CA37D-DFD4-A9C8-FC34-130BD7A4D85A}"/>
+              </a:ext>
+            </a:extLst>
+          </p:cNvPr>
+          <p:cNvPicPr>
+            <a:picLocks noChangeAspect="1"/>
+          </p:cNvPicPr>
+          <p:nvPr/>
+        </p:nvPicPr>
+        <p:blipFill>
+          <a:blip r:embed="rId2"/>
+          <a:stretch>
+            <a:fillRect/>
+          </a:stretch>
+        </p:blipFill>
+        <p:spPr>
+          <a:xfrm>
+            <a:off x="501441" y="1504950"/>
+            <a:ext cx="1562180" cy="1416123"/>
+          </a:xfrm>
+          <a:prstGeom prst="rect">
+            <a:avLst/>
+          </a:prstGeom>
+        </p:spPr>
+      </p:pic>
+      <p:sp>
+        <p:nvSpPr>
+          <p:cNvPr id="8" name="TextBox 7">
+            <a:extLst>
+              <a:ext uri="{FF2B5EF4-FFF2-40B4-BE49-F238E27FC236}">
+                <a16:creationId xmlns:a16="http://schemas.microsoft.com/office/drawing/2014/main" id="{5A492A02-F765-A887-4022-6437FD9A7FB9}"/>
+              </a:ext>
+            </a:extLst>
+          </p:cNvPr>
+          <p:cNvSpPr txBox="1"/>
+          <p:nvPr/>
+        </p:nvSpPr>
+        <p:spPr>
+          <a:xfrm>
+            <a:off x="304800" y="3187143"/>
+            <a:ext cx="7391400" cy="1384995"/>
+          </a:xfrm>
+          <a:prstGeom prst="rect">
+            <a:avLst/>
+          </a:prstGeom>
+          <a:noFill/>
+        </p:spPr>
+        <p:txBody>
+          <a:bodyPr wrap="square">
+            <a:spAutoFit/>
+          </a:bodyPr>
+          <a:lstStyle/>
+          <a:p>
+            <a:r>
+              <a:rPr lang="en-IN" sz="1400" b="1" dirty="0">
+                <a:latin typeface="+mn-lt"/>
+              </a:rPr>
+              <a:t>Report Management</a:t>
+            </a:r>
+          </a:p>
+          <a:p>
+            <a:r>
+              <a:rPr lang="en-IN" sz="1400" dirty="0">
+                <a:latin typeface="+mn-lt"/>
+              </a:rPr>
+              <a:t>Applications can retrieve information about:</a:t>
+            </a:r>
+          </a:p>
+          <a:p>
+            <a:pPr marL="342900" indent="-342900">
+              <a:buFont typeface="Arial" panose="020B0604020202020204" pitchFamily="34" charset="0"/>
+              <a:buChar char="•"/>
+            </a:pPr>
+            <a:r>
+              <a:rPr lang="en-IN" sz="1400" dirty="0">
+                <a:latin typeface="+mn-lt"/>
+              </a:rPr>
+              <a:t>Reports </a:t>
+            </a:r>
+          </a:p>
+          <a:p>
+            <a:pPr marL="342900" indent="-342900">
+              <a:buFont typeface="Arial" panose="020B0604020202020204" pitchFamily="34" charset="0"/>
+              <a:buChar char="•"/>
+            </a:pPr>
+            <a:r>
+              <a:rPr lang="en-IN" sz="1400" dirty="0">
+                <a:latin typeface="+mn-lt"/>
+              </a:rPr>
+              <a:t>Semantic models </a:t>
+            </a:r>
+          </a:p>
+          <a:p>
+            <a:pPr marL="342900" indent="-342900">
+              <a:buFont typeface="Arial" panose="020B0604020202020204" pitchFamily="34" charset="0"/>
+              <a:buChar char="•"/>
+            </a:pPr>
+            <a:r>
+              <a:rPr lang="en-IN" sz="1400" dirty="0">
+                <a:latin typeface="+mn-lt"/>
+              </a:rPr>
+              <a:t>Dashboards </a:t>
+            </a:r>
+          </a:p>
+          <a:p>
+            <a:pPr marL="342900" indent="-342900">
+              <a:buFont typeface="Arial" panose="020B0604020202020204" pitchFamily="34" charset="0"/>
+              <a:buChar char="•"/>
+            </a:pPr>
+            <a:r>
+              <a:rPr lang="en-IN" sz="1400" dirty="0">
+                <a:latin typeface="+mn-lt"/>
+              </a:rPr>
+              <a:t>Pages</a:t>
+            </a:r>
+          </a:p>
+        </p:txBody>
+      </p:sp>
+    </p:spTree>
+    <p:extLst>
+      <p:ext uri="{BB962C8B-B14F-4D97-AF65-F5344CB8AC3E}">
+        <p14:creationId xmlns:p14="http://schemas.microsoft.com/office/powerpoint/2010/main" val="1354592681"/>
+      </p:ext>
+    </p:extLst>
+  </p:cSld>
+  <p:clrMapOvr>
+    <a:masterClrMapping/>
+  </p:clrMapOvr>
+</p:sld>
+</file>
+
+<file path=ppt/slides/slide39.xml><?xml version="1.0" encoding="utf-8"?>
+<p:sld xmlns:a="http://schemas.openxmlformats.org/drawingml/2006/main" xmlns:r="http://schemas.openxmlformats.org/officeDocument/2006/relationships" xmlns:p="http://schemas.openxmlformats.org/presentationml/2006/main">
+  <p:cSld>
+    <p:spTree>
+      <p:nvGrpSpPr>
+        <p:cNvPr id="1" name=""/>
+        <p:cNvGrpSpPr/>
+        <p:nvPr/>
+      </p:nvGrpSpPr>
+      <p:grpSpPr>
+        <a:xfrm>
+          <a:off x="0" y="0"/>
+          <a:ext cx="0" cy="0"/>
+          <a:chOff x="0" y="0"/>
+          <a:chExt cx="0" cy="0"/>
+        </a:xfrm>
+      </p:grpSpPr>
+      <p:sp>
+        <p:nvSpPr>
+          <p:cNvPr id="4" name="Title 3"/>
+          <p:cNvSpPr>
+            <a:spLocks noGrp="1"/>
+          </p:cNvSpPr>
+          <p:nvPr>
+            <p:ph type="title"/>
+          </p:nvPr>
+        </p:nvSpPr>
+        <p:spPr>
+          <a:xfrm>
+            <a:off x="304800" y="322232"/>
+            <a:ext cx="5923735" cy="368935"/>
+          </a:xfrm>
+        </p:spPr>
+        <p:txBody>
+          <a:bodyPr/>
+          <a:lstStyle/>
+          <a:p>
+            <a:r>
+              <a:rPr lang="en-US" dirty="0"/>
+              <a:t>Power BI REST API Use Cases</a:t>
+            </a:r>
+            <a:endParaRPr lang="en-IN" sz="2400" dirty="0"/>
+          </a:p>
+        </p:txBody>
+      </p:sp>
+      <p:sp>
+        <p:nvSpPr>
+          <p:cNvPr id="5" name="TextBox 4">
+            <a:extLst>
+              <a:ext uri="{FF2B5EF4-FFF2-40B4-BE49-F238E27FC236}">
+                <a16:creationId xmlns:a16="http://schemas.microsoft.com/office/drawing/2014/main" id="{04009FA7-51D2-A030-A4E8-979397E5EE72}"/>
+              </a:ext>
+            </a:extLst>
+          </p:cNvPr>
+          <p:cNvSpPr txBox="1"/>
+          <p:nvPr/>
+        </p:nvSpPr>
+        <p:spPr>
+          <a:xfrm>
+            <a:off x="512900" y="895350"/>
+            <a:ext cx="8478700" cy="523220"/>
+          </a:xfrm>
+          <a:prstGeom prst="rect">
+            <a:avLst/>
+          </a:prstGeom>
+          <a:noFill/>
+        </p:spPr>
+        <p:txBody>
+          <a:bodyPr wrap="square">
+            <a:spAutoFit/>
+          </a:bodyPr>
+          <a:lstStyle/>
+          <a:p>
+            <a:endParaRPr lang="en-US" sz="1400" dirty="0"/>
+          </a:p>
+          <a:p>
+            <a:endParaRPr lang="en-IN" sz="1400" dirty="0"/>
+          </a:p>
+        </p:txBody>
+      </p:sp>
+      <p:sp>
+        <p:nvSpPr>
+          <p:cNvPr id="6" name="TextBox 5">
+            <a:extLst>
+              <a:ext uri="{FF2B5EF4-FFF2-40B4-BE49-F238E27FC236}">
+                <a16:creationId xmlns:a16="http://schemas.microsoft.com/office/drawing/2014/main" id="{F65D1946-9426-4E83-4A01-37D26D39097B}"/>
+              </a:ext>
+            </a:extLst>
+          </p:cNvPr>
+          <p:cNvSpPr txBox="1"/>
+          <p:nvPr/>
+        </p:nvSpPr>
+        <p:spPr>
+          <a:xfrm>
+            <a:off x="301935" y="787628"/>
+            <a:ext cx="7696200" cy="738664"/>
+          </a:xfrm>
+          <a:prstGeom prst="rect">
+            <a:avLst/>
+          </a:prstGeom>
+          <a:noFill/>
+        </p:spPr>
+        <p:txBody>
+          <a:bodyPr wrap="square">
+            <a:spAutoFit/>
+          </a:bodyPr>
+          <a:lstStyle/>
+          <a:p>
+            <a:r>
+              <a:rPr lang="en-US" sz="1400" b="1" dirty="0"/>
+              <a:t>Deployment Automation</a:t>
+            </a:r>
+          </a:p>
+          <a:p>
+            <a:r>
+              <a:rPr lang="en-US" sz="1400" dirty="0"/>
+              <a:t>REST APIs can be used as part of CI/CD processes.</a:t>
+            </a:r>
+          </a:p>
+          <a:p>
+            <a:endParaRPr lang="en-US" sz="1400" dirty="0">
+              <a:latin typeface="+mn-lt"/>
+            </a:endParaRPr>
+          </a:p>
+        </p:txBody>
+      </p:sp>
+      <p:pic>
+        <p:nvPicPr>
+          <p:cNvPr id="7" name="Picture 6">
+            <a:extLst>
+              <a:ext uri="{FF2B5EF4-FFF2-40B4-BE49-F238E27FC236}">
+                <a16:creationId xmlns:a16="http://schemas.microsoft.com/office/drawing/2014/main" id="{5821F93F-E760-38A3-8477-0D348ADD182B}"/>
+              </a:ext>
+            </a:extLst>
+          </p:cNvPr>
+          <p:cNvPicPr>
+            <a:picLocks noChangeAspect="1"/>
+          </p:cNvPicPr>
+          <p:nvPr/>
+        </p:nvPicPr>
+        <p:blipFill>
+          <a:blip r:embed="rId2"/>
+          <a:stretch>
+            <a:fillRect/>
+          </a:stretch>
+        </p:blipFill>
+        <p:spPr>
+          <a:xfrm>
+            <a:off x="762000" y="1851585"/>
+            <a:ext cx="1797142" cy="1873346"/>
+          </a:xfrm>
+          <a:prstGeom prst="rect">
+            <a:avLst/>
+          </a:prstGeom>
+        </p:spPr>
+      </p:pic>
+    </p:spTree>
+    <p:extLst>
+      <p:ext uri="{BB962C8B-B14F-4D97-AF65-F5344CB8AC3E}">
+        <p14:creationId xmlns:p14="http://schemas.microsoft.com/office/powerpoint/2010/main" val="175313874"/>
+      </p:ext>
+    </p:extLst>
+  </p:cSld>
+  <p:clrMapOvr>
+    <a:masterClrMapping/>
+  </p:clrMapOvr>
 </p:sld>
 </file>
 
@@ -6635,7 +9274,6 @@
               <a:rPr lang="en-US" altLang="en-GB" dirty="0"/>
               <a:t>The main reason for Fabric is unification.</a:t>
             </a:r>
-            <a:endParaRPr lang="en-US" altLang="en-GB" dirty="0"/>
           </a:p>
           <a:p>
             <a:pPr>
@@ -6647,7 +9285,6 @@
               <a:rPr lang="en-US" altLang="en-GB" dirty="0"/>
               <a:t>Without Fabric You may have:</a:t>
             </a:r>
-            <a:endParaRPr lang="en-US" altLang="en-GB" dirty="0"/>
           </a:p>
           <a:p>
             <a:pPr lvl="1">
@@ -6659,7 +9296,6 @@
               <a:rPr lang="en-US" altLang="en-GB" dirty="0"/>
               <a:t>Azure Data Factory</a:t>
             </a:r>
-            <a:endParaRPr lang="en-US" altLang="en-GB" dirty="0"/>
           </a:p>
           <a:p>
             <a:pPr lvl="1">
@@ -6671,7 +9307,6 @@
               <a:rPr lang="en-US" altLang="en-GB" dirty="0"/>
               <a:t>Azure Data Lake Storage</a:t>
             </a:r>
-            <a:endParaRPr lang="en-US" altLang="en-GB" dirty="0"/>
           </a:p>
           <a:p>
             <a:pPr lvl="1">
@@ -6683,7 +9318,6 @@
               <a:rPr lang="en-US" altLang="en-GB" dirty="0"/>
               <a:t>Azure Databricks</a:t>
             </a:r>
-            <a:endParaRPr lang="en-US" altLang="en-GB" dirty="0"/>
           </a:p>
           <a:p>
             <a:pPr lvl="1">
@@ -6695,7 +9329,6 @@
               <a:rPr lang="en-US" altLang="en-GB" dirty="0"/>
               <a:t>Synapse</a:t>
             </a:r>
-            <a:endParaRPr lang="en-US" altLang="en-GB" dirty="0"/>
           </a:p>
           <a:p>
             <a:pPr lvl="1">
@@ -6707,7 +9340,6 @@
               <a:rPr lang="en-US" altLang="en-GB" dirty="0"/>
               <a:t>Power BI</a:t>
             </a:r>
-            <a:endParaRPr lang="en-US" altLang="en-GB" dirty="0"/>
           </a:p>
           <a:p>
             <a:pPr lvl="1">
@@ -6719,7 +9351,6 @@
               <a:rPr lang="en-US" altLang="en-GB" dirty="0"/>
               <a:t>Separate security</a:t>
             </a:r>
-            <a:endParaRPr lang="en-US" altLang="en-GB" dirty="0"/>
           </a:p>
           <a:p>
             <a:pPr lvl="1">
@@ -6731,7 +9362,6 @@
               <a:rPr lang="en-US" altLang="en-GB" dirty="0"/>
               <a:t>Separate monitoring</a:t>
             </a:r>
-            <a:endParaRPr lang="en-US" altLang="en-GB" dirty="0"/>
           </a:p>
           <a:p>
             <a:pPr lvl="1">
@@ -6743,7 +9373,6 @@
               <a:rPr lang="en-US" altLang="en-GB" dirty="0"/>
               <a:t>Multiple tools</a:t>
             </a:r>
-            <a:endParaRPr lang="en-US" altLang="en-GB" dirty="0"/>
           </a:p>
           <a:p>
             <a:pPr lvl="0">
@@ -6755,7 +9384,6 @@
               <a:rPr lang="en-US" altLang="en-GB" dirty="0"/>
               <a:t>With Fabric</a:t>
             </a:r>
-            <a:endParaRPr lang="en-US" altLang="en-GB" dirty="0"/>
           </a:p>
           <a:p>
             <a:pPr lvl="0" indent="457200">
@@ -6767,7 +9395,6 @@
               <a:rPr lang="en-US" altLang="en-GB" dirty="0"/>
               <a:t>Many of these capabilities are available through a single SaaS analytics platform.</a:t>
             </a:r>
-            <a:endParaRPr lang="en-US" altLang="en-GB" dirty="0"/>
           </a:p>
         </p:txBody>
       </p:sp>
@@ -6776,13 +9403,123 @@
   <p:clrMapOvr>
     <a:masterClrMapping/>
   </p:clrMapOvr>
-  <p:timing>
-    <p:tnLst>
-      <p:par>
-        <p:cTn id="1" dur="indefinite" restart="never" nodeType="tmRoot"/>
-      </p:par>
-    </p:tnLst>
-  </p:timing>
+</p:sld>
+</file>
+
+<file path=ppt/slides/slide40.xml><?xml version="1.0" encoding="utf-8"?>
+<p:sld xmlns:a="http://schemas.openxmlformats.org/drawingml/2006/main" xmlns:r="http://schemas.openxmlformats.org/officeDocument/2006/relationships" xmlns:p="http://schemas.openxmlformats.org/presentationml/2006/main">
+  <p:cSld>
+    <p:spTree>
+      <p:nvGrpSpPr>
+        <p:cNvPr id="1" name=""/>
+        <p:cNvGrpSpPr/>
+        <p:nvPr/>
+      </p:nvGrpSpPr>
+      <p:grpSpPr>
+        <a:xfrm>
+          <a:off x="0" y="0"/>
+          <a:ext cx="0" cy="0"/>
+          <a:chOff x="0" y="0"/>
+          <a:chExt cx="0" cy="0"/>
+        </a:xfrm>
+      </p:grpSpPr>
+      <p:sp>
+        <p:nvSpPr>
+          <p:cNvPr id="2" name="object 2"/>
+          <p:cNvSpPr txBox="1">
+            <a:spLocks noGrp="1"/>
+          </p:cNvSpPr>
+          <p:nvPr>
+            <p:ph type="title"/>
+          </p:nvPr>
+        </p:nvSpPr>
+        <p:spPr>
+          <a:xfrm>
+            <a:off x="3268093" y="2233930"/>
+            <a:ext cx="2608580" cy="635000"/>
+          </a:xfrm>
+          <a:prstGeom prst="rect">
+            <a:avLst/>
+          </a:prstGeom>
+        </p:spPr>
+        <p:txBody>
+          <a:bodyPr vert="horz" wrap="square" lIns="0" tIns="12700" rIns="0" bIns="0" rtlCol="0">
+            <a:spAutoFit/>
+          </a:bodyPr>
+          <a:lstStyle/>
+          <a:p>
+            <a:pPr marL="12700">
+              <a:lnSpc>
+                <a:spcPct val="100000"/>
+              </a:lnSpc>
+              <a:spcBef>
+                <a:spcPts val="100"/>
+              </a:spcBef>
+            </a:pPr>
+            <a:r>
+              <a:rPr sz="4000" b="0" spc="275" dirty="0">
+                <a:solidFill>
+                  <a:srgbClr val="FFFFFF"/>
+                </a:solidFill>
+                <a:latin typeface="Calibri" panose="020F0502020204030204"/>
+                <a:cs typeface="Calibri" panose="020F0502020204030204"/>
+              </a:rPr>
+              <a:t>Thank</a:t>
+            </a:r>
+            <a:r>
+              <a:rPr sz="4000" b="0" spc="180" dirty="0">
+                <a:solidFill>
+                  <a:srgbClr val="FFFFFF"/>
+                </a:solidFill>
+                <a:latin typeface="Calibri" panose="020F0502020204030204"/>
+                <a:cs typeface="Calibri" panose="020F0502020204030204"/>
+              </a:rPr>
+              <a:t> </a:t>
+            </a:r>
+            <a:r>
+              <a:rPr sz="4000" b="0" spc="85" dirty="0">
+                <a:solidFill>
+                  <a:srgbClr val="FFFFFF"/>
+                </a:solidFill>
+                <a:latin typeface="Calibri" panose="020F0502020204030204"/>
+                <a:cs typeface="Calibri" panose="020F0502020204030204"/>
+              </a:rPr>
+              <a:t>You!</a:t>
+            </a:r>
+            <a:endParaRPr sz="4000">
+              <a:latin typeface="Calibri" panose="020F0502020204030204"/>
+              <a:cs typeface="Calibri" panose="020F0502020204030204"/>
+            </a:endParaRPr>
+          </a:p>
+        </p:txBody>
+      </p:sp>
+      <p:pic>
+        <p:nvPicPr>
+          <p:cNvPr id="3" name="object 3"/>
+          <p:cNvPicPr/>
+          <p:nvPr/>
+        </p:nvPicPr>
+        <p:blipFill>
+          <a:blip r:embed="rId2" cstate="print"/>
+          <a:stretch>
+            <a:fillRect/>
+          </a:stretch>
+        </p:blipFill>
+        <p:spPr>
+          <a:xfrm>
+            <a:off x="0" y="0"/>
+            <a:ext cx="2133336" cy="5137782"/>
+          </a:xfrm>
+          <a:prstGeom prst="rect">
+            <a:avLst/>
+          </a:prstGeom>
+        </p:spPr>
+      </p:pic>
+    </p:spTree>
+  </p:cSld>
+  <p:clrMapOvr>
+    <a:masterClrMapping/>
+  </p:clrMapOvr>
 </p:sld>
 </file>
 
@@ -6862,7 +9599,6 @@
               <a:rPr lang="en-US" altLang="en-GB" dirty="0"/>
               <a:t>One platform</a:t>
             </a:r>
-            <a:endParaRPr lang="en-US" altLang="en-GB" dirty="0"/>
           </a:p>
           <a:p>
             <a:pPr lvl="1">
@@ -6874,7 +9610,6 @@
               <a:rPr lang="en-US" altLang="en-GB" dirty="0"/>
               <a:t>OneLake centralized storage</a:t>
             </a:r>
-            <a:endParaRPr lang="en-US" altLang="en-GB" dirty="0"/>
           </a:p>
           <a:p>
             <a:pPr lvl="1">
@@ -6886,7 +9621,6 @@
               <a:rPr lang="en-US" altLang="en-GB" dirty="0"/>
               <a:t>Integrated workloads</a:t>
             </a:r>
-            <a:endParaRPr lang="en-US" altLang="en-GB" dirty="0"/>
           </a:p>
           <a:p>
             <a:pPr lvl="1">
@@ -6898,7 +9632,6 @@
               <a:rPr lang="en-US" altLang="en-GB" dirty="0"/>
               <a:t>Less data movement</a:t>
             </a:r>
-            <a:endParaRPr lang="en-US" altLang="en-GB" dirty="0"/>
           </a:p>
           <a:p>
             <a:pPr lvl="1">
@@ -6910,7 +9643,6 @@
               <a:rPr lang="en-US" altLang="en-GB" dirty="0"/>
               <a:t>Easy integration with Power BI</a:t>
             </a:r>
-            <a:endParaRPr lang="en-US" altLang="en-GB" dirty="0"/>
           </a:p>
           <a:p>
             <a:pPr lvl="1">
@@ -6922,7 +9654,6 @@
               <a:rPr lang="en-US" altLang="en-GB" dirty="0"/>
               <a:t>Centralized governance</a:t>
             </a:r>
-            <a:endParaRPr lang="en-US" altLang="en-GB" dirty="0"/>
           </a:p>
           <a:p>
             <a:pPr lvl="1">
@@ -6934,7 +9665,6 @@
               <a:rPr lang="en-US" altLang="en-GB" dirty="0"/>
               <a:t>Shared security</a:t>
             </a:r>
-            <a:endParaRPr lang="en-US" altLang="en-GB" dirty="0"/>
           </a:p>
           <a:p>
             <a:pPr lvl="1">
@@ -6946,7 +9676,6 @@
               <a:rPr lang="en-US" altLang="en-GB" dirty="0"/>
               <a:t>Data engineering with Spark</a:t>
             </a:r>
-            <a:endParaRPr lang="en-US" altLang="en-GB" dirty="0"/>
           </a:p>
           <a:p>
             <a:pPr lvl="1">
@@ -6958,7 +9687,6 @@
               <a:rPr lang="en-US" altLang="en-GB" dirty="0"/>
               <a:t>Data warehousing with SQL</a:t>
             </a:r>
-            <a:endParaRPr lang="en-US" altLang="en-GB" dirty="0"/>
           </a:p>
           <a:p>
             <a:pPr lvl="1">
@@ -6970,7 +9698,6 @@
               <a:rPr lang="en-US" altLang="en-GB" dirty="0"/>
               <a:t>Data pipelines and Dataflows</a:t>
             </a:r>
-            <a:endParaRPr lang="en-US" altLang="en-GB" dirty="0"/>
           </a:p>
           <a:p>
             <a:pPr lvl="1">
@@ -6982,7 +9709,6 @@
               <a:rPr lang="en-US" altLang="en-GB" dirty="0"/>
               <a:t>Real-time analytics</a:t>
             </a:r>
-            <a:endParaRPr lang="en-US" altLang="en-GB" dirty="0"/>
           </a:p>
           <a:p>
             <a:pPr lvl="1">
@@ -6994,7 +9720,6 @@
               <a:rPr lang="en-US" altLang="en-GB" dirty="0"/>
               <a:t>AI and data science capabilities</a:t>
             </a:r>
-            <a:endParaRPr lang="en-US" altLang="en-GB" dirty="0"/>
           </a:p>
         </p:txBody>
       </p:sp>
@@ -7003,13 +9728,6 @@
   <p:clrMapOvr>
     <a:masterClrMapping/>
   </p:clrMapOvr>
-  <p:timing>
-    <p:tnLst>
-      <p:par>
-        <p:cTn id="1" dur="indefinite" restart="never" nodeType="tmRoot"/>
-      </p:par>
-    </p:tnLst>
-  </p:timing>
 </p:sld>
 </file>
 
@@ -7089,7 +9807,6 @@
               <a:rPr lang="en-US" altLang="en-GB" dirty="0"/>
               <a:t>OneLake is Microsoft Fabric's unified, tenant-wide data lake that provides a single storage layer for Fabric workloads..</a:t>
             </a:r>
-            <a:endParaRPr lang="en-US" altLang="en-GB" dirty="0"/>
           </a:p>
         </p:txBody>
       </p:sp>
@@ -7102,7 +9819,7 @@
           <p:nvPr/>
         </p:nvPicPr>
         <p:blipFill>
-          <a:blip r:embed="rId1"/>
+          <a:blip r:embed="rId2"/>
           <a:stretch>
             <a:fillRect/>
           </a:stretch>
@@ -7122,13 +9839,6 @@
   <p:clrMapOvr>
     <a:masterClrMapping/>
   </p:clrMapOvr>
-  <p:timing>
-    <p:tnLst>
-      <p:par>
-        <p:cTn id="1" dur="indefinite" restart="never" nodeType="tmRoot"/>
-      </p:par>
-    </p:tnLst>
-  </p:timing>
 </p:sld>
 </file>
 
@@ -7173,7 +9883,6 @@
               <a:rPr lang="en-US" altLang="en-GB" sz="2000" dirty="0"/>
               <a:t>What is a Lakehouse?</a:t>
             </a:r>
-            <a:endParaRPr lang="en-US" altLang="en-GB" sz="2000" dirty="0"/>
           </a:p>
         </p:txBody>
       </p:sp>
@@ -7206,7 +9915,6 @@
               <a:rPr lang="en-US" altLang="en-GB" dirty="0"/>
               <a:t>A Lakehouse combines concepts of:</a:t>
             </a:r>
-            <a:endParaRPr lang="en-US" altLang="en-GB" dirty="0"/>
           </a:p>
           <a:p>
             <a:pPr lvl="1">
@@ -7218,7 +9926,6 @@
               <a:rPr lang="en-US" altLang="en-GB" dirty="0"/>
               <a:t>Data Lake</a:t>
             </a:r>
-            <a:endParaRPr lang="en-US" altLang="en-GB" dirty="0"/>
           </a:p>
           <a:p>
             <a:pPr lvl="1">
@@ -7230,7 +9937,6 @@
               <a:rPr lang="en-US" altLang="en-GB" dirty="0"/>
               <a:t>Data Warehouse</a:t>
             </a:r>
-            <a:endParaRPr lang="en-US" altLang="en-GB" dirty="0"/>
           </a:p>
           <a:p>
             <a:pPr lvl="0">
@@ -7242,7 +9948,6 @@
               <a:rPr lang="en-US" altLang="en-GB" dirty="0"/>
               <a:t>It allows us to store large amounts of data in a lake while also providing structured tables and SQL capabilities.</a:t>
             </a:r>
-            <a:endParaRPr lang="en-US" altLang="en-GB" dirty="0"/>
           </a:p>
         </p:txBody>
       </p:sp>
@@ -7255,7 +9960,7 @@
           <p:nvPr/>
         </p:nvPicPr>
         <p:blipFill>
-          <a:blip r:embed="rId1"/>
+          <a:blip r:embed="rId2"/>
           <a:stretch>
             <a:fillRect/>
           </a:stretch>
@@ -7275,13 +9980,6 @@
   <p:clrMapOvr>
     <a:masterClrMapping/>
   </p:clrMapOvr>
-  <p:timing>
-    <p:tnLst>
-      <p:par>
-        <p:cTn id="1" dur="indefinite" restart="never" nodeType="tmRoot"/>
-      </p:par>
-    </p:tnLst>
-  </p:timing>
 </p:sld>
 </file>
 
@@ -7326,7 +10024,6 @@
               <a:rPr lang="en-US" altLang="en-GB" sz="2000" dirty="0"/>
               <a:t>Lakehouse contains</a:t>
             </a:r>
-            <a:endParaRPr lang="en-US" altLang="en-GB" sz="2000" dirty="0"/>
           </a:p>
         </p:txBody>
       </p:sp>
@@ -7359,7 +10056,6 @@
               <a:rPr lang="en-US" altLang="en-GB" dirty="0"/>
               <a:t>A Lakehouse combines concepts of:</a:t>
             </a:r>
-            <a:endParaRPr lang="en-US" altLang="en-GB" dirty="0"/>
           </a:p>
           <a:p>
             <a:pPr lvl="1">
@@ -7371,7 +10067,6 @@
               <a:rPr lang="en-US" altLang="en-GB" dirty="0"/>
               <a:t>Data Lake</a:t>
             </a:r>
-            <a:endParaRPr lang="en-US" altLang="en-GB" dirty="0"/>
           </a:p>
           <a:p>
             <a:pPr lvl="1">
@@ -7383,7 +10078,6 @@
               <a:rPr lang="en-US" altLang="en-GB" dirty="0"/>
               <a:t>Data Warehouse</a:t>
             </a:r>
-            <a:endParaRPr lang="en-US" altLang="en-GB" dirty="0"/>
           </a:p>
           <a:p>
             <a:pPr lvl="0">
@@ -7395,7 +10089,6 @@
               <a:rPr lang="en-US" altLang="en-GB" dirty="0"/>
               <a:t>It allows us to store large amounts of data in a lake while also providing structured tables and SQL capabilities.</a:t>
             </a:r>
-            <a:endParaRPr lang="en-US" altLang="en-GB" dirty="0"/>
           </a:p>
         </p:txBody>
       </p:sp>
@@ -7408,7 +10101,7 @@
           <p:nvPr/>
         </p:nvPicPr>
         <p:blipFill>
-          <a:blip r:embed="rId1"/>
+          <a:blip r:embed="rId2"/>
           <a:stretch>
             <a:fillRect/>
           </a:stretch>
@@ -7428,13 +10121,6 @@
   <p:clrMapOvr>
     <a:masterClrMapping/>
   </p:clrMapOvr>
-  <p:timing>
-    <p:tnLst>
-      <p:par>
-        <p:cTn id="1" dur="indefinite" restart="never" nodeType="tmRoot"/>
-      </p:par>
-    </p:tnLst>
-  </p:timing>
 </p:sld>
 </file>
 
@@ -7479,7 +10165,6 @@
               <a:rPr lang="en-US" altLang="en-GB" sz="2000" dirty="0"/>
               <a:t>Lakehouse contains</a:t>
             </a:r>
-            <a:endParaRPr lang="en-US" altLang="en-GB" sz="2000" dirty="0"/>
           </a:p>
         </p:txBody>
       </p:sp>
@@ -7492,7 +10177,7 @@
           <p:nvPr/>
         </p:nvPicPr>
         <p:blipFill>
-          <a:blip r:embed="rId1"/>
+          <a:blip r:embed="rId2"/>
           <a:stretch>
             <a:fillRect/>
           </a:stretch>
@@ -7526,6 +10211,7 @@
           <a:bodyPr>
             <a:spAutoFit/>
           </a:bodyPr>
+          <a:lstStyle/>
           <a:p>
             <a:pPr>
               <a:spcAft>
@@ -7536,14 +10222,12 @@
               <a:rPr lang="en-US" altLang="zh-CN" sz="1400" b="1"/>
               <a:t>When to use Lakehouse?</a:t>
             </a:r>
-            <a:endParaRPr lang="en-US" altLang="zh-CN" sz="1400" b="1"/>
           </a:p>
           <a:p>
             <a:r>
               <a:rPr lang="en-US" altLang="zh-CN" sz="1600"/>
               <a:t>Use a Lakehouse when you need:</a:t>
             </a:r>
-            <a:endParaRPr lang="en-US" altLang="zh-CN" sz="1600"/>
           </a:p>
           <a:p>
             <a:pPr lvl="5">
@@ -7554,7 +10238,6 @@
               <a:rPr lang="en-US" altLang="zh-CN" sz="1600"/>
               <a:t> Spark </a:t>
             </a:r>
-            <a:endParaRPr lang="en-US" altLang="zh-CN" sz="1600"/>
           </a:p>
           <a:p>
             <a:pPr lvl="5">
@@ -7565,7 +10248,6 @@
               <a:rPr lang="en-US" altLang="zh-CN" sz="1600"/>
               <a:t> PySpark </a:t>
             </a:r>
-            <a:endParaRPr lang="en-US" altLang="zh-CN" sz="1600"/>
           </a:p>
           <a:p>
             <a:pPr lvl="5">
@@ -7576,7 +10258,6 @@
               <a:rPr lang="en-US" altLang="zh-CN" sz="1600"/>
               <a:t> Data engineering </a:t>
             </a:r>
-            <a:endParaRPr lang="en-US" altLang="zh-CN" sz="1600"/>
           </a:p>
           <a:p>
             <a:pPr lvl="5">
@@ -7587,7 +10268,6 @@
               <a:rPr lang="en-US" altLang="zh-CN" sz="1600"/>
               <a:t> Large-scale data processing </a:t>
             </a:r>
-            <a:endParaRPr lang="en-US" altLang="zh-CN" sz="1600"/>
           </a:p>
           <a:p>
             <a:pPr lvl="5">
@@ -7598,7 +10278,6 @@
               <a:rPr lang="en-US" altLang="zh-CN" sz="1600"/>
               <a:t> Data science </a:t>
             </a:r>
-            <a:endParaRPr lang="en-US" altLang="zh-CN" sz="1600"/>
           </a:p>
           <a:p>
             <a:pPr lvl="5">
@@ -7609,7 +10288,6 @@
               <a:rPr lang="en-US" altLang="zh-CN" sz="1600"/>
               <a:t> Semi-structured data </a:t>
             </a:r>
-            <a:endParaRPr lang="en-US" altLang="zh-CN" sz="1600"/>
           </a:p>
           <a:p>
             <a:pPr lvl="5">
@@ -7620,7 +10298,6 @@
               <a:rPr lang="en-US" altLang="zh-CN" sz="1600"/>
               <a:t> Structured data</a:t>
             </a:r>
-            <a:endParaRPr lang="en-US" altLang="zh-CN" sz="1600"/>
           </a:p>
         </p:txBody>
       </p:sp>
@@ -7629,13 +10306,6 @@
   <p:clrMapOvr>
     <a:masterClrMapping/>
   </p:clrMapOvr>
-  <p:timing>
-    <p:tnLst>
-      <p:par>
-        <p:cTn id="1" dur="indefinite" restart="never" nodeType="tmRoot"/>
-      </p:par>
-    </p:tnLst>
-  </p:timing>
 </p:sld>
 </file>
 
@@ -7917,6 +10587,8 @@
       </a:bgFillStyleLst>
     </a:fmtScheme>
   </a:themeElements>
+  <a:objectDefaults/>
+  <a:extraClrSchemeLst/>
   <a:extLst>
     <a:ext uri="{05A4C25C-085E-4340-85A3-A5531E510DB2}">
       <thm15:themeFamily xmlns:thm15="http://schemas.microsoft.com/office/thememl/2012/main" name="Office Theme" id="{62F939B6-93AF-4DB8-9C6B-D6C7DFDC589F}" vid="{4A3C46E8-61CC-4603-A589-7422A47A8E4A}"/>
@@ -8203,6 +10875,8 @@
       </a:bgFillStyleLst>
     </a:fmtScheme>
   </a:themeElements>
+  <a:objectDefaults/>
+  <a:extraClrSchemeLst/>
   <a:extLst>
     <a:ext uri="{05A4C25C-085E-4340-85A3-A5531E510DB2}">
       <thm15:themeFamily xmlns:thm15="http://schemas.microsoft.com/office/thememl/2012/main" name="Office Theme" id="{62F939B6-93AF-4DB8-9C6B-D6C7DFDC589F}" vid="{4A3C46E8-61CC-4603-A589-7422A47A8E4A}"/>
